--- a/reports/presentation/NBA_MVP_Prediction.pptx
+++ b/reports/presentation/NBA_MVP_Prediction.pptx
@@ -18,6 +18,21 @@
     <p:sldId id="266" r:id="rId17"/>
     <p:sldId id="267" r:id="rId18"/>
     <p:sldId id="268" r:id="rId19"/>
+    <p:sldId id="269" r:id="rId20"/>
+    <p:sldId id="270" r:id="rId21"/>
+    <p:sldId id="271" r:id="rId22"/>
+    <p:sldId id="272" r:id="rId23"/>
+    <p:sldId id="273" r:id="rId24"/>
+    <p:sldId id="274" r:id="rId25"/>
+    <p:sldId id="275" r:id="rId26"/>
+    <p:sldId id="276" r:id="rId27"/>
+    <p:sldId id="277" r:id="rId28"/>
+    <p:sldId id="278" r:id="rId29"/>
+    <p:sldId id="279" r:id="rId30"/>
+    <p:sldId id="280" r:id="rId31"/>
+    <p:sldId id="281" r:id="rId32"/>
+    <p:sldId id="282" r:id="rId33"/>
+    <p:sldId id="283" r:id="rId34"/>
   </p:sldIdLst>
   <p:sldSz cx="9144000" cy="6858000" type="screen4x3"/>
   <p:notesSz cx="6858000" cy="9144000"/>
@@ -3093,6 +3108,14 @@
 <file path=ppt/slides/slide1.xml><?xml version="1.0" encoding="utf-8"?>
 <p:sld xmlns:a="http://schemas.openxmlformats.org/drawingml/2006/main" xmlns:p="http://schemas.openxmlformats.org/presentationml/2006/main" xmlns:r="http://schemas.openxmlformats.org/officeDocument/2006/relationships">
   <p:cSld>
+    <p:bg>
+      <p:bgPr>
+        <a:solidFill>
+          <a:srgbClr val="1E3C72"/>
+        </a:solidFill>
+        <a:effectLst/>
+      </p:bgPr>
+    </p:bg>
     <p:spTree>
       <p:nvGrpSpPr>
         <p:cNvPr id="1" name=""/>
@@ -3102,46 +3125,108 @@
       <p:grpSpPr/>
       <p:sp>
         <p:nvSpPr>
-          <p:cNvPr id="2" name="Title 1"/>
-          <p:cNvSpPr>
-            <a:spLocks noGrp="1"/>
-          </p:cNvSpPr>
-          <p:nvPr>
-            <p:ph type="ctrTitle"/>
-          </p:nvPr>
-        </p:nvSpPr>
-        <p:spPr/>
-        <p:txBody>
-          <a:bodyPr/>
-          <a:lstStyle/>
-          <a:p>
-            <a:r>
-              <a:t>Predicting the NBA MVP with Machine Learning</a:t>
-            </a:r>
-          </a:p>
-        </p:txBody>
-      </p:sp>
-      <p:sp>
-        <p:nvSpPr>
-          <p:cNvPr id="3" name="Subtitle 2"/>
-          <p:cNvSpPr>
-            <a:spLocks noGrp="1"/>
-          </p:cNvSpPr>
-          <p:nvPr>
-            <p:ph type="subTitle" idx="1"/>
-          </p:nvPr>
-        </p:nvSpPr>
-        <p:spPr/>
-        <p:txBody>
-          <a:bodyPr/>
-          <a:lstStyle/>
-          <a:p>
-            <a:r>
-              <a:t>A comparison of Naive Bayes and Logistic Regression</a:t>
-            </a:r>
-          </a:p>
-          <a:p/>
-          <a:p>
+          <p:cNvPr id="2" name="TextBox 1"/>
+          <p:cNvSpPr txBox="1"/>
+          <p:nvPr/>
+        </p:nvSpPr>
+        <p:spPr>
+          <a:xfrm>
+            <a:off x="914400" y="2011680"/>
+            <a:ext cx="7315200" cy="1371600"/>
+          </a:xfrm>
+          <a:prstGeom prst="rect">
+            <a:avLst/>
+          </a:prstGeom>
+          <a:noFill/>
+        </p:spPr>
+        <p:txBody>
+          <a:bodyPr wrap="none">
+            <a:spAutoFit/>
+          </a:bodyPr>
+          <a:lstStyle/>
+          <a:p>
+            <a:pPr algn="ctr">
+              <a:defRPr sz="4000" b="1">
+                <a:solidFill>
+                  <a:srgbClr val="FFFFFF"/>
+                </a:solidFill>
+              </a:defRPr>
+            </a:pPr>
+            <a:r>
+              <a:t>Predicting the NBA MVP</a:t>
+            </a:r>
+          </a:p>
+          <a:p>
+            <a:r>
+              <a:t>with Machine Learning</a:t>
+            </a:r>
+          </a:p>
+        </p:txBody>
+      </p:sp>
+      <p:sp>
+        <p:nvSpPr>
+          <p:cNvPr id="3" name="TextBox 2"/>
+          <p:cNvSpPr txBox="1"/>
+          <p:nvPr/>
+        </p:nvSpPr>
+        <p:spPr>
+          <a:xfrm>
+            <a:off x="914400" y="3657600"/>
+            <a:ext cx="7315200" cy="1371600"/>
+          </a:xfrm>
+          <a:prstGeom prst="rect">
+            <a:avLst/>
+          </a:prstGeom>
+          <a:noFill/>
+        </p:spPr>
+        <p:txBody>
+          <a:bodyPr wrap="none">
+            <a:spAutoFit/>
+          </a:bodyPr>
+          <a:lstStyle/>
+          <a:p>
+            <a:pPr algn="ctr">
+              <a:defRPr sz="2200">
+                <a:solidFill>
+                  <a:srgbClr val="DCDCDC"/>
+                </a:solidFill>
+              </a:defRPr>
+            </a:pPr>
+            <a:r>
+              <a:t>A Comparative Study of Naive Bayes and Logistic Regression</a:t>
+            </a:r>
+          </a:p>
+        </p:txBody>
+      </p:sp>
+      <p:sp>
+        <p:nvSpPr>
+          <p:cNvPr id="4" name="TextBox 3"/>
+          <p:cNvSpPr txBox="1"/>
+          <p:nvPr/>
+        </p:nvSpPr>
+        <p:spPr>
+          <a:xfrm>
+            <a:off x="914400" y="5943600"/>
+            <a:ext cx="7315200" cy="457200"/>
+          </a:xfrm>
+          <a:prstGeom prst="rect">
+            <a:avLst/>
+          </a:prstGeom>
+          <a:noFill/>
+        </p:spPr>
+        <p:txBody>
+          <a:bodyPr wrap="none">
+            <a:spAutoFit/>
+          </a:bodyPr>
+          <a:lstStyle/>
+          <a:p>
+            <a:pPr algn="ctr">
+              <a:defRPr sz="1600">
+                <a:solidFill>
+                  <a:srgbClr val="B4B4B4"/>
+                </a:solidFill>
+              </a:defRPr>
+            </a:pPr>
             <a:r>
               <a:t>UE24CS352A — Machine Learning Mini Project</a:t>
             </a:r>
@@ -3159,6 +3244,14 @@
 <file path=ppt/slides/slide10.xml><?xml version="1.0" encoding="utf-8"?>
 <p:sld xmlns:a="http://schemas.openxmlformats.org/drawingml/2006/main" xmlns:p="http://schemas.openxmlformats.org/presentationml/2006/main" xmlns:r="http://schemas.openxmlformats.org/officeDocument/2006/relationships">
   <p:cSld>
+    <p:bg>
+      <p:bgPr>
+        <a:solidFill>
+          <a:srgbClr val="2A5298"/>
+        </a:solidFill>
+        <a:effectLst/>
+      </p:bgPr>
+    </p:bg>
     <p:spTree>
       <p:nvGrpSpPr>
         <p:cNvPr id="1" name=""/>
@@ -3168,19 +3261,37 @@
       <p:grpSpPr/>
       <p:sp>
         <p:nvSpPr>
-          <p:cNvPr id="2" name="Title 1"/>
-          <p:cNvSpPr>
-            <a:spLocks noGrp="1"/>
-          </p:cNvSpPr>
-          <p:nvPr>
-            <p:ph type="title"/>
-          </p:nvPr>
-        </p:nvSpPr>
-        <p:spPr/>
-        <p:txBody>
-          <a:bodyPr/>
-          <a:lstStyle/>
-          <a:p/>
+          <p:cNvPr id="2" name="TextBox 1"/>
+          <p:cNvSpPr txBox="1"/>
+          <p:nvPr/>
+        </p:nvSpPr>
+        <p:spPr>
+          <a:xfrm>
+            <a:off x="914400" y="2286000"/>
+            <a:ext cx="7315200" cy="914400"/>
+          </a:xfrm>
+          <a:prstGeom prst="rect">
+            <a:avLst/>
+          </a:prstGeom>
+          <a:noFill/>
+        </p:spPr>
+        <p:txBody>
+          <a:bodyPr wrap="none">
+            <a:spAutoFit/>
+          </a:bodyPr>
+          <a:lstStyle/>
+          <a:p>
+            <a:pPr algn="ctr">
+              <a:defRPr sz="2400" b="1">
+                <a:solidFill>
+                  <a:srgbClr val="B4C8E6"/>
+                </a:solidFill>
+              </a:defRPr>
+            </a:pPr>
+            <a:r>
+              <a:t>PART 03</a:t>
+            </a:r>
+          </a:p>
         </p:txBody>
       </p:sp>
       <p:sp>
@@ -3191,8 +3302,8 @@
         </p:nvSpPr>
         <p:spPr>
           <a:xfrm>
-            <a:off x="457200" y="274320"/>
-            <a:ext cx="8229600" cy="731520"/>
+            <a:off x="914400" y="3017520"/>
+            <a:ext cx="7315200" cy="1097280"/>
           </a:xfrm>
           <a:prstGeom prst="rect">
             <a:avLst/>
@@ -3205,11 +3316,120 @@
           </a:bodyPr>
           <a:lstStyle/>
           <a:p>
-            <a:pPr>
-              <a:defRPr sz="3200" b="1"/>
-            </a:pPr>
-            <a:r>
-              <a:t>Feature Importance — Logistic Regression</a:t>
+            <a:pPr algn="ctr">
+              <a:defRPr sz="4400" b="1">
+                <a:solidFill>
+                  <a:srgbClr val="FFFFFF"/>
+                </a:solidFill>
+              </a:defRPr>
+            </a:pPr>
+            <a:r>
+              <a:t>Methodology &amp; Workflow</a:t>
+            </a:r>
+          </a:p>
+        </p:txBody>
+      </p:sp>
+    </p:spTree>
+  </p:cSld>
+  <p:clrMapOvr>
+    <a:masterClrMapping/>
+  </p:clrMapOvr>
+</p:sld>
+</file>
+
+<file path=ppt/slides/slide11.xml><?xml version="1.0" encoding="utf-8"?>
+<p:sld xmlns:a="http://schemas.openxmlformats.org/drawingml/2006/main" xmlns:p="http://schemas.openxmlformats.org/presentationml/2006/main" xmlns:r="http://schemas.openxmlformats.org/officeDocument/2006/relationships">
+  <p:cSld>
+    <p:bg>
+      <p:bgPr>
+        <a:solidFill>
+          <a:srgbClr val="FFFFFF"/>
+        </a:solidFill>
+        <a:effectLst/>
+      </p:bgPr>
+    </p:bg>
+    <p:spTree>
+      <p:nvGrpSpPr>
+        <p:cNvPr id="1" name=""/>
+        <p:cNvGrpSpPr/>
+        <p:nvPr/>
+      </p:nvGrpSpPr>
+      <p:grpSpPr/>
+      <p:sp>
+        <p:nvSpPr>
+          <p:cNvPr id="2" name="Rectangle 1"/>
+          <p:cNvSpPr/>
+          <p:nvPr/>
+        </p:nvSpPr>
+        <p:spPr>
+          <a:xfrm>
+            <a:off x="0" y="0"/>
+            <a:ext cx="9144000" cy="1005840"/>
+          </a:xfrm>
+          <a:prstGeom prst="rect">
+            <a:avLst/>
+          </a:prstGeom>
+          <a:solidFill>
+            <a:srgbClr val="1E3C72"/>
+          </a:solidFill>
+          <a:ln>
+            <a:noFill/>
+          </a:ln>
+        </p:spPr>
+        <p:style>
+          <a:lnRef idx="1">
+            <a:schemeClr val="accent1"/>
+          </a:lnRef>
+          <a:fillRef idx="3">
+            <a:schemeClr val="accent1"/>
+          </a:fillRef>
+          <a:effectRef idx="2">
+            <a:schemeClr val="accent1"/>
+          </a:effectRef>
+          <a:fontRef idx="minor">
+            <a:schemeClr val="lt1"/>
+          </a:fontRef>
+        </p:style>
+        <p:txBody>
+          <a:bodyPr rtlCol="0" anchor="ctr"/>
+          <a:lstStyle/>
+          <a:p>
+            <a:pPr algn="ctr"/>
+          </a:p>
+        </p:txBody>
+      </p:sp>
+      <p:sp>
+        <p:nvSpPr>
+          <p:cNvPr id="3" name="TextBox 2"/>
+          <p:cNvSpPr txBox="1"/>
+          <p:nvPr/>
+        </p:nvSpPr>
+        <p:spPr>
+          <a:xfrm>
+            <a:off x="457200" y="228600"/>
+            <a:ext cx="8229600" cy="640080"/>
+          </a:xfrm>
+          <a:prstGeom prst="rect">
+            <a:avLst/>
+          </a:prstGeom>
+          <a:noFill/>
+        </p:spPr>
+        <p:txBody>
+          <a:bodyPr wrap="none">
+            <a:spAutoFit/>
+          </a:bodyPr>
+          <a:lstStyle/>
+          <a:p>
+            <a:pPr>
+              <a:defRPr sz="2800" b="1">
+                <a:solidFill>
+                  <a:srgbClr val="FFFFFF"/>
+                </a:solidFill>
+                <a:latin typeface="Calibri"/>
+              </a:defRPr>
+            </a:pPr>
+            <a:r>
+              <a:t>Project Workflow</a:t>
             </a:r>
           </a:p>
         </p:txBody>
@@ -3222,8 +3442,8 @@
         </p:nvSpPr>
         <p:spPr>
           <a:xfrm>
-            <a:off x="457200" y="1188720"/>
-            <a:ext cx="2743200" cy="5486400"/>
+            <a:off x="457200" y="1280160"/>
+            <a:ext cx="8229600" cy="365760"/>
           </a:xfrm>
           <a:prstGeom prst="rect">
             <a:avLst/>
@@ -3237,71 +3457,2327 @@
           <a:lstStyle/>
           <a:p>
             <a:pPr>
-              <a:defRPr sz="1600"/>
-            </a:pPr>
-            <a:r>
-              <a:t>Top positive predictors:</a:t>
-            </a:r>
-          </a:p>
-          <a:p>
-            <a:pPr>
-              <a:defRPr sz="1600"/>
-            </a:pPr>
-            <a:r>
-              <a:t>• Assists per game</a:t>
-            </a:r>
-          </a:p>
-          <a:p>
-            <a:pPr>
-              <a:defRPr sz="1600"/>
-            </a:pPr>
-            <a:r>
-              <a:t>• Free throw %</a:t>
-            </a:r>
-          </a:p>
-          <a:p>
-            <a:pPr>
-              <a:defRPr sz="1600"/>
-            </a:pPr>
-            <a:r>
-              <a:t>• Points per game</a:t>
-            </a:r>
-          </a:p>
-          <a:p>
-            <a:pPr>
-              <a:defRPr sz="1600"/>
-            </a:pPr>
-            <a:r>
-              <a:t>• Blocks per game</a:t>
-            </a:r>
-          </a:p>
-          <a:p>
-            <a:pPr>
-              <a:defRPr sz="1600"/>
-            </a:pPr>
-            <a:r>
-              <a:t>• Rebounds per game</a:t>
-            </a:r>
-          </a:p>
-          <a:p>
-            <a:pPr>
-              <a:defRPr sz="1600"/>
-            </a:pPr>
-          </a:p>
-          <a:p>
-            <a:pPr>
-              <a:defRPr sz="1600"/>
-            </a:pPr>
-            <a:r>
-              <a:t>Negative:</a:t>
-            </a:r>
-          </a:p>
-          <a:p>
-            <a:pPr>
-              <a:defRPr sz="1600"/>
-            </a:pPr>
-            <a:r>
-              <a:t>• Minutes per game</a:t>
+              <a:defRPr sz="1600" i="1">
+                <a:solidFill>
+                  <a:srgbClr val="333333"/>
+                </a:solidFill>
+              </a:defRPr>
+            </a:pPr>
+            <a:r>
+              <a:t>End-to-end pipeline from raw data to final deliverables</a:t>
+            </a:r>
+          </a:p>
+        </p:txBody>
+      </p:sp>
+      <p:sp>
+        <p:nvSpPr>
+          <p:cNvPr id="5" name="TextBox 4"/>
+          <p:cNvSpPr txBox="1"/>
+          <p:nvPr/>
+        </p:nvSpPr>
+        <p:spPr>
+          <a:xfrm>
+            <a:off x="548640" y="1737360"/>
+            <a:ext cx="8046720" cy="5029200"/>
+          </a:xfrm>
+          <a:prstGeom prst="rect">
+            <a:avLst/>
+          </a:prstGeom>
+          <a:noFill/>
+        </p:spPr>
+        <p:txBody>
+          <a:bodyPr wrap="square">
+            <a:spAutoFit/>
+          </a:bodyPr>
+          <a:lstStyle/>
+          <a:p>
+            <a:pPr>
+              <a:spcAft>
+                <a:spcPts val="600"/>
+              </a:spcAft>
+              <a:defRPr sz="2000">
+                <a:solidFill>
+                  <a:srgbClr val="333333"/>
+                </a:solidFill>
+              </a:defRPr>
+            </a:pPr>
+            <a:r>
+              <a:t>1. Data Collection — download Kaggle/Basketball-Reference dataset</a:t>
+            </a:r>
+          </a:p>
+          <a:p>
+            <a:pPr>
+              <a:spcAft>
+                <a:spcPts val="600"/>
+              </a:spcAft>
+              <a:defRPr sz="2000">
+                <a:solidFill>
+                  <a:srgbClr val="333333"/>
+                </a:solidFill>
+              </a:defRPr>
+            </a:pPr>
+            <a:r>
+              <a:t>2. Data Cleaning — filter seasons, select top 3 finalists, build labels</a:t>
+            </a:r>
+          </a:p>
+          <a:p>
+            <a:pPr>
+              <a:spcAft>
+                <a:spcPts val="600"/>
+              </a:spcAft>
+              <a:defRPr sz="2000">
+                <a:solidFill>
+                  <a:srgbClr val="333333"/>
+                </a:solidFill>
+              </a:defRPr>
+            </a:pPr>
+            <a:r>
+              <a:t>3. Feature Selection — keep 10 per-game statistics</a:t>
+            </a:r>
+          </a:p>
+          <a:p>
+            <a:pPr>
+              <a:spcAft>
+                <a:spcPts val="600"/>
+              </a:spcAft>
+              <a:defRPr sz="2000">
+                <a:solidFill>
+                  <a:srgbClr val="333333"/>
+                </a:solidFill>
+              </a:defRPr>
+            </a:pPr>
+            <a:r>
+              <a:t>4. Train-Test Split — chronological split: 2000-2016 train, 2017-2020 test</a:t>
+            </a:r>
+          </a:p>
+          <a:p>
+            <a:pPr>
+              <a:spcAft>
+                <a:spcPts val="600"/>
+              </a:spcAft>
+              <a:defRPr sz="2000">
+                <a:solidFill>
+                  <a:srgbClr val="333333"/>
+                </a:solidFill>
+              </a:defRPr>
+            </a:pPr>
+            <a:r>
+              <a:t>5. Model Training — Naive Bayes and Logistic Regression</a:t>
+            </a:r>
+          </a:p>
+          <a:p>
+            <a:pPr>
+              <a:spcAft>
+                <a:spcPts val="600"/>
+              </a:spcAft>
+              <a:defRPr sz="2000">
+                <a:solidFill>
+                  <a:srgbClr val="333333"/>
+                </a:solidFill>
+              </a:defRPr>
+            </a:pPr>
+            <a:r>
+              <a:t>6. Evaluation — pure and seasonal prediction modes</a:t>
+            </a:r>
+          </a:p>
+          <a:p>
+            <a:pPr>
+              <a:spcAft>
+                <a:spcPts val="600"/>
+              </a:spcAft>
+              <a:defRPr sz="2000">
+                <a:solidFill>
+                  <a:srgbClr val="333333"/>
+                </a:solidFill>
+              </a:defRPr>
+            </a:pPr>
+            <a:r>
+              <a:t>7. Visualization &amp; Reporting — plots, poster, slides, viva report</a:t>
+            </a:r>
+          </a:p>
+        </p:txBody>
+      </p:sp>
+    </p:spTree>
+  </p:cSld>
+  <p:clrMapOvr>
+    <a:masterClrMapping/>
+  </p:clrMapOvr>
+</p:sld>
+</file>
+
+<file path=ppt/slides/slide12.xml><?xml version="1.0" encoding="utf-8"?>
+<p:sld xmlns:a="http://schemas.openxmlformats.org/drawingml/2006/main" xmlns:p="http://schemas.openxmlformats.org/presentationml/2006/main" xmlns:r="http://schemas.openxmlformats.org/officeDocument/2006/relationships">
+  <p:cSld>
+    <p:bg>
+      <p:bgPr>
+        <a:solidFill>
+          <a:srgbClr val="FFFFFF"/>
+        </a:solidFill>
+        <a:effectLst/>
+      </p:bgPr>
+    </p:bg>
+    <p:spTree>
+      <p:nvGrpSpPr>
+        <p:cNvPr id="1" name=""/>
+        <p:cNvGrpSpPr/>
+        <p:nvPr/>
+      </p:nvGrpSpPr>
+      <p:grpSpPr/>
+      <p:sp>
+        <p:nvSpPr>
+          <p:cNvPr id="2" name="Rectangle 1"/>
+          <p:cNvSpPr/>
+          <p:nvPr/>
+        </p:nvSpPr>
+        <p:spPr>
+          <a:xfrm>
+            <a:off x="0" y="0"/>
+            <a:ext cx="9144000" cy="1005840"/>
+          </a:xfrm>
+          <a:prstGeom prst="rect">
+            <a:avLst/>
+          </a:prstGeom>
+          <a:solidFill>
+            <a:srgbClr val="1E3C72"/>
+          </a:solidFill>
+          <a:ln>
+            <a:noFill/>
+          </a:ln>
+        </p:spPr>
+        <p:style>
+          <a:lnRef idx="1">
+            <a:schemeClr val="accent1"/>
+          </a:lnRef>
+          <a:fillRef idx="3">
+            <a:schemeClr val="accent1"/>
+          </a:fillRef>
+          <a:effectRef idx="2">
+            <a:schemeClr val="accent1"/>
+          </a:effectRef>
+          <a:fontRef idx="minor">
+            <a:schemeClr val="lt1"/>
+          </a:fontRef>
+        </p:style>
+        <p:txBody>
+          <a:bodyPr rtlCol="0" anchor="ctr"/>
+          <a:lstStyle/>
+          <a:p>
+            <a:pPr algn="ctr"/>
+          </a:p>
+        </p:txBody>
+      </p:sp>
+      <p:sp>
+        <p:nvSpPr>
+          <p:cNvPr id="3" name="TextBox 2"/>
+          <p:cNvSpPr txBox="1"/>
+          <p:nvPr/>
+        </p:nvSpPr>
+        <p:spPr>
+          <a:xfrm>
+            <a:off x="457200" y="228600"/>
+            <a:ext cx="8229600" cy="640080"/>
+          </a:xfrm>
+          <a:prstGeom prst="rect">
+            <a:avLst/>
+          </a:prstGeom>
+          <a:noFill/>
+        </p:spPr>
+        <p:txBody>
+          <a:bodyPr wrap="none">
+            <a:spAutoFit/>
+          </a:bodyPr>
+          <a:lstStyle/>
+          <a:p>
+            <a:pPr>
+              <a:defRPr sz="2800" b="1">
+                <a:solidFill>
+                  <a:srgbClr val="FFFFFF"/>
+                </a:solidFill>
+                <a:latin typeface="Calibri"/>
+              </a:defRPr>
+            </a:pPr>
+            <a:r>
+              <a:t>Our Two Models</a:t>
+            </a:r>
+          </a:p>
+        </p:txBody>
+      </p:sp>
+      <p:sp>
+        <p:nvSpPr>
+          <p:cNvPr id="4" name="Rounded Rectangle 3"/>
+          <p:cNvSpPr/>
+          <p:nvPr/>
+        </p:nvSpPr>
+        <p:spPr>
+          <a:xfrm>
+            <a:off x="365760" y="1280160"/>
+            <a:ext cx="4114800" cy="5120640"/>
+          </a:xfrm>
+          <a:prstGeom prst="roundRect">
+            <a:avLst/>
+          </a:prstGeom>
+          <a:solidFill>
+            <a:srgbClr val="E8F4F8"/>
+          </a:solidFill>
+          <a:ln w="19050">
+            <a:solidFill>
+              <a:srgbClr val="2A5298"/>
+            </a:solidFill>
+          </a:ln>
+        </p:spPr>
+        <p:style>
+          <a:lnRef idx="1">
+            <a:schemeClr val="accent1"/>
+          </a:lnRef>
+          <a:fillRef idx="3">
+            <a:schemeClr val="accent1"/>
+          </a:fillRef>
+          <a:effectRef idx="2">
+            <a:schemeClr val="accent1"/>
+          </a:effectRef>
+          <a:fontRef idx="minor">
+            <a:schemeClr val="lt1"/>
+          </a:fontRef>
+        </p:style>
+        <p:txBody>
+          <a:bodyPr rtlCol="0" anchor="ctr"/>
+          <a:lstStyle/>
+          <a:p>
+            <a:pPr algn="ctr"/>
+          </a:p>
+        </p:txBody>
+      </p:sp>
+      <p:sp>
+        <p:nvSpPr>
+          <p:cNvPr id="5" name="TextBox 4"/>
+          <p:cNvSpPr txBox="1"/>
+          <p:nvPr/>
+        </p:nvSpPr>
+        <p:spPr>
+          <a:xfrm>
+            <a:off x="548640" y="1463040"/>
+            <a:ext cx="3749039" cy="4754880"/>
+          </a:xfrm>
+          <a:prstGeom prst="rect">
+            <a:avLst/>
+          </a:prstGeom>
+          <a:noFill/>
+        </p:spPr>
+        <p:txBody>
+          <a:bodyPr wrap="square">
+            <a:spAutoFit/>
+          </a:bodyPr>
+          <a:lstStyle/>
+          <a:p>
+            <a:pPr>
+              <a:spcAft>
+                <a:spcPts val="800"/>
+              </a:spcAft>
+              <a:defRPr sz="2000" b="1">
+                <a:solidFill>
+                  <a:srgbClr val="1E3C72"/>
+                </a:solidFill>
+              </a:defRPr>
+            </a:pPr>
+            <a:r>
+              <a:t>Naive Bayes</a:t>
+            </a:r>
+          </a:p>
+          <a:p>
+            <a:pPr>
+              <a:spcAft>
+                <a:spcPts val="600"/>
+              </a:spcAft>
+              <a:defRPr sz="1800">
+                <a:solidFill>
+                  <a:srgbClr val="333333"/>
+                </a:solidFill>
+              </a:defRPr>
+            </a:pPr>
+            <a:r>
+              <a:t>Type: Generative classifier</a:t>
+            </a:r>
+          </a:p>
+          <a:p>
+            <a:pPr>
+              <a:spcAft>
+                <a:spcPts val="600"/>
+              </a:spcAft>
+              <a:defRPr sz="1800">
+                <a:solidFill>
+                  <a:srgbClr val="333333"/>
+                </a:solidFill>
+              </a:defRPr>
+            </a:pPr>
+            <a:r>
+              <a:t>Learns P(features | class)</a:t>
+            </a:r>
+          </a:p>
+          <a:p>
+            <a:pPr>
+              <a:spcAft>
+                <a:spcPts val="600"/>
+              </a:spcAft>
+              <a:defRPr sz="1800">
+                <a:solidFill>
+                  <a:srgbClr val="333333"/>
+                </a:solidFill>
+              </a:defRPr>
+            </a:pPr>
+            <a:r>
+              <a:t>Assumes feature independence</a:t>
+            </a:r>
+          </a:p>
+          <a:p>
+            <a:pPr>
+              <a:spcAft>
+                <a:spcPts val="600"/>
+              </a:spcAft>
+              <a:defRPr sz="1800">
+                <a:solidFill>
+                  <a:srgbClr val="333333"/>
+                </a:solidFill>
+              </a:defRPr>
+            </a:pPr>
+            <a:r>
+              <a:t>Fast, works with small data</a:t>
+            </a:r>
+          </a:p>
+          <a:p>
+            <a:pPr>
+              <a:spcAft>
+                <a:spcPts val="600"/>
+              </a:spcAft>
+              <a:defRPr sz="1800">
+                <a:solidFill>
+                  <a:srgbClr val="333333"/>
+                </a:solidFill>
+              </a:defRPr>
+            </a:pPr>
+            <a:r>
+              <a:t>No scaling required</a:t>
+            </a:r>
+          </a:p>
+          <a:p>
+            <a:pPr>
+              <a:spcAft>
+                <a:spcPts val="600"/>
+              </a:spcAft>
+              <a:defRPr sz="1800">
+                <a:solidFill>
+                  <a:srgbClr val="333333"/>
+                </a:solidFill>
+              </a:defRPr>
+            </a:pPr>
+            <a:r>
+              <a:t>Good baseline model</a:t>
+            </a:r>
+          </a:p>
+        </p:txBody>
+      </p:sp>
+      <p:sp>
+        <p:nvSpPr>
+          <p:cNvPr id="6" name="Rounded Rectangle 5"/>
+          <p:cNvSpPr/>
+          <p:nvPr/>
+        </p:nvSpPr>
+        <p:spPr>
+          <a:xfrm>
+            <a:off x="4663440" y="1280160"/>
+            <a:ext cx="4114800" cy="5120640"/>
+          </a:xfrm>
+          <a:prstGeom prst="roundRect">
+            <a:avLst/>
+          </a:prstGeom>
+          <a:solidFill>
+            <a:srgbClr val="E8F4F8"/>
+          </a:solidFill>
+          <a:ln w="19050">
+            <a:solidFill>
+              <a:srgbClr val="2A5298"/>
+            </a:solidFill>
+          </a:ln>
+        </p:spPr>
+        <p:style>
+          <a:lnRef idx="1">
+            <a:schemeClr val="accent1"/>
+          </a:lnRef>
+          <a:fillRef idx="3">
+            <a:schemeClr val="accent1"/>
+          </a:fillRef>
+          <a:effectRef idx="2">
+            <a:schemeClr val="accent1"/>
+          </a:effectRef>
+          <a:fontRef idx="minor">
+            <a:schemeClr val="lt1"/>
+          </a:fontRef>
+        </p:style>
+        <p:txBody>
+          <a:bodyPr rtlCol="0" anchor="ctr"/>
+          <a:lstStyle/>
+          <a:p>
+            <a:pPr algn="ctr"/>
+          </a:p>
+        </p:txBody>
+      </p:sp>
+      <p:sp>
+        <p:nvSpPr>
+          <p:cNvPr id="7" name="TextBox 6"/>
+          <p:cNvSpPr txBox="1"/>
+          <p:nvPr/>
+        </p:nvSpPr>
+        <p:spPr>
+          <a:xfrm>
+            <a:off x="4846320" y="1463040"/>
+            <a:ext cx="3749039" cy="4754880"/>
+          </a:xfrm>
+          <a:prstGeom prst="rect">
+            <a:avLst/>
+          </a:prstGeom>
+          <a:noFill/>
+        </p:spPr>
+        <p:txBody>
+          <a:bodyPr wrap="square">
+            <a:spAutoFit/>
+          </a:bodyPr>
+          <a:lstStyle/>
+          <a:p>
+            <a:pPr>
+              <a:spcAft>
+                <a:spcPts val="800"/>
+              </a:spcAft>
+              <a:defRPr sz="2000" b="1">
+                <a:solidFill>
+                  <a:srgbClr val="1E3C72"/>
+                </a:solidFill>
+              </a:defRPr>
+            </a:pPr>
+            <a:r>
+              <a:t>Logistic Regression</a:t>
+            </a:r>
+          </a:p>
+          <a:p>
+            <a:pPr>
+              <a:spcAft>
+                <a:spcPts val="600"/>
+              </a:spcAft>
+              <a:defRPr sz="1800">
+                <a:solidFill>
+                  <a:srgbClr val="333333"/>
+                </a:solidFill>
+              </a:defRPr>
+            </a:pPr>
+            <a:r>
+              <a:t>Type: Discriminative classifier</a:t>
+            </a:r>
+          </a:p>
+          <a:p>
+            <a:pPr>
+              <a:spcAft>
+                <a:spcPts val="600"/>
+              </a:spcAft>
+              <a:defRPr sz="1800">
+                <a:solidFill>
+                  <a:srgbClr val="333333"/>
+                </a:solidFill>
+              </a:defRPr>
+            </a:pPr>
+            <a:r>
+              <a:t>Learns P(class | features)</a:t>
+            </a:r>
+          </a:p>
+          <a:p>
+            <a:pPr>
+              <a:spcAft>
+                <a:spcPts val="600"/>
+              </a:spcAft>
+              <a:defRPr sz="1800">
+                <a:solidFill>
+                  <a:srgbClr val="333333"/>
+                </a:solidFill>
+              </a:defRPr>
+            </a:pPr>
+            <a:r>
+              <a:t>No independence assumption</a:t>
+            </a:r>
+          </a:p>
+          <a:p>
+            <a:pPr>
+              <a:spcAft>
+                <a:spcPts val="600"/>
+              </a:spcAft>
+              <a:defRPr sz="1800">
+                <a:solidFill>
+                  <a:srgbClr val="333333"/>
+                </a:solidFill>
+              </a:defRPr>
+            </a:pPr>
+            <a:r>
+              <a:t>Outputs probabilities</a:t>
+            </a:r>
+          </a:p>
+          <a:p>
+            <a:pPr>
+              <a:spcAft>
+                <a:spcPts val="600"/>
+              </a:spcAft>
+              <a:defRPr sz="1800">
+                <a:solidFill>
+                  <a:srgbClr val="333333"/>
+                </a:solidFill>
+              </a:defRPr>
+            </a:pPr>
+            <a:r>
+              <a:t>Features standardized</a:t>
+            </a:r>
+          </a:p>
+          <a:p>
+            <a:pPr>
+              <a:spcAft>
+                <a:spcPts val="600"/>
+              </a:spcAft>
+              <a:defRPr sz="1800">
+                <a:solidFill>
+                  <a:srgbClr val="333333"/>
+                </a:solidFill>
+              </a:defRPr>
+            </a:pPr>
+            <a:r>
+              <a:t>Learns a linear decision boundary</a:t>
+            </a:r>
+          </a:p>
+        </p:txBody>
+      </p:sp>
+    </p:spTree>
+  </p:cSld>
+  <p:clrMapOvr>
+    <a:masterClrMapping/>
+  </p:clrMapOvr>
+</p:sld>
+</file>
+
+<file path=ppt/slides/slide13.xml><?xml version="1.0" encoding="utf-8"?>
+<p:sld xmlns:a="http://schemas.openxmlformats.org/drawingml/2006/main" xmlns:p="http://schemas.openxmlformats.org/presentationml/2006/main" xmlns:r="http://schemas.openxmlformats.org/officeDocument/2006/relationships">
+  <p:cSld>
+    <p:bg>
+      <p:bgPr>
+        <a:solidFill>
+          <a:srgbClr val="FFFFFF"/>
+        </a:solidFill>
+        <a:effectLst/>
+      </p:bgPr>
+    </p:bg>
+    <p:spTree>
+      <p:nvGrpSpPr>
+        <p:cNvPr id="1" name=""/>
+        <p:cNvGrpSpPr/>
+        <p:nvPr/>
+      </p:nvGrpSpPr>
+      <p:grpSpPr/>
+      <p:sp>
+        <p:nvSpPr>
+          <p:cNvPr id="2" name="Rectangle 1"/>
+          <p:cNvSpPr/>
+          <p:nvPr/>
+        </p:nvSpPr>
+        <p:spPr>
+          <a:xfrm>
+            <a:off x="0" y="0"/>
+            <a:ext cx="9144000" cy="1005840"/>
+          </a:xfrm>
+          <a:prstGeom prst="rect">
+            <a:avLst/>
+          </a:prstGeom>
+          <a:solidFill>
+            <a:srgbClr val="1E3C72"/>
+          </a:solidFill>
+          <a:ln>
+            <a:noFill/>
+          </a:ln>
+        </p:spPr>
+        <p:style>
+          <a:lnRef idx="1">
+            <a:schemeClr val="accent1"/>
+          </a:lnRef>
+          <a:fillRef idx="3">
+            <a:schemeClr val="accent1"/>
+          </a:fillRef>
+          <a:effectRef idx="2">
+            <a:schemeClr val="accent1"/>
+          </a:effectRef>
+          <a:fontRef idx="minor">
+            <a:schemeClr val="lt1"/>
+          </a:fontRef>
+        </p:style>
+        <p:txBody>
+          <a:bodyPr rtlCol="0" anchor="ctr"/>
+          <a:lstStyle/>
+          <a:p>
+            <a:pPr algn="ctr"/>
+          </a:p>
+        </p:txBody>
+      </p:sp>
+      <p:sp>
+        <p:nvSpPr>
+          <p:cNvPr id="3" name="TextBox 2"/>
+          <p:cNvSpPr txBox="1"/>
+          <p:nvPr/>
+        </p:nvSpPr>
+        <p:spPr>
+          <a:xfrm>
+            <a:off x="457200" y="228600"/>
+            <a:ext cx="8229600" cy="640080"/>
+          </a:xfrm>
+          <a:prstGeom prst="rect">
+            <a:avLst/>
+          </a:prstGeom>
+          <a:noFill/>
+        </p:spPr>
+        <p:txBody>
+          <a:bodyPr wrap="none">
+            <a:spAutoFit/>
+          </a:bodyPr>
+          <a:lstStyle/>
+          <a:p>
+            <a:pPr>
+              <a:defRPr sz="2800" b="1">
+                <a:solidFill>
+                  <a:srgbClr val="FFFFFF"/>
+                </a:solidFill>
+                <a:latin typeface="Calibri"/>
+              </a:defRPr>
+            </a:pPr>
+            <a:r>
+              <a:t>Two Evaluation Modes</a:t>
+            </a:r>
+          </a:p>
+        </p:txBody>
+      </p:sp>
+      <p:sp>
+        <p:nvSpPr>
+          <p:cNvPr id="4" name="TextBox 3"/>
+          <p:cNvSpPr txBox="1"/>
+          <p:nvPr/>
+        </p:nvSpPr>
+        <p:spPr>
+          <a:xfrm>
+            <a:off x="457200" y="1280160"/>
+            <a:ext cx="8229600" cy="365760"/>
+          </a:xfrm>
+          <a:prstGeom prst="rect">
+            <a:avLst/>
+          </a:prstGeom>
+          <a:noFill/>
+        </p:spPr>
+        <p:txBody>
+          <a:bodyPr wrap="none">
+            <a:spAutoFit/>
+          </a:bodyPr>
+          <a:lstStyle/>
+          <a:p>
+            <a:pPr>
+              <a:defRPr sz="1600" i="1">
+                <a:solidFill>
+                  <a:srgbClr val="333333"/>
+                </a:solidFill>
+              </a:defRPr>
+            </a:pPr>
+            <a:r>
+              <a:t>How we measured success</a:t>
+            </a:r>
+          </a:p>
+        </p:txBody>
+      </p:sp>
+      <p:sp>
+        <p:nvSpPr>
+          <p:cNvPr id="5" name="TextBox 4"/>
+          <p:cNvSpPr txBox="1"/>
+          <p:nvPr/>
+        </p:nvSpPr>
+        <p:spPr>
+          <a:xfrm>
+            <a:off x="548640" y="1737360"/>
+            <a:ext cx="8046720" cy="5029200"/>
+          </a:xfrm>
+          <a:prstGeom prst="rect">
+            <a:avLst/>
+          </a:prstGeom>
+          <a:noFill/>
+        </p:spPr>
+        <p:txBody>
+          <a:bodyPr wrap="square">
+            <a:spAutoFit/>
+          </a:bodyPr>
+          <a:lstStyle/>
+          <a:p>
+            <a:pPr>
+              <a:spcAft>
+                <a:spcPts val="600"/>
+              </a:spcAft>
+              <a:defRPr sz="2000">
+                <a:solidFill>
+                  <a:srgbClr val="333333"/>
+                </a:solidFill>
+              </a:defRPr>
+            </a:pPr>
+            <a:r>
+              <a:t>Pure MVP Prediction:</a:t>
+            </a:r>
+          </a:p>
+          <a:p>
+            <a:pPr>
+              <a:spcAft>
+                <a:spcPts val="600"/>
+              </a:spcAft>
+              <a:defRPr sz="2000">
+                <a:solidFill>
+                  <a:srgbClr val="333333"/>
+                </a:solidFill>
+              </a:defRPr>
+            </a:pPr>
+            <a:r>
+              <a:t>   • Each finalist is independently classified as MVP or not</a:t>
+            </a:r>
+          </a:p>
+          <a:p>
+            <a:pPr>
+              <a:spcAft>
+                <a:spcPts val="600"/>
+              </a:spcAft>
+              <a:defRPr sz="2000">
+                <a:solidFill>
+                  <a:srgbClr val="333333"/>
+                </a:solidFill>
+              </a:defRPr>
+            </a:pPr>
+            <a:r>
+              <a:t>   • Decision threshold on predicted probability: 0.5</a:t>
+            </a:r>
+          </a:p>
+          <a:p>
+            <a:pPr>
+              <a:spcAft>
+                <a:spcPts val="600"/>
+              </a:spcAft>
+              <a:defRPr sz="2000">
+                <a:solidFill>
+                  <a:srgbClr val="333333"/>
+                </a:solidFill>
+              </a:defRPr>
+            </a:pPr>
+            <a:r>
+              <a:t>   • Standard binary classification accuracy</a:t>
+            </a:r>
+          </a:p>
+          <a:p>
+            <a:pPr>
+              <a:spcAft>
+                <a:spcPts val="600"/>
+              </a:spcAft>
+              <a:defRPr sz="2000">
+                <a:solidFill>
+                  <a:srgbClr val="333333"/>
+                </a:solidFill>
+              </a:defRPr>
+            </a:pPr>
+          </a:p>
+          <a:p>
+            <a:pPr>
+              <a:spcAft>
+                <a:spcPts val="600"/>
+              </a:spcAft>
+              <a:defRPr sz="2000">
+                <a:solidFill>
+                  <a:srgbClr val="333333"/>
+                </a:solidFill>
+              </a:defRPr>
+            </a:pPr>
+            <a:r>
+              <a:t>Seasonal MVP Prediction:</a:t>
+            </a:r>
+          </a:p>
+          <a:p>
+            <a:pPr>
+              <a:spcAft>
+                <a:spcPts val="600"/>
+              </a:spcAft>
+              <a:defRPr sz="2000">
+                <a:solidFill>
+                  <a:srgbClr val="333333"/>
+                </a:solidFill>
+              </a:defRPr>
+            </a:pPr>
+            <a:r>
+              <a:t>   • One MVP must be chosen per season</a:t>
+            </a:r>
+          </a:p>
+          <a:p>
+            <a:pPr>
+              <a:spcAft>
+                <a:spcPts val="600"/>
+              </a:spcAft>
+              <a:defRPr sz="2000">
+                <a:solidFill>
+                  <a:srgbClr val="333333"/>
+                </a:solidFill>
+              </a:defRPr>
+            </a:pPr>
+            <a:r>
+              <a:t>   • Select the finalist with the highest predicted probability</a:t>
+            </a:r>
+          </a:p>
+          <a:p>
+            <a:pPr>
+              <a:spcAft>
+                <a:spcPts val="600"/>
+              </a:spcAft>
+              <a:defRPr sz="2000">
+                <a:solidFill>
+                  <a:srgbClr val="333333"/>
+                </a:solidFill>
+              </a:defRPr>
+            </a:pPr>
+            <a:r>
+              <a:t>   • Mirrors the real-world constraint of a single winner</a:t>
+            </a:r>
+          </a:p>
+        </p:txBody>
+      </p:sp>
+    </p:spTree>
+  </p:cSld>
+  <p:clrMapOvr>
+    <a:masterClrMapping/>
+  </p:clrMapOvr>
+</p:sld>
+</file>
+
+<file path=ppt/slides/slide14.xml><?xml version="1.0" encoding="utf-8"?>
+<p:sld xmlns:a="http://schemas.openxmlformats.org/drawingml/2006/main" xmlns:p="http://schemas.openxmlformats.org/presentationml/2006/main" xmlns:r="http://schemas.openxmlformats.org/officeDocument/2006/relationships">
+  <p:cSld>
+    <p:bg>
+      <p:bgPr>
+        <a:solidFill>
+          <a:srgbClr val="2A5298"/>
+        </a:solidFill>
+        <a:effectLst/>
+      </p:bgPr>
+    </p:bg>
+    <p:spTree>
+      <p:nvGrpSpPr>
+        <p:cNvPr id="1" name=""/>
+        <p:cNvGrpSpPr/>
+        <p:nvPr/>
+      </p:nvGrpSpPr>
+      <p:grpSpPr/>
+      <p:sp>
+        <p:nvSpPr>
+          <p:cNvPr id="2" name="TextBox 1"/>
+          <p:cNvSpPr txBox="1"/>
+          <p:nvPr/>
+        </p:nvSpPr>
+        <p:spPr>
+          <a:xfrm>
+            <a:off x="914400" y="2286000"/>
+            <a:ext cx="7315200" cy="914400"/>
+          </a:xfrm>
+          <a:prstGeom prst="rect">
+            <a:avLst/>
+          </a:prstGeom>
+          <a:noFill/>
+        </p:spPr>
+        <p:txBody>
+          <a:bodyPr wrap="none">
+            <a:spAutoFit/>
+          </a:bodyPr>
+          <a:lstStyle/>
+          <a:p>
+            <a:pPr algn="ctr">
+              <a:defRPr sz="2400" b="1">
+                <a:solidFill>
+                  <a:srgbClr val="B4C8E6"/>
+                </a:solidFill>
+              </a:defRPr>
+            </a:pPr>
+            <a:r>
+              <a:t>PART 04</a:t>
+            </a:r>
+          </a:p>
+        </p:txBody>
+      </p:sp>
+      <p:sp>
+        <p:nvSpPr>
+          <p:cNvPr id="3" name="TextBox 2"/>
+          <p:cNvSpPr txBox="1"/>
+          <p:nvPr/>
+        </p:nvSpPr>
+        <p:spPr>
+          <a:xfrm>
+            <a:off x="914400" y="3017520"/>
+            <a:ext cx="7315200" cy="1097280"/>
+          </a:xfrm>
+          <a:prstGeom prst="rect">
+            <a:avLst/>
+          </a:prstGeom>
+          <a:noFill/>
+        </p:spPr>
+        <p:txBody>
+          <a:bodyPr wrap="none">
+            <a:spAutoFit/>
+          </a:bodyPr>
+          <a:lstStyle/>
+          <a:p>
+            <a:pPr algn="ctr">
+              <a:defRPr sz="4400" b="1">
+                <a:solidFill>
+                  <a:srgbClr val="FFFFFF"/>
+                </a:solidFill>
+              </a:defRPr>
+            </a:pPr>
+            <a:r>
+              <a:t>Results &amp; Analysis</a:t>
+            </a:r>
+          </a:p>
+        </p:txBody>
+      </p:sp>
+    </p:spTree>
+  </p:cSld>
+  <p:clrMapOvr>
+    <a:masterClrMapping/>
+  </p:clrMapOvr>
+</p:sld>
+</file>
+
+<file path=ppt/slides/slide15.xml><?xml version="1.0" encoding="utf-8"?>
+<p:sld xmlns:a="http://schemas.openxmlformats.org/drawingml/2006/main" xmlns:p="http://schemas.openxmlformats.org/presentationml/2006/main" xmlns:r="http://schemas.openxmlformats.org/officeDocument/2006/relationships">
+  <p:cSld>
+    <p:bg>
+      <p:bgPr>
+        <a:solidFill>
+          <a:srgbClr val="FFFFFF"/>
+        </a:solidFill>
+        <a:effectLst/>
+      </p:bgPr>
+    </p:bg>
+    <p:spTree>
+      <p:nvGrpSpPr>
+        <p:cNvPr id="1" name=""/>
+        <p:cNvGrpSpPr/>
+        <p:nvPr/>
+      </p:nvGrpSpPr>
+      <p:grpSpPr/>
+      <p:sp>
+        <p:nvSpPr>
+          <p:cNvPr id="2" name="Rectangle 1"/>
+          <p:cNvSpPr/>
+          <p:nvPr/>
+        </p:nvSpPr>
+        <p:spPr>
+          <a:xfrm>
+            <a:off x="0" y="0"/>
+            <a:ext cx="9144000" cy="1005840"/>
+          </a:xfrm>
+          <a:prstGeom prst="rect">
+            <a:avLst/>
+          </a:prstGeom>
+          <a:solidFill>
+            <a:srgbClr val="1E3C72"/>
+          </a:solidFill>
+          <a:ln>
+            <a:noFill/>
+          </a:ln>
+        </p:spPr>
+        <p:style>
+          <a:lnRef idx="1">
+            <a:schemeClr val="accent1"/>
+          </a:lnRef>
+          <a:fillRef idx="3">
+            <a:schemeClr val="accent1"/>
+          </a:fillRef>
+          <a:effectRef idx="2">
+            <a:schemeClr val="accent1"/>
+          </a:effectRef>
+          <a:fontRef idx="minor">
+            <a:schemeClr val="lt1"/>
+          </a:fontRef>
+        </p:style>
+        <p:txBody>
+          <a:bodyPr rtlCol="0" anchor="ctr"/>
+          <a:lstStyle/>
+          <a:p>
+            <a:pPr algn="ctr"/>
+          </a:p>
+        </p:txBody>
+      </p:sp>
+      <p:sp>
+        <p:nvSpPr>
+          <p:cNvPr id="3" name="TextBox 2"/>
+          <p:cNvSpPr txBox="1"/>
+          <p:nvPr/>
+        </p:nvSpPr>
+        <p:spPr>
+          <a:xfrm>
+            <a:off x="457200" y="228600"/>
+            <a:ext cx="8229600" cy="640080"/>
+          </a:xfrm>
+          <a:prstGeom prst="rect">
+            <a:avLst/>
+          </a:prstGeom>
+          <a:noFill/>
+        </p:spPr>
+        <p:txBody>
+          <a:bodyPr wrap="none">
+            <a:spAutoFit/>
+          </a:bodyPr>
+          <a:lstStyle/>
+          <a:p>
+            <a:pPr>
+              <a:defRPr sz="2800" b="1">
+                <a:solidFill>
+                  <a:srgbClr val="FFFFFF"/>
+                </a:solidFill>
+                <a:latin typeface="Calibri"/>
+              </a:defRPr>
+            </a:pPr>
+            <a:r>
+              <a:t>Model Accuracy Results</a:t>
+            </a:r>
+          </a:p>
+        </p:txBody>
+      </p:sp>
+      <p:sp>
+        <p:nvSpPr>
+          <p:cNvPr id="4" name="TextBox 3"/>
+          <p:cNvSpPr txBox="1"/>
+          <p:nvPr/>
+        </p:nvSpPr>
+        <p:spPr>
+          <a:xfrm>
+            <a:off x="457200" y="1280160"/>
+            <a:ext cx="8229600" cy="365760"/>
+          </a:xfrm>
+          <a:prstGeom prst="rect">
+            <a:avLst/>
+          </a:prstGeom>
+          <a:noFill/>
+        </p:spPr>
+        <p:txBody>
+          <a:bodyPr wrap="none">
+            <a:spAutoFit/>
+          </a:bodyPr>
+          <a:lstStyle/>
+          <a:p>
+            <a:pPr>
+              <a:defRPr sz="1400" i="1">
+                <a:solidFill>
+                  <a:srgbClr val="333333"/>
+                </a:solidFill>
+              </a:defRPr>
+            </a:pPr>
+            <a:r>
+              <a:t>Logistic Regression performs best in seasonal mode</a:t>
+            </a:r>
+          </a:p>
+        </p:txBody>
+      </p:sp>
+      <p:graphicFrame>
+        <p:nvGraphicFramePr>
+          <p:cNvPr id="5" name="Table 4"/>
+          <p:cNvGraphicFramePr>
+            <a:graphicFrameLocks noGrp="1"/>
+          </p:cNvGraphicFramePr>
+          <p:nvPr/>
+        </p:nvGraphicFramePr>
+        <p:xfrm>
+          <a:off x="731520" y="1874520"/>
+          <a:ext cx="7680960" cy="1920239"/>
+        </p:xfrm>
+        <a:graphic>
+          <a:graphicData uri="http://schemas.openxmlformats.org/drawingml/2006/table">
+            <a:tbl>
+              <a:tblPr firstRow="1" bandRow="1">
+                <a:tableStyleId>{5C22544A-7EE6-4342-B048-85BDC9FD1C3A}</a:tableStyleId>
+              </a:tblPr>
+              <a:tblGrid>
+                <a:gridCol w="1920240"/>
+                <a:gridCol w="1920240"/>
+                <a:gridCol w="1920240"/>
+                <a:gridCol w="1920240"/>
+              </a:tblGrid>
+              <a:tr h="640079">
+                <a:tc>
+                  <a:txBody>
+                    <a:bodyPr/>
+                    <a:lstStyle/>
+                    <a:p>
+                      <a:pPr algn="ctr">
+                        <a:defRPr sz="1600" b="1">
+                          <a:solidFill>
+                            <a:srgbClr val="FFFFFF"/>
+                          </a:solidFill>
+                        </a:defRPr>
+                      </a:pPr>
+                      <a:r>
+                        <a:t>Model</a:t>
+                      </a:r>
+                    </a:p>
+                  </a:txBody>
+                  <a:tcPr>
+                    <a:solidFill>
+                      <a:srgbClr val="1E3C72"/>
+                    </a:solidFill>
+                  </a:tcPr>
+                </a:tc>
+                <a:tc>
+                  <a:txBody>
+                    <a:bodyPr/>
+                    <a:lstStyle/>
+                    <a:p>
+                      <a:pPr algn="ctr">
+                        <a:defRPr sz="1600" b="1">
+                          <a:solidFill>
+                            <a:srgbClr val="FFFFFF"/>
+                          </a:solidFill>
+                        </a:defRPr>
+                      </a:pPr>
+                      <a:r>
+                        <a:t>Train (pure)</a:t>
+                      </a:r>
+                    </a:p>
+                  </a:txBody>
+                  <a:tcPr>
+                    <a:solidFill>
+                      <a:srgbClr val="1E3C72"/>
+                    </a:solidFill>
+                  </a:tcPr>
+                </a:tc>
+                <a:tc>
+                  <a:txBody>
+                    <a:bodyPr/>
+                    <a:lstStyle/>
+                    <a:p>
+                      <a:pPr algn="ctr">
+                        <a:defRPr sz="1600" b="1">
+                          <a:solidFill>
+                            <a:srgbClr val="FFFFFF"/>
+                          </a:solidFill>
+                        </a:defRPr>
+                      </a:pPr>
+                      <a:r>
+                        <a:t>Test (pure)</a:t>
+                      </a:r>
+                    </a:p>
+                  </a:txBody>
+                  <a:tcPr>
+                    <a:solidFill>
+                      <a:srgbClr val="1E3C72"/>
+                    </a:solidFill>
+                  </a:tcPr>
+                </a:tc>
+                <a:tc>
+                  <a:txBody>
+                    <a:bodyPr/>
+                    <a:lstStyle/>
+                    <a:p>
+                      <a:pPr algn="ctr">
+                        <a:defRPr sz="1600" b="1">
+                          <a:solidFill>
+                            <a:srgbClr val="FFFFFF"/>
+                          </a:solidFill>
+                        </a:defRPr>
+                      </a:pPr>
+                      <a:r>
+                        <a:t>Test (seasonal)</a:t>
+                      </a:r>
+                    </a:p>
+                  </a:txBody>
+                  <a:tcPr>
+                    <a:solidFill>
+                      <a:srgbClr val="1E3C72"/>
+                    </a:solidFill>
+                  </a:tcPr>
+                </a:tc>
+              </a:tr>
+              <a:tr h="640079">
+                <a:tc>
+                  <a:txBody>
+                    <a:bodyPr/>
+                    <a:lstStyle/>
+                    <a:p>
+                      <a:pPr algn="ctr">
+                        <a:defRPr sz="1500">
+                          <a:solidFill>
+                            <a:srgbClr val="333333"/>
+                          </a:solidFill>
+                        </a:defRPr>
+                      </a:pPr>
+                      <a:r>
+                        <a:t>Naive Bayes</a:t>
+                      </a:r>
+                    </a:p>
+                  </a:txBody>
+                  <a:tcPr>
+                    <a:solidFill>
+                      <a:srgbClr val="F5F5F5"/>
+                    </a:solidFill>
+                  </a:tcPr>
+                </a:tc>
+                <a:tc>
+                  <a:txBody>
+                    <a:bodyPr/>
+                    <a:lstStyle/>
+                    <a:p>
+                      <a:pPr algn="ctr">
+                        <a:defRPr sz="1500">
+                          <a:solidFill>
+                            <a:srgbClr val="333333"/>
+                          </a:solidFill>
+                        </a:defRPr>
+                      </a:pPr>
+                      <a:r>
+                        <a:t>60.4%</a:t>
+                      </a:r>
+                    </a:p>
+                  </a:txBody>
+                  <a:tcPr>
+                    <a:solidFill>
+                      <a:srgbClr val="F5F5F5"/>
+                    </a:solidFill>
+                  </a:tcPr>
+                </a:tc>
+                <a:tc>
+                  <a:txBody>
+                    <a:bodyPr/>
+                    <a:lstStyle/>
+                    <a:p>
+                      <a:pPr algn="ctr">
+                        <a:defRPr sz="1500">
+                          <a:solidFill>
+                            <a:srgbClr val="333333"/>
+                          </a:solidFill>
+                        </a:defRPr>
+                      </a:pPr>
+                      <a:r>
+                        <a:t>41.7%</a:t>
+                      </a:r>
+                    </a:p>
+                  </a:txBody>
+                  <a:tcPr>
+                    <a:solidFill>
+                      <a:srgbClr val="F5F5F5"/>
+                    </a:solidFill>
+                  </a:tcPr>
+                </a:tc>
+                <a:tc>
+                  <a:txBody>
+                    <a:bodyPr/>
+                    <a:lstStyle/>
+                    <a:p>
+                      <a:pPr algn="ctr">
+                        <a:defRPr sz="1500">
+                          <a:solidFill>
+                            <a:srgbClr val="333333"/>
+                          </a:solidFill>
+                        </a:defRPr>
+                      </a:pPr>
+                      <a:r>
+                        <a:t>50.0%</a:t>
+                      </a:r>
+                    </a:p>
+                  </a:txBody>
+                  <a:tcPr>
+                    <a:solidFill>
+                      <a:srgbClr val="F5F5F5"/>
+                    </a:solidFill>
+                  </a:tcPr>
+                </a:tc>
+              </a:tr>
+              <a:tr h="640081">
+                <a:tc>
+                  <a:txBody>
+                    <a:bodyPr/>
+                    <a:lstStyle/>
+                    <a:p>
+                      <a:pPr algn="ctr">
+                        <a:defRPr sz="1500">
+                          <a:solidFill>
+                            <a:srgbClr val="333333"/>
+                          </a:solidFill>
+                        </a:defRPr>
+                      </a:pPr>
+                      <a:r>
+                        <a:t>Logistic Regression</a:t>
+                      </a:r>
+                    </a:p>
+                  </a:txBody>
+                  <a:tcPr/>
+                </a:tc>
+                <a:tc>
+                  <a:txBody>
+                    <a:bodyPr/>
+                    <a:lstStyle/>
+                    <a:p>
+                      <a:pPr algn="ctr">
+                        <a:defRPr sz="1500">
+                          <a:solidFill>
+                            <a:srgbClr val="333333"/>
+                          </a:solidFill>
+                        </a:defRPr>
+                      </a:pPr>
+                      <a:r>
+                        <a:t>79.2%</a:t>
+                      </a:r>
+                    </a:p>
+                  </a:txBody>
+                  <a:tcPr/>
+                </a:tc>
+                <a:tc>
+                  <a:txBody>
+                    <a:bodyPr/>
+                    <a:lstStyle/>
+                    <a:p>
+                      <a:pPr algn="ctr">
+                        <a:defRPr sz="1500">
+                          <a:solidFill>
+                            <a:srgbClr val="333333"/>
+                          </a:solidFill>
+                        </a:defRPr>
+                      </a:pPr>
+                      <a:r>
+                        <a:t>50.0%</a:t>
+                      </a:r>
+                    </a:p>
+                  </a:txBody>
+                  <a:tcPr/>
+                </a:tc>
+                <a:tc>
+                  <a:txBody>
+                    <a:bodyPr/>
+                    <a:lstStyle/>
+                    <a:p>
+                      <a:pPr algn="ctr">
+                        <a:defRPr sz="1500">
+                          <a:solidFill>
+                            <a:srgbClr val="333333"/>
+                          </a:solidFill>
+                        </a:defRPr>
+                      </a:pPr>
+                      <a:r>
+                        <a:t>66.7%</a:t>
+                      </a:r>
+                    </a:p>
+                  </a:txBody>
+                  <a:tcPr/>
+                </a:tc>
+              </a:tr>
+            </a:tbl>
+          </a:graphicData>
+        </a:graphic>
+      </p:graphicFrame>
+    </p:spTree>
+  </p:cSld>
+  <p:clrMapOvr>
+    <a:masterClrMapping/>
+  </p:clrMapOvr>
+</p:sld>
+</file>
+
+<file path=ppt/slides/slide16.xml><?xml version="1.0" encoding="utf-8"?>
+<p:sld xmlns:a="http://schemas.openxmlformats.org/drawingml/2006/main" xmlns:p="http://schemas.openxmlformats.org/presentationml/2006/main" xmlns:r="http://schemas.openxmlformats.org/officeDocument/2006/relationships">
+  <p:cSld>
+    <p:bg>
+      <p:bgPr>
+        <a:solidFill>
+          <a:srgbClr val="FFFFFF"/>
+        </a:solidFill>
+        <a:effectLst/>
+      </p:bgPr>
+    </p:bg>
+    <p:spTree>
+      <p:nvGrpSpPr>
+        <p:cNvPr id="1" name=""/>
+        <p:cNvGrpSpPr/>
+        <p:nvPr/>
+      </p:nvGrpSpPr>
+      <p:grpSpPr/>
+      <p:sp>
+        <p:nvSpPr>
+          <p:cNvPr id="2" name="Rectangle 1"/>
+          <p:cNvSpPr/>
+          <p:nvPr/>
+        </p:nvSpPr>
+        <p:spPr>
+          <a:xfrm>
+            <a:off x="0" y="0"/>
+            <a:ext cx="9144000" cy="1005840"/>
+          </a:xfrm>
+          <a:prstGeom prst="rect">
+            <a:avLst/>
+          </a:prstGeom>
+          <a:solidFill>
+            <a:srgbClr val="1E3C72"/>
+          </a:solidFill>
+          <a:ln>
+            <a:noFill/>
+          </a:ln>
+        </p:spPr>
+        <p:style>
+          <a:lnRef idx="1">
+            <a:schemeClr val="accent1"/>
+          </a:lnRef>
+          <a:fillRef idx="3">
+            <a:schemeClr val="accent1"/>
+          </a:fillRef>
+          <a:effectRef idx="2">
+            <a:schemeClr val="accent1"/>
+          </a:effectRef>
+          <a:fontRef idx="minor">
+            <a:schemeClr val="lt1"/>
+          </a:fontRef>
+        </p:style>
+        <p:txBody>
+          <a:bodyPr rtlCol="0" anchor="ctr"/>
+          <a:lstStyle/>
+          <a:p>
+            <a:pPr algn="ctr"/>
+          </a:p>
+        </p:txBody>
+      </p:sp>
+      <p:sp>
+        <p:nvSpPr>
+          <p:cNvPr id="3" name="TextBox 2"/>
+          <p:cNvSpPr txBox="1"/>
+          <p:nvPr/>
+        </p:nvSpPr>
+        <p:spPr>
+          <a:xfrm>
+            <a:off x="457200" y="228600"/>
+            <a:ext cx="8229600" cy="640080"/>
+          </a:xfrm>
+          <a:prstGeom prst="rect">
+            <a:avLst/>
+          </a:prstGeom>
+          <a:noFill/>
+        </p:spPr>
+        <p:txBody>
+          <a:bodyPr wrap="none">
+            <a:spAutoFit/>
+          </a:bodyPr>
+          <a:lstStyle/>
+          <a:p>
+            <a:pPr>
+              <a:defRPr sz="2800" b="1">
+                <a:solidFill>
+                  <a:srgbClr val="FFFFFF"/>
+                </a:solidFill>
+                <a:latin typeface="Calibri"/>
+              </a:defRPr>
+            </a:pPr>
+            <a:r>
+              <a:t>Accuracy Comparison</a:t>
+            </a:r>
+          </a:p>
+        </p:txBody>
+      </p:sp>
+      <p:sp>
+        <p:nvSpPr>
+          <p:cNvPr id="4" name="TextBox 3"/>
+          <p:cNvSpPr txBox="1"/>
+          <p:nvPr/>
+        </p:nvSpPr>
+        <p:spPr>
+          <a:xfrm>
+            <a:off x="457200" y="1280160"/>
+            <a:ext cx="2743200" cy="5029200"/>
+          </a:xfrm>
+          <a:prstGeom prst="rect">
+            <a:avLst/>
+          </a:prstGeom>
+          <a:noFill/>
+        </p:spPr>
+        <p:txBody>
+          <a:bodyPr wrap="square">
+            <a:spAutoFit/>
+          </a:bodyPr>
+          <a:lstStyle/>
+          <a:p>
+            <a:pPr>
+              <a:spcAft>
+                <a:spcPts val="600"/>
+              </a:spcAft>
+              <a:defRPr sz="1600">
+                <a:solidFill>
+                  <a:srgbClr val="333333"/>
+                </a:solidFill>
+              </a:defRPr>
+            </a:pPr>
+            <a:r>
+              <a:t>Key observations:</a:t>
+            </a:r>
+          </a:p>
+          <a:p>
+            <a:pPr>
+              <a:spcAft>
+                <a:spcPts val="600"/>
+              </a:spcAft>
+              <a:defRPr sz="1600">
+                <a:solidFill>
+                  <a:srgbClr val="333333"/>
+                </a:solidFill>
+              </a:defRPr>
+            </a:pPr>
+            <a:r>
+              <a:t>• Logistic Regression generalizes better</a:t>
+            </a:r>
+          </a:p>
+          <a:p>
+            <a:pPr>
+              <a:spcAft>
+                <a:spcPts val="600"/>
+              </a:spcAft>
+              <a:defRPr sz="1600">
+                <a:solidFill>
+                  <a:srgbClr val="333333"/>
+                </a:solidFill>
+              </a:defRPr>
+            </a:pPr>
+            <a:r>
+              <a:t>• Seasonal mode is harder but more realistic</a:t>
+            </a:r>
+          </a:p>
+          <a:p>
+            <a:pPr>
+              <a:spcAft>
+                <a:spcPts val="600"/>
+              </a:spcAft>
+              <a:defRPr sz="1600">
+                <a:solidFill>
+                  <a:srgbClr val="333333"/>
+                </a:solidFill>
+              </a:defRPr>
+            </a:pPr>
+            <a:r>
+              <a:t>• Both models show a train-test gap due to limited data</a:t>
+            </a:r>
+          </a:p>
+          <a:p>
+            <a:pPr>
+              <a:spcAft>
+                <a:spcPts val="600"/>
+              </a:spcAft>
+              <a:defRPr sz="1600">
+                <a:solidFill>
+                  <a:srgbClr val="333333"/>
+                </a:solidFill>
+              </a:defRPr>
+            </a:pPr>
+            <a:r>
+              <a:t>• Logistic Regression reaches 66.7% seasonal accuracy</a:t>
+            </a:r>
+          </a:p>
+        </p:txBody>
+      </p:sp>
+      <p:pic>
+        <p:nvPicPr>
+          <p:cNvPr id="5" name="Picture 4" descr="accuracy_comparison.png"/>
+          <p:cNvPicPr>
+            <a:picLocks noChangeAspect="1"/>
+          </p:cNvPicPr>
+          <p:nvPr/>
+        </p:nvPicPr>
+        <p:blipFill>
+          <a:blip r:embed="rId2"/>
+          <a:stretch>
+            <a:fillRect/>
+          </a:stretch>
+        </p:blipFill>
+        <p:spPr>
+          <a:xfrm>
+            <a:off x="3474720" y="1371600"/>
+            <a:ext cx="5120640" cy="3200400"/>
+          </a:xfrm>
+          <a:prstGeom prst="rect">
+            <a:avLst/>
+          </a:prstGeom>
+        </p:spPr>
+      </p:pic>
+      <p:sp>
+        <p:nvSpPr>
+          <p:cNvPr id="6" name="TextBox 5"/>
+          <p:cNvSpPr txBox="1"/>
+          <p:nvPr/>
+        </p:nvSpPr>
+        <p:spPr>
+          <a:xfrm>
+            <a:off x="3474720" y="4546396"/>
+            <a:ext cx="5120640" cy="365760"/>
+          </a:xfrm>
+          <a:prstGeom prst="rect">
+            <a:avLst/>
+          </a:prstGeom>
+          <a:noFill/>
+        </p:spPr>
+        <p:txBody>
+          <a:bodyPr wrap="none">
+            <a:spAutoFit/>
+          </a:bodyPr>
+          <a:lstStyle/>
+          <a:p>
+            <a:pPr algn="ctr">
+              <a:defRPr sz="1200" i="1">
+                <a:solidFill>
+                  <a:srgbClr val="333333"/>
+                </a:solidFill>
+              </a:defRPr>
+            </a:pPr>
+            <a:r>
+              <a:t>Comparison across train/test and evaluation modes</a:t>
+            </a:r>
+          </a:p>
+        </p:txBody>
+      </p:sp>
+    </p:spTree>
+  </p:cSld>
+  <p:clrMapOvr>
+    <a:masterClrMapping/>
+  </p:clrMapOvr>
+</p:sld>
+</file>
+
+<file path=ppt/slides/slide17.xml><?xml version="1.0" encoding="utf-8"?>
+<p:sld xmlns:a="http://schemas.openxmlformats.org/drawingml/2006/main" xmlns:p="http://schemas.openxmlformats.org/presentationml/2006/main" xmlns:r="http://schemas.openxmlformats.org/officeDocument/2006/relationships">
+  <p:cSld>
+    <p:bg>
+      <p:bgPr>
+        <a:solidFill>
+          <a:srgbClr val="FFFFFF"/>
+        </a:solidFill>
+        <a:effectLst/>
+      </p:bgPr>
+    </p:bg>
+    <p:spTree>
+      <p:nvGrpSpPr>
+        <p:cNvPr id="1" name=""/>
+        <p:cNvGrpSpPr/>
+        <p:nvPr/>
+      </p:nvGrpSpPr>
+      <p:grpSpPr/>
+      <p:sp>
+        <p:nvSpPr>
+          <p:cNvPr id="2" name="Rectangle 1"/>
+          <p:cNvSpPr/>
+          <p:nvPr/>
+        </p:nvSpPr>
+        <p:spPr>
+          <a:xfrm>
+            <a:off x="0" y="0"/>
+            <a:ext cx="9144000" cy="1005840"/>
+          </a:xfrm>
+          <a:prstGeom prst="rect">
+            <a:avLst/>
+          </a:prstGeom>
+          <a:solidFill>
+            <a:srgbClr val="1E3C72"/>
+          </a:solidFill>
+          <a:ln>
+            <a:noFill/>
+          </a:ln>
+        </p:spPr>
+        <p:style>
+          <a:lnRef idx="1">
+            <a:schemeClr val="accent1"/>
+          </a:lnRef>
+          <a:fillRef idx="3">
+            <a:schemeClr val="accent1"/>
+          </a:fillRef>
+          <a:effectRef idx="2">
+            <a:schemeClr val="accent1"/>
+          </a:effectRef>
+          <a:fontRef idx="minor">
+            <a:schemeClr val="lt1"/>
+          </a:fontRef>
+        </p:style>
+        <p:txBody>
+          <a:bodyPr rtlCol="0" anchor="ctr"/>
+          <a:lstStyle/>
+          <a:p>
+            <a:pPr algn="ctr"/>
+          </a:p>
+        </p:txBody>
+      </p:sp>
+      <p:sp>
+        <p:nvSpPr>
+          <p:cNvPr id="3" name="TextBox 2"/>
+          <p:cNvSpPr txBox="1"/>
+          <p:nvPr/>
+        </p:nvSpPr>
+        <p:spPr>
+          <a:xfrm>
+            <a:off x="457200" y="228600"/>
+            <a:ext cx="8229600" cy="640080"/>
+          </a:xfrm>
+          <a:prstGeom prst="rect">
+            <a:avLst/>
+          </a:prstGeom>
+          <a:noFill/>
+        </p:spPr>
+        <p:txBody>
+          <a:bodyPr wrap="none">
+            <a:spAutoFit/>
+          </a:bodyPr>
+          <a:lstStyle/>
+          <a:p>
+            <a:pPr>
+              <a:defRPr sz="2800" b="1">
+                <a:solidFill>
+                  <a:srgbClr val="FFFFFF"/>
+                </a:solidFill>
+                <a:latin typeface="Calibri"/>
+              </a:defRPr>
+            </a:pPr>
+            <a:r>
+              <a:t>Confusion Matrices (Pure Mode)</a:t>
+            </a:r>
+          </a:p>
+        </p:txBody>
+      </p:sp>
+      <p:pic>
+        <p:nvPicPr>
+          <p:cNvPr id="4" name="Picture 3" descr="confusion_matrices.png"/>
+          <p:cNvPicPr>
+            <a:picLocks noChangeAspect="1"/>
+          </p:cNvPicPr>
+          <p:nvPr/>
+        </p:nvPicPr>
+        <p:blipFill>
+          <a:blip r:embed="rId2"/>
+          <a:stretch>
+            <a:fillRect/>
+          </a:stretch>
+        </p:blipFill>
+        <p:spPr>
+          <a:xfrm>
+            <a:off x="1097280" y="1280160"/>
+            <a:ext cx="6949440" cy="2779776"/>
+          </a:xfrm>
+          <a:prstGeom prst="rect">
+            <a:avLst/>
+          </a:prstGeom>
+        </p:spPr>
+      </p:pic>
+      <p:sp>
+        <p:nvSpPr>
+          <p:cNvPr id="5" name="TextBox 4"/>
+          <p:cNvSpPr txBox="1"/>
+          <p:nvPr/>
+        </p:nvSpPr>
+        <p:spPr>
+          <a:xfrm>
+            <a:off x="1097280" y="5588812"/>
+            <a:ext cx="6949440" cy="365760"/>
+          </a:xfrm>
+          <a:prstGeom prst="rect">
+            <a:avLst/>
+          </a:prstGeom>
+          <a:noFill/>
+        </p:spPr>
+        <p:txBody>
+          <a:bodyPr wrap="none">
+            <a:spAutoFit/>
+          </a:bodyPr>
+          <a:lstStyle/>
+          <a:p>
+            <a:pPr algn="ctr">
+              <a:defRPr sz="1200" i="1">
+                <a:solidFill>
+                  <a:srgbClr val="333333"/>
+                </a:solidFill>
+              </a:defRPr>
+            </a:pPr>
+            <a:r>
+              <a:t>Left: Naive Bayes | Right: Logistic Regression</a:t>
+            </a:r>
+          </a:p>
+        </p:txBody>
+      </p:sp>
+    </p:spTree>
+  </p:cSld>
+  <p:clrMapOvr>
+    <a:masterClrMapping/>
+  </p:clrMapOvr>
+</p:sld>
+</file>
+
+<file path=ppt/slides/slide18.xml><?xml version="1.0" encoding="utf-8"?>
+<p:sld xmlns:a="http://schemas.openxmlformats.org/drawingml/2006/main" xmlns:p="http://schemas.openxmlformats.org/presentationml/2006/main" xmlns:r="http://schemas.openxmlformats.org/officeDocument/2006/relationships">
+  <p:cSld>
+    <p:bg>
+      <p:bgPr>
+        <a:solidFill>
+          <a:srgbClr val="FFFFFF"/>
+        </a:solidFill>
+        <a:effectLst/>
+      </p:bgPr>
+    </p:bg>
+    <p:spTree>
+      <p:nvGrpSpPr>
+        <p:cNvPr id="1" name=""/>
+        <p:cNvGrpSpPr/>
+        <p:nvPr/>
+      </p:nvGrpSpPr>
+      <p:grpSpPr/>
+      <p:sp>
+        <p:nvSpPr>
+          <p:cNvPr id="2" name="Rectangle 1"/>
+          <p:cNvSpPr/>
+          <p:nvPr/>
+        </p:nvSpPr>
+        <p:spPr>
+          <a:xfrm>
+            <a:off x="0" y="0"/>
+            <a:ext cx="9144000" cy="1005840"/>
+          </a:xfrm>
+          <a:prstGeom prst="rect">
+            <a:avLst/>
+          </a:prstGeom>
+          <a:solidFill>
+            <a:srgbClr val="1E3C72"/>
+          </a:solidFill>
+          <a:ln>
+            <a:noFill/>
+          </a:ln>
+        </p:spPr>
+        <p:style>
+          <a:lnRef idx="1">
+            <a:schemeClr val="accent1"/>
+          </a:lnRef>
+          <a:fillRef idx="3">
+            <a:schemeClr val="accent1"/>
+          </a:fillRef>
+          <a:effectRef idx="2">
+            <a:schemeClr val="accent1"/>
+          </a:effectRef>
+          <a:fontRef idx="minor">
+            <a:schemeClr val="lt1"/>
+          </a:fontRef>
+        </p:style>
+        <p:txBody>
+          <a:bodyPr rtlCol="0" anchor="ctr"/>
+          <a:lstStyle/>
+          <a:p>
+            <a:pPr algn="ctr"/>
+          </a:p>
+        </p:txBody>
+      </p:sp>
+      <p:sp>
+        <p:nvSpPr>
+          <p:cNvPr id="3" name="TextBox 2"/>
+          <p:cNvSpPr txBox="1"/>
+          <p:nvPr/>
+        </p:nvSpPr>
+        <p:spPr>
+          <a:xfrm>
+            <a:off x="457200" y="228600"/>
+            <a:ext cx="8229600" cy="640080"/>
+          </a:xfrm>
+          <a:prstGeom prst="rect">
+            <a:avLst/>
+          </a:prstGeom>
+          <a:noFill/>
+        </p:spPr>
+        <p:txBody>
+          <a:bodyPr wrap="none">
+            <a:spAutoFit/>
+          </a:bodyPr>
+          <a:lstStyle/>
+          <a:p>
+            <a:pPr>
+              <a:defRPr sz="2800" b="1">
+                <a:solidFill>
+                  <a:srgbClr val="FFFFFF"/>
+                </a:solidFill>
+                <a:latin typeface="Calibri"/>
+              </a:defRPr>
+            </a:pPr>
+            <a:r>
+              <a:t>What the Results Tell Us</a:t>
+            </a:r>
+          </a:p>
+        </p:txBody>
+      </p:sp>
+      <p:sp>
+        <p:nvSpPr>
+          <p:cNvPr id="4" name="TextBox 3"/>
+          <p:cNvSpPr txBox="1"/>
+          <p:nvPr/>
+        </p:nvSpPr>
+        <p:spPr>
+          <a:xfrm>
+            <a:off x="457200" y="1280160"/>
+            <a:ext cx="8229600" cy="365760"/>
+          </a:xfrm>
+          <a:prstGeom prst="rect">
+            <a:avLst/>
+          </a:prstGeom>
+          <a:noFill/>
+        </p:spPr>
+        <p:txBody>
+          <a:bodyPr wrap="none">
+            <a:spAutoFit/>
+          </a:bodyPr>
+          <a:lstStyle/>
+          <a:p>
+            <a:pPr>
+              <a:defRPr sz="1600" i="1">
+                <a:solidFill>
+                  <a:srgbClr val="333333"/>
+                </a:solidFill>
+              </a:defRPr>
+            </a:pPr>
+            <a:r>
+              <a:t>Interpreting the numbers</a:t>
+            </a:r>
+          </a:p>
+        </p:txBody>
+      </p:sp>
+      <p:sp>
+        <p:nvSpPr>
+          <p:cNvPr id="5" name="TextBox 4"/>
+          <p:cNvSpPr txBox="1"/>
+          <p:nvPr/>
+        </p:nvSpPr>
+        <p:spPr>
+          <a:xfrm>
+            <a:off x="548640" y="1737360"/>
+            <a:ext cx="8046720" cy="5029200"/>
+          </a:xfrm>
+          <a:prstGeom prst="rect">
+            <a:avLst/>
+          </a:prstGeom>
+          <a:noFill/>
+        </p:spPr>
+        <p:txBody>
+          <a:bodyPr wrap="square">
+            <a:spAutoFit/>
+          </a:bodyPr>
+          <a:lstStyle/>
+          <a:p>
+            <a:pPr>
+              <a:spcAft>
+                <a:spcPts val="600"/>
+              </a:spcAft>
+              <a:defRPr sz="2000">
+                <a:solidFill>
+                  <a:srgbClr val="333333"/>
+                </a:solidFill>
+              </a:defRPr>
+            </a:pPr>
+            <a:r>
+              <a:t>Logistic Regression is better at the seasonal task because it learns a direct decision boundary.</a:t>
+            </a:r>
+          </a:p>
+          <a:p>
+            <a:pPr>
+              <a:spcAft>
+                <a:spcPts val="600"/>
+              </a:spcAft>
+              <a:defRPr sz="2000">
+                <a:solidFill>
+                  <a:srgbClr val="333333"/>
+                </a:solidFill>
+              </a:defRPr>
+            </a:pPr>
+            <a:r>
+              <a:t>Naive Bayes underperforms because basketball features are correlated (violating its independence assumption).</a:t>
+            </a:r>
+          </a:p>
+          <a:p>
+            <a:pPr>
+              <a:spcAft>
+                <a:spcPts val="600"/>
+              </a:spcAft>
+              <a:defRPr sz="2000">
+                <a:solidFill>
+                  <a:srgbClr val="333333"/>
+                </a:solidFill>
+              </a:defRPr>
+            </a:pPr>
+            <a:r>
+              <a:t>The train-test gap shows the model is somewhat overfitting the small 48-row training set.</a:t>
+            </a:r>
+          </a:p>
+          <a:p>
+            <a:pPr>
+              <a:spcAft>
+                <a:spcPts val="600"/>
+              </a:spcAft>
+              <a:defRPr sz="2000">
+                <a:solidFill>
+                  <a:srgbClr val="333333"/>
+                </a:solidFill>
+              </a:defRPr>
+            </a:pPr>
+            <a:r>
+              <a:t>Even with only 10 basic stats, we can predict the correct MVP 2 out of 3 seasons in test data.</a:t>
+            </a:r>
+          </a:p>
+          <a:p>
+            <a:pPr>
+              <a:spcAft>
+                <a:spcPts val="600"/>
+              </a:spcAft>
+              <a:defRPr sz="2000">
+                <a:solidFill>
+                  <a:srgbClr val="333333"/>
+                </a:solidFill>
+              </a:defRPr>
+            </a:pPr>
+            <a:r>
+              <a:t>Voter subjectivity and missing narrative factors explain why accuracy is not higher.</a:t>
+            </a:r>
+          </a:p>
+        </p:txBody>
+      </p:sp>
+    </p:spTree>
+  </p:cSld>
+  <p:clrMapOvr>
+    <a:masterClrMapping/>
+  </p:clrMapOvr>
+</p:sld>
+</file>
+
+<file path=ppt/slides/slide19.xml><?xml version="1.0" encoding="utf-8"?>
+<p:sld xmlns:a="http://schemas.openxmlformats.org/drawingml/2006/main" xmlns:p="http://schemas.openxmlformats.org/presentationml/2006/main" xmlns:r="http://schemas.openxmlformats.org/officeDocument/2006/relationships">
+  <p:cSld>
+    <p:bg>
+      <p:bgPr>
+        <a:solidFill>
+          <a:srgbClr val="FFFFFF"/>
+        </a:solidFill>
+        <a:effectLst/>
+      </p:bgPr>
+    </p:bg>
+    <p:spTree>
+      <p:nvGrpSpPr>
+        <p:cNvPr id="1" name=""/>
+        <p:cNvGrpSpPr/>
+        <p:nvPr/>
+      </p:nvGrpSpPr>
+      <p:grpSpPr/>
+      <p:sp>
+        <p:nvSpPr>
+          <p:cNvPr id="2" name="Rectangle 1"/>
+          <p:cNvSpPr/>
+          <p:nvPr/>
+        </p:nvSpPr>
+        <p:spPr>
+          <a:xfrm>
+            <a:off x="0" y="0"/>
+            <a:ext cx="9144000" cy="1005840"/>
+          </a:xfrm>
+          <a:prstGeom prst="rect">
+            <a:avLst/>
+          </a:prstGeom>
+          <a:solidFill>
+            <a:srgbClr val="1E3C72"/>
+          </a:solidFill>
+          <a:ln>
+            <a:noFill/>
+          </a:ln>
+        </p:spPr>
+        <p:style>
+          <a:lnRef idx="1">
+            <a:schemeClr val="accent1"/>
+          </a:lnRef>
+          <a:fillRef idx="3">
+            <a:schemeClr val="accent1"/>
+          </a:fillRef>
+          <a:effectRef idx="2">
+            <a:schemeClr val="accent1"/>
+          </a:effectRef>
+          <a:fontRef idx="minor">
+            <a:schemeClr val="lt1"/>
+          </a:fontRef>
+        </p:style>
+        <p:txBody>
+          <a:bodyPr rtlCol="0" anchor="ctr"/>
+          <a:lstStyle/>
+          <a:p>
+            <a:pPr algn="ctr"/>
+          </a:p>
+        </p:txBody>
+      </p:sp>
+      <p:sp>
+        <p:nvSpPr>
+          <p:cNvPr id="3" name="TextBox 2"/>
+          <p:cNvSpPr txBox="1"/>
+          <p:nvPr/>
+        </p:nvSpPr>
+        <p:spPr>
+          <a:xfrm>
+            <a:off x="457200" y="228600"/>
+            <a:ext cx="8229600" cy="640080"/>
+          </a:xfrm>
+          <a:prstGeom prst="rect">
+            <a:avLst/>
+          </a:prstGeom>
+          <a:noFill/>
+        </p:spPr>
+        <p:txBody>
+          <a:bodyPr wrap="none">
+            <a:spAutoFit/>
+          </a:bodyPr>
+          <a:lstStyle/>
+          <a:p>
+            <a:pPr>
+              <a:defRPr sz="2800" b="1">
+                <a:solidFill>
+                  <a:srgbClr val="FFFFFF"/>
+                </a:solidFill>
+                <a:latin typeface="Calibri"/>
+              </a:defRPr>
+            </a:pPr>
+            <a:r>
+              <a:t>Feature Importance</a:t>
+            </a:r>
+          </a:p>
+        </p:txBody>
+      </p:sp>
+      <p:sp>
+        <p:nvSpPr>
+          <p:cNvPr id="4" name="TextBox 3"/>
+          <p:cNvSpPr txBox="1"/>
+          <p:nvPr/>
+        </p:nvSpPr>
+        <p:spPr>
+          <a:xfrm>
+            <a:off x="457200" y="1280160"/>
+            <a:ext cx="2743200" cy="5029200"/>
+          </a:xfrm>
+          <a:prstGeom prst="rect">
+            <a:avLst/>
+          </a:prstGeom>
+          <a:noFill/>
+        </p:spPr>
+        <p:txBody>
+          <a:bodyPr wrap="square">
+            <a:spAutoFit/>
+          </a:bodyPr>
+          <a:lstStyle/>
+          <a:p>
+            <a:pPr>
+              <a:spcAft>
+                <a:spcPts val="600"/>
+              </a:spcAft>
+              <a:defRPr sz="1600">
+                <a:solidFill>
+                  <a:srgbClr val="333333"/>
+                </a:solidFill>
+              </a:defRPr>
+            </a:pPr>
+            <a:r>
+              <a:t>Most important predictors:</a:t>
+            </a:r>
+          </a:p>
+          <a:p>
+            <a:pPr>
+              <a:spcAft>
+                <a:spcPts val="600"/>
+              </a:spcAft>
+              <a:defRPr sz="1600">
+                <a:solidFill>
+                  <a:srgbClr val="333333"/>
+                </a:solidFill>
+              </a:defRPr>
+            </a:pPr>
+            <a:r>
+              <a:t>1. Assists per game</a:t>
+            </a:r>
+          </a:p>
+          <a:p>
+            <a:pPr>
+              <a:spcAft>
+                <a:spcPts val="600"/>
+              </a:spcAft>
+              <a:defRPr sz="1600">
+                <a:solidFill>
+                  <a:srgbClr val="333333"/>
+                </a:solidFill>
+              </a:defRPr>
+            </a:pPr>
+            <a:r>
+              <a:t>2. Free throw %</a:t>
+            </a:r>
+          </a:p>
+          <a:p>
+            <a:pPr>
+              <a:spcAft>
+                <a:spcPts val="600"/>
+              </a:spcAft>
+              <a:defRPr sz="1600">
+                <a:solidFill>
+                  <a:srgbClr val="333333"/>
+                </a:solidFill>
+              </a:defRPr>
+            </a:pPr>
+            <a:r>
+              <a:t>3. Points per game</a:t>
+            </a:r>
+          </a:p>
+          <a:p>
+            <a:pPr>
+              <a:spcAft>
+                <a:spcPts val="600"/>
+              </a:spcAft>
+              <a:defRPr sz="1600">
+                <a:solidFill>
+                  <a:srgbClr val="333333"/>
+                </a:solidFill>
+              </a:defRPr>
+            </a:pPr>
+            <a:r>
+              <a:t>4. Blocks per game</a:t>
+            </a:r>
+          </a:p>
+          <a:p>
+            <a:pPr>
+              <a:spcAft>
+                <a:spcPts val="600"/>
+              </a:spcAft>
+              <a:defRPr sz="1600">
+                <a:solidFill>
+                  <a:srgbClr val="333333"/>
+                </a:solidFill>
+              </a:defRPr>
+            </a:pPr>
+            <a:r>
+              <a:t>5. Rebounds per game</a:t>
+            </a:r>
+          </a:p>
+          <a:p>
+            <a:pPr>
+              <a:spcAft>
+                <a:spcPts val="600"/>
+              </a:spcAft>
+              <a:defRPr sz="1600">
+                <a:solidFill>
+                  <a:srgbClr val="333333"/>
+                </a:solidFill>
+              </a:defRPr>
+            </a:pPr>
+          </a:p>
+          <a:p>
+            <a:pPr>
+              <a:spcAft>
+                <a:spcPts val="600"/>
+              </a:spcAft>
+              <a:defRPr sz="1600">
+                <a:solidFill>
+                  <a:srgbClr val="333333"/>
+                </a:solidFill>
+              </a:defRPr>
+            </a:pPr>
+            <a:r>
+              <a:t>Negative: Minutes per game — high minutes without high production may reduce MVP odds</a:t>
             </a:r>
           </a:p>
         </p:txBody>
@@ -3322,268 +5798,45 @@
         </p:blipFill>
         <p:spPr>
           <a:xfrm>
-            <a:off x="3474720" y="1188720"/>
-            <a:ext cx="5029200" cy="3143250"/>
+            <a:off x="3474720" y="1371600"/>
+            <a:ext cx="5120640" cy="3200400"/>
           </a:xfrm>
           <a:prstGeom prst="rect">
             <a:avLst/>
           </a:prstGeom>
         </p:spPr>
       </p:pic>
-    </p:spTree>
-  </p:cSld>
-  <p:clrMapOvr>
-    <a:masterClrMapping/>
-  </p:clrMapOvr>
-</p:sld>
-</file>
-
-<file path=ppt/slides/slide11.xml><?xml version="1.0" encoding="utf-8"?>
-<p:sld xmlns:a="http://schemas.openxmlformats.org/drawingml/2006/main" xmlns:p="http://schemas.openxmlformats.org/presentationml/2006/main" xmlns:r="http://schemas.openxmlformats.org/officeDocument/2006/relationships">
-  <p:cSld>
-    <p:spTree>
-      <p:nvGrpSpPr>
-        <p:cNvPr id="1" name=""/>
-        <p:cNvGrpSpPr/>
-        <p:nvPr/>
-      </p:nvGrpSpPr>
-      <p:grpSpPr/>
-      <p:sp>
-        <p:nvSpPr>
-          <p:cNvPr id="2" name="Title 1"/>
-          <p:cNvSpPr>
-            <a:spLocks noGrp="1"/>
-          </p:cNvSpPr>
-          <p:nvPr>
-            <p:ph type="title"/>
-          </p:nvPr>
-        </p:nvSpPr>
-        <p:spPr/>
-        <p:txBody>
-          <a:bodyPr/>
-          <a:lstStyle/>
-          <a:p>
-            <a:r>
-              <a:t>Discussion</a:t>
-            </a:r>
-          </a:p>
-        </p:txBody>
-      </p:sp>
-      <p:sp>
-        <p:nvSpPr>
-          <p:cNvPr id="3" name="Content Placeholder 2"/>
-          <p:cNvSpPr>
-            <a:spLocks noGrp="1"/>
-          </p:cNvSpPr>
-          <p:nvPr>
-            <p:ph idx="1"/>
-          </p:nvPr>
-        </p:nvSpPr>
-        <p:spPr/>
-        <p:txBody>
-          <a:bodyPr/>
-          <a:lstStyle/>
-          <a:p>
-            <a:pPr>
-              <a:defRPr sz="2000"/>
-            </a:pPr>
-            <a:r>
-              <a:t>Logistic Regression outperforms Naive Bayes, especially for seasonal prediction.</a:t>
-            </a:r>
-          </a:p>
-          <a:p>
-            <a:pPr>
-              <a:defRPr sz="2000"/>
-            </a:pPr>
-            <a:r>
-              <a:t>Naive Bayes' independence assumption is violated by correlated basketball stats.</a:t>
-            </a:r>
-          </a:p>
-          <a:p>
-            <a:pPr>
-              <a:defRPr sz="2000"/>
-            </a:pPr>
-            <a:r>
-              <a:t>The dataset is very small (60 rows), leading to overfitting.</a:t>
-            </a:r>
-          </a:p>
-          <a:p>
-            <a:pPr>
-              <a:defRPr sz="2000"/>
-            </a:pPr>
-            <a:r>
-              <a:t>Models miss non-statistical factors: team wins, media narrative, voter bias.</a:t>
-            </a:r>
-          </a:p>
-          <a:p>
-            <a:pPr>
-              <a:defRPr sz="2000"/>
-            </a:pPr>
-            <a:r>
-              <a:t>Results are comparable to the reference sample project.</a:t>
-            </a:r>
-          </a:p>
-        </p:txBody>
-      </p:sp>
-    </p:spTree>
-  </p:cSld>
-  <p:clrMapOvr>
-    <a:masterClrMapping/>
-  </p:clrMapOvr>
-</p:sld>
-</file>
-
-<file path=ppt/slides/slide12.xml><?xml version="1.0" encoding="utf-8"?>
-<p:sld xmlns:a="http://schemas.openxmlformats.org/drawingml/2006/main" xmlns:p="http://schemas.openxmlformats.org/presentationml/2006/main" xmlns:r="http://schemas.openxmlformats.org/officeDocument/2006/relationships">
-  <p:cSld>
-    <p:spTree>
-      <p:nvGrpSpPr>
-        <p:cNvPr id="1" name=""/>
-        <p:cNvGrpSpPr/>
-        <p:nvPr/>
-      </p:nvGrpSpPr>
-      <p:grpSpPr/>
-      <p:sp>
-        <p:nvSpPr>
-          <p:cNvPr id="2" name="Title 1"/>
-          <p:cNvSpPr>
-            <a:spLocks noGrp="1"/>
-          </p:cNvSpPr>
-          <p:nvPr>
-            <p:ph type="title"/>
-          </p:nvPr>
-        </p:nvSpPr>
-        <p:spPr/>
-        <p:txBody>
-          <a:bodyPr/>
-          <a:lstStyle/>
-          <a:p>
-            <a:r>
-              <a:t>Conclusion &amp; Future Work</a:t>
-            </a:r>
-          </a:p>
-        </p:txBody>
-      </p:sp>
-      <p:sp>
-        <p:nvSpPr>
-          <p:cNvPr id="3" name="Content Placeholder 2"/>
-          <p:cNvSpPr>
-            <a:spLocks noGrp="1"/>
-          </p:cNvSpPr>
-          <p:nvPr>
-            <p:ph idx="1"/>
-          </p:nvPr>
-        </p:nvSpPr>
-        <p:spPr/>
-        <p:txBody>
-          <a:bodyPr/>
-          <a:lstStyle/>
-          <a:p>
-            <a:pPr>
-              <a:defRPr sz="2000"/>
-            </a:pPr>
-            <a:r>
-              <a:t>ML can partially predict MVP voting, but human bias remains a major factor.</a:t>
-            </a:r>
-          </a:p>
-          <a:p>
-            <a:pPr>
-              <a:defRPr sz="2000"/>
-            </a:pPr>
-            <a:r>
-              <a:t>Future improvements:</a:t>
-            </a:r>
-          </a:p>
-          <a:p>
-            <a:pPr>
-              <a:defRPr sz="2000"/>
-            </a:pPr>
-            <a:r>
-              <a:t>  • Add team-level features (wins, playoff seed, point differential)</a:t>
-            </a:r>
-          </a:p>
-          <a:p>
-            <a:pPr>
-              <a:defRPr sz="2000"/>
-            </a:pPr>
-            <a:r>
-              <a:t>  • Include advanced metrics (PER, win shares, VORP)</a:t>
-            </a:r>
-          </a:p>
-          <a:p>
-            <a:pPr>
-              <a:defRPr sz="2000"/>
-            </a:pPr>
-            <a:r>
-              <a:t>  • Expand dataset to more seasons</a:t>
-            </a:r>
-          </a:p>
-          <a:p>
-            <a:pPr>
-              <a:defRPr sz="2000"/>
-            </a:pPr>
-            <a:r>
-              <a:t>  • Try ensemble models (Random Forest, XGBoost)</a:t>
-            </a:r>
-          </a:p>
-        </p:txBody>
-      </p:sp>
-    </p:spTree>
-  </p:cSld>
-  <p:clrMapOvr>
-    <a:masterClrMapping/>
-  </p:clrMapOvr>
-</p:sld>
-</file>
-
-<file path=ppt/slides/slide13.xml><?xml version="1.0" encoding="utf-8"?>
-<p:sld xmlns:a="http://schemas.openxmlformats.org/drawingml/2006/main" xmlns:p="http://schemas.openxmlformats.org/presentationml/2006/main" xmlns:r="http://schemas.openxmlformats.org/officeDocument/2006/relationships">
-  <p:cSld>
-    <p:spTree>
-      <p:nvGrpSpPr>
-        <p:cNvPr id="1" name=""/>
-        <p:cNvGrpSpPr/>
-        <p:nvPr/>
-      </p:nvGrpSpPr>
-      <p:grpSpPr/>
-      <p:sp>
-        <p:nvSpPr>
-          <p:cNvPr id="2" name="Title 1"/>
-          <p:cNvSpPr>
-            <a:spLocks noGrp="1"/>
-          </p:cNvSpPr>
-          <p:nvPr>
-            <p:ph type="ctrTitle"/>
-          </p:nvPr>
-        </p:nvSpPr>
-        <p:spPr/>
-        <p:txBody>
-          <a:bodyPr/>
-          <a:lstStyle/>
-          <a:p>
-            <a:r>
-              <a:t>Thank You</a:t>
-            </a:r>
-          </a:p>
-        </p:txBody>
-      </p:sp>
-      <p:sp>
-        <p:nvSpPr>
-          <p:cNvPr id="3" name="Subtitle 2"/>
-          <p:cNvSpPr>
-            <a:spLocks noGrp="1"/>
-          </p:cNvSpPr>
-          <p:nvPr>
-            <p:ph type="subTitle" idx="1"/>
-          </p:nvPr>
-        </p:nvSpPr>
-        <p:spPr/>
-        <p:txBody>
-          <a:bodyPr/>
-          <a:lstStyle/>
-          <a:p>
-            <a:r>
-              <a:t>Questions?</a:t>
+      <p:sp>
+        <p:nvSpPr>
+          <p:cNvPr id="6" name="TextBox 5"/>
+          <p:cNvSpPr txBox="1"/>
+          <p:nvPr/>
+        </p:nvSpPr>
+        <p:spPr>
+          <a:xfrm>
+            <a:off x="3474720" y="4546396"/>
+            <a:ext cx="5120640" cy="365760"/>
+          </a:xfrm>
+          <a:prstGeom prst="rect">
+            <a:avLst/>
+          </a:prstGeom>
+          <a:noFill/>
+        </p:spPr>
+        <p:txBody>
+          <a:bodyPr wrap="none">
+            <a:spAutoFit/>
+          </a:bodyPr>
+          <a:lstStyle/>
+          <a:p>
+            <a:pPr algn="ctr">
+              <a:defRPr sz="1200" i="1">
+                <a:solidFill>
+                  <a:srgbClr val="333333"/>
+                </a:solidFill>
+              </a:defRPr>
+            </a:pPr>
+            <a:r>
+              <a:t>Logistic Regression coefficients</a:t>
             </a:r>
           </a:p>
         </p:txBody>
@@ -3599,6 +5852,14 @@
 <file path=ppt/slides/slide2.xml><?xml version="1.0" encoding="utf-8"?>
 <p:sld xmlns:a="http://schemas.openxmlformats.org/drawingml/2006/main" xmlns:p="http://schemas.openxmlformats.org/presentationml/2006/main" xmlns:r="http://schemas.openxmlformats.org/officeDocument/2006/relationships">
   <p:cSld>
+    <p:bg>
+      <p:bgPr>
+        <a:solidFill>
+          <a:srgbClr val="FFFFFF"/>
+        </a:solidFill>
+        <a:effectLst/>
+      </p:bgPr>
+    </p:bg>
     <p:spTree>
       <p:nvGrpSpPr>
         <p:cNvPr id="1" name=""/>
@@ -3608,69 +5869,2089 @@
       <p:grpSpPr/>
       <p:sp>
         <p:nvSpPr>
-          <p:cNvPr id="2" name="Title 1"/>
-          <p:cNvSpPr>
-            <a:spLocks noGrp="1"/>
-          </p:cNvSpPr>
-          <p:nvPr>
-            <p:ph type="title"/>
-          </p:nvPr>
-        </p:nvSpPr>
-        <p:spPr/>
-        <p:txBody>
-          <a:bodyPr/>
-          <a:lstStyle/>
-          <a:p>
-            <a:r>
-              <a:t>Motivation &amp; Problem Statement</a:t>
-            </a:r>
-          </a:p>
-        </p:txBody>
-      </p:sp>
-      <p:sp>
-        <p:nvSpPr>
-          <p:cNvPr id="3" name="Content Placeholder 2"/>
-          <p:cNvSpPr>
-            <a:spLocks noGrp="1"/>
-          </p:cNvSpPr>
-          <p:nvPr>
-            <p:ph idx="1"/>
-          </p:nvPr>
-        </p:nvSpPr>
-        <p:spPr/>
-        <p:txBody>
-          <a:bodyPr/>
-          <a:lstStyle/>
-          <a:p>
-            <a:pPr>
-              <a:defRPr sz="2000"/>
-            </a:pPr>
-            <a:r>
-              <a:t>The NBA MVP is voted by sportswriters and broadcasters.</a:t>
-            </a:r>
-          </a:p>
-          <a:p>
-            <a:pPr>
-              <a:defRPr sz="2000"/>
-            </a:pPr>
-            <a:r>
-              <a:t>Human voters are influenced by popularity, media narratives, and recency bias.</a:t>
-            </a:r>
-          </a:p>
-          <a:p>
-            <a:pPr>
-              <a:defRPr sz="2000"/>
-            </a:pPr>
-            <a:r>
-              <a:t>Can machine learning predict the MVP using only objective player statistics?</a:t>
-            </a:r>
-          </a:p>
-          <a:p>
-            <a:pPr>
-              <a:defRPr sz="2000"/>
-            </a:pPr>
-            <a:r>
-              <a:t>We compare a generative model (Naive Bayes) with a discriminative model (Logistic Regression).</a:t>
+          <p:cNvPr id="2" name="Rectangle 1"/>
+          <p:cNvSpPr/>
+          <p:nvPr/>
+        </p:nvSpPr>
+        <p:spPr>
+          <a:xfrm>
+            <a:off x="0" y="0"/>
+            <a:ext cx="9144000" cy="1005840"/>
+          </a:xfrm>
+          <a:prstGeom prst="rect">
+            <a:avLst/>
+          </a:prstGeom>
+          <a:solidFill>
+            <a:srgbClr val="1E3C72"/>
+          </a:solidFill>
+          <a:ln>
+            <a:noFill/>
+          </a:ln>
+        </p:spPr>
+        <p:style>
+          <a:lnRef idx="1">
+            <a:schemeClr val="accent1"/>
+          </a:lnRef>
+          <a:fillRef idx="3">
+            <a:schemeClr val="accent1"/>
+          </a:fillRef>
+          <a:effectRef idx="2">
+            <a:schemeClr val="accent1"/>
+          </a:effectRef>
+          <a:fontRef idx="minor">
+            <a:schemeClr val="lt1"/>
+          </a:fontRef>
+        </p:style>
+        <p:txBody>
+          <a:bodyPr rtlCol="0" anchor="ctr"/>
+          <a:lstStyle/>
+          <a:p>
+            <a:pPr algn="ctr"/>
+          </a:p>
+        </p:txBody>
+      </p:sp>
+      <p:sp>
+        <p:nvSpPr>
+          <p:cNvPr id="3" name="TextBox 2"/>
+          <p:cNvSpPr txBox="1"/>
+          <p:nvPr/>
+        </p:nvSpPr>
+        <p:spPr>
+          <a:xfrm>
+            <a:off x="457200" y="228600"/>
+            <a:ext cx="8229600" cy="640080"/>
+          </a:xfrm>
+          <a:prstGeom prst="rect">
+            <a:avLst/>
+          </a:prstGeom>
+          <a:noFill/>
+        </p:spPr>
+        <p:txBody>
+          <a:bodyPr wrap="none">
+            <a:spAutoFit/>
+          </a:bodyPr>
+          <a:lstStyle/>
+          <a:p>
+            <a:pPr>
+              <a:defRPr sz="2800" b="1">
+                <a:solidFill>
+                  <a:srgbClr val="FFFFFF"/>
+                </a:solidFill>
+                <a:latin typeface="Calibri"/>
+              </a:defRPr>
+            </a:pPr>
+            <a:r>
+              <a:t>Agenda</a:t>
+            </a:r>
+          </a:p>
+        </p:txBody>
+      </p:sp>
+      <p:sp>
+        <p:nvSpPr>
+          <p:cNvPr id="4" name="TextBox 3"/>
+          <p:cNvSpPr txBox="1"/>
+          <p:nvPr/>
+        </p:nvSpPr>
+        <p:spPr>
+          <a:xfrm>
+            <a:off x="548640" y="1280160"/>
+            <a:ext cx="8046720" cy="5029200"/>
+          </a:xfrm>
+          <a:prstGeom prst="rect">
+            <a:avLst/>
+          </a:prstGeom>
+          <a:noFill/>
+        </p:spPr>
+        <p:txBody>
+          <a:bodyPr wrap="square">
+            <a:spAutoFit/>
+          </a:bodyPr>
+          <a:lstStyle/>
+          <a:p>
+            <a:pPr>
+              <a:spcAft>
+                <a:spcPts val="600"/>
+              </a:spcAft>
+              <a:defRPr sz="2000">
+                <a:solidFill>
+                  <a:srgbClr val="333333"/>
+                </a:solidFill>
+              </a:defRPr>
+            </a:pPr>
+            <a:r>
+              <a:t>1. Motivation &amp; Problem Statement</a:t>
+            </a:r>
+          </a:p>
+          <a:p>
+            <a:pPr>
+              <a:spcAft>
+                <a:spcPts val="600"/>
+              </a:spcAft>
+              <a:defRPr sz="2000">
+                <a:solidFill>
+                  <a:srgbClr val="333333"/>
+                </a:solidFill>
+              </a:defRPr>
+            </a:pPr>
+            <a:r>
+              <a:t>2. Dataset &amp; Features</a:t>
+            </a:r>
+          </a:p>
+          <a:p>
+            <a:pPr>
+              <a:spcAft>
+                <a:spcPts val="600"/>
+              </a:spcAft>
+              <a:defRPr sz="2000">
+                <a:solidFill>
+                  <a:srgbClr val="333333"/>
+                </a:solidFill>
+              </a:defRPr>
+            </a:pPr>
+            <a:r>
+              <a:t>3. Methodology &amp; Workflow</a:t>
+            </a:r>
+          </a:p>
+          <a:p>
+            <a:pPr>
+              <a:spcAft>
+                <a:spcPts val="600"/>
+              </a:spcAft>
+              <a:defRPr sz="2000">
+                <a:solidFill>
+                  <a:srgbClr val="333333"/>
+                </a:solidFill>
+              </a:defRPr>
+            </a:pPr>
+            <a:r>
+              <a:t>4. Models: Naive Bayes vs. Logistic Regression</a:t>
+            </a:r>
+          </a:p>
+          <a:p>
+            <a:pPr>
+              <a:spcAft>
+                <a:spcPts val="600"/>
+              </a:spcAft>
+              <a:defRPr sz="2000">
+                <a:solidFill>
+                  <a:srgbClr val="333333"/>
+                </a:solidFill>
+              </a:defRPr>
+            </a:pPr>
+            <a:r>
+              <a:t>5. Results, Analysis &amp; Feature Importance</a:t>
+            </a:r>
+          </a:p>
+          <a:p>
+            <a:pPr>
+              <a:spcAft>
+                <a:spcPts val="600"/>
+              </a:spcAft>
+              <a:defRPr sz="2000">
+                <a:solidFill>
+                  <a:srgbClr val="333333"/>
+                </a:solidFill>
+              </a:defRPr>
+            </a:pPr>
+            <a:r>
+              <a:t>6. Improvements Over the Reference Report</a:t>
+            </a:r>
+          </a:p>
+          <a:p>
+            <a:pPr>
+              <a:spcAft>
+                <a:spcPts val="600"/>
+              </a:spcAft>
+              <a:defRPr sz="2000">
+                <a:solidFill>
+                  <a:srgbClr val="333333"/>
+                </a:solidFill>
+              </a:defRPr>
+            </a:pPr>
+            <a:r>
+              <a:t>7. Limitations &amp; Future Work</a:t>
+            </a:r>
+          </a:p>
+          <a:p>
+            <a:pPr>
+              <a:spcAft>
+                <a:spcPts val="600"/>
+              </a:spcAft>
+              <a:defRPr sz="2000">
+                <a:solidFill>
+                  <a:srgbClr val="333333"/>
+                </a:solidFill>
+              </a:defRPr>
+            </a:pPr>
+            <a:r>
+              <a:t>8. Live Demo Notes &amp; Conclusion</a:t>
+            </a:r>
+          </a:p>
+        </p:txBody>
+      </p:sp>
+    </p:spTree>
+  </p:cSld>
+  <p:clrMapOvr>
+    <a:masterClrMapping/>
+  </p:clrMapOvr>
+</p:sld>
+</file>
+
+<file path=ppt/slides/slide20.xml><?xml version="1.0" encoding="utf-8"?>
+<p:sld xmlns:a="http://schemas.openxmlformats.org/drawingml/2006/main" xmlns:p="http://schemas.openxmlformats.org/presentationml/2006/main" xmlns:r="http://schemas.openxmlformats.org/officeDocument/2006/relationships">
+  <p:cSld>
+    <p:bg>
+      <p:bgPr>
+        <a:solidFill>
+          <a:srgbClr val="2A5298"/>
+        </a:solidFill>
+        <a:effectLst/>
+      </p:bgPr>
+    </p:bg>
+    <p:spTree>
+      <p:nvGrpSpPr>
+        <p:cNvPr id="1" name=""/>
+        <p:cNvGrpSpPr/>
+        <p:nvPr/>
+      </p:nvGrpSpPr>
+      <p:grpSpPr/>
+      <p:sp>
+        <p:nvSpPr>
+          <p:cNvPr id="2" name="TextBox 1"/>
+          <p:cNvSpPr txBox="1"/>
+          <p:nvPr/>
+        </p:nvSpPr>
+        <p:spPr>
+          <a:xfrm>
+            <a:off x="914400" y="2286000"/>
+            <a:ext cx="7315200" cy="914400"/>
+          </a:xfrm>
+          <a:prstGeom prst="rect">
+            <a:avLst/>
+          </a:prstGeom>
+          <a:noFill/>
+        </p:spPr>
+        <p:txBody>
+          <a:bodyPr wrap="none">
+            <a:spAutoFit/>
+          </a:bodyPr>
+          <a:lstStyle/>
+          <a:p>
+            <a:pPr algn="ctr">
+              <a:defRPr sz="2400" b="1">
+                <a:solidFill>
+                  <a:srgbClr val="B4C8E6"/>
+                </a:solidFill>
+              </a:defRPr>
+            </a:pPr>
+            <a:r>
+              <a:t>PART 05</a:t>
+            </a:r>
+          </a:p>
+        </p:txBody>
+      </p:sp>
+      <p:sp>
+        <p:nvSpPr>
+          <p:cNvPr id="3" name="TextBox 2"/>
+          <p:cNvSpPr txBox="1"/>
+          <p:nvPr/>
+        </p:nvSpPr>
+        <p:spPr>
+          <a:xfrm>
+            <a:off x="914400" y="3017520"/>
+            <a:ext cx="7315200" cy="1097280"/>
+          </a:xfrm>
+          <a:prstGeom prst="rect">
+            <a:avLst/>
+          </a:prstGeom>
+          <a:noFill/>
+        </p:spPr>
+        <p:txBody>
+          <a:bodyPr wrap="none">
+            <a:spAutoFit/>
+          </a:bodyPr>
+          <a:lstStyle/>
+          <a:p>
+            <a:pPr algn="ctr">
+              <a:defRPr sz="4400" b="1">
+                <a:solidFill>
+                  <a:srgbClr val="FFFFFF"/>
+                </a:solidFill>
+              </a:defRPr>
+            </a:pPr>
+            <a:r>
+              <a:t>Improvements Over Reference</a:t>
+            </a:r>
+          </a:p>
+        </p:txBody>
+      </p:sp>
+    </p:spTree>
+  </p:cSld>
+  <p:clrMapOvr>
+    <a:masterClrMapping/>
+  </p:clrMapOvr>
+</p:sld>
+</file>
+
+<file path=ppt/slides/slide21.xml><?xml version="1.0" encoding="utf-8"?>
+<p:sld xmlns:a="http://schemas.openxmlformats.org/drawingml/2006/main" xmlns:p="http://schemas.openxmlformats.org/presentationml/2006/main" xmlns:r="http://schemas.openxmlformats.org/officeDocument/2006/relationships">
+  <p:cSld>
+    <p:bg>
+      <p:bgPr>
+        <a:solidFill>
+          <a:srgbClr val="FFFFFF"/>
+        </a:solidFill>
+        <a:effectLst/>
+      </p:bgPr>
+    </p:bg>
+    <p:spTree>
+      <p:nvGrpSpPr>
+        <p:cNvPr id="1" name=""/>
+        <p:cNvGrpSpPr/>
+        <p:nvPr/>
+      </p:nvGrpSpPr>
+      <p:grpSpPr/>
+      <p:sp>
+        <p:nvSpPr>
+          <p:cNvPr id="2" name="Rectangle 1"/>
+          <p:cNvSpPr/>
+          <p:nvPr/>
+        </p:nvSpPr>
+        <p:spPr>
+          <a:xfrm>
+            <a:off x="0" y="0"/>
+            <a:ext cx="9144000" cy="1005840"/>
+          </a:xfrm>
+          <a:prstGeom prst="rect">
+            <a:avLst/>
+          </a:prstGeom>
+          <a:solidFill>
+            <a:srgbClr val="1E3C72"/>
+          </a:solidFill>
+          <a:ln>
+            <a:noFill/>
+          </a:ln>
+        </p:spPr>
+        <p:style>
+          <a:lnRef idx="1">
+            <a:schemeClr val="accent1"/>
+          </a:lnRef>
+          <a:fillRef idx="3">
+            <a:schemeClr val="accent1"/>
+          </a:fillRef>
+          <a:effectRef idx="2">
+            <a:schemeClr val="accent1"/>
+          </a:effectRef>
+          <a:fontRef idx="minor">
+            <a:schemeClr val="lt1"/>
+          </a:fontRef>
+        </p:style>
+        <p:txBody>
+          <a:bodyPr rtlCol="0" anchor="ctr"/>
+          <a:lstStyle/>
+          <a:p>
+            <a:pPr algn="ctr"/>
+          </a:p>
+        </p:txBody>
+      </p:sp>
+      <p:sp>
+        <p:nvSpPr>
+          <p:cNvPr id="3" name="TextBox 2"/>
+          <p:cNvSpPr txBox="1"/>
+          <p:nvPr/>
+        </p:nvSpPr>
+        <p:spPr>
+          <a:xfrm>
+            <a:off x="457200" y="228600"/>
+            <a:ext cx="8229600" cy="640080"/>
+          </a:xfrm>
+          <a:prstGeom prst="rect">
+            <a:avLst/>
+          </a:prstGeom>
+          <a:noFill/>
+        </p:spPr>
+        <p:txBody>
+          <a:bodyPr wrap="none">
+            <a:spAutoFit/>
+          </a:bodyPr>
+          <a:lstStyle/>
+          <a:p>
+            <a:pPr>
+              <a:defRPr sz="2800" b="1">
+                <a:solidFill>
+                  <a:srgbClr val="FFFFFF"/>
+                </a:solidFill>
+                <a:latin typeface="Calibri"/>
+              </a:defRPr>
+            </a:pPr>
+            <a:r>
+              <a:t>How We Improved Upon the Sample Report</a:t>
+            </a:r>
+          </a:p>
+        </p:txBody>
+      </p:sp>
+      <p:sp>
+        <p:nvSpPr>
+          <p:cNvPr id="4" name="TextBox 3"/>
+          <p:cNvSpPr txBox="1"/>
+          <p:nvPr/>
+        </p:nvSpPr>
+        <p:spPr>
+          <a:xfrm>
+            <a:off x="457200" y="1280160"/>
+            <a:ext cx="8229600" cy="365760"/>
+          </a:xfrm>
+          <a:prstGeom prst="rect">
+            <a:avLst/>
+          </a:prstGeom>
+          <a:noFill/>
+        </p:spPr>
+        <p:txBody>
+          <a:bodyPr wrap="none">
+            <a:spAutoFit/>
+          </a:bodyPr>
+          <a:lstStyle/>
+          <a:p>
+            <a:pPr>
+              <a:defRPr sz="1600" i="1">
+                <a:solidFill>
+                  <a:srgbClr val="333333"/>
+                </a:solidFill>
+              </a:defRPr>
+            </a:pPr>
+            <a:r>
+              <a:t>Going beyond the reference sample project</a:t>
+            </a:r>
+          </a:p>
+        </p:txBody>
+      </p:sp>
+      <p:sp>
+        <p:nvSpPr>
+          <p:cNvPr id="5" name="TextBox 4"/>
+          <p:cNvSpPr txBox="1"/>
+          <p:nvPr/>
+        </p:nvSpPr>
+        <p:spPr>
+          <a:xfrm>
+            <a:off x="548640" y="1737360"/>
+            <a:ext cx="8046720" cy="5029200"/>
+          </a:xfrm>
+          <a:prstGeom prst="rect">
+            <a:avLst/>
+          </a:prstGeom>
+          <a:noFill/>
+        </p:spPr>
+        <p:txBody>
+          <a:bodyPr wrap="square">
+            <a:spAutoFit/>
+          </a:bodyPr>
+          <a:lstStyle/>
+          <a:p>
+            <a:pPr>
+              <a:spcAft>
+                <a:spcPts val="600"/>
+              </a:spcAft>
+              <a:defRPr sz="2000">
+                <a:solidFill>
+                  <a:srgbClr val="333333"/>
+                </a:solidFill>
+              </a:defRPr>
+            </a:pPr>
+            <a:r>
+              <a:t>1. Reproducible pipeline: every step is scripted (data, training, visuals, slides).</a:t>
+            </a:r>
+          </a:p>
+          <a:p>
+            <a:pPr>
+              <a:spcAft>
+                <a:spcPts val="600"/>
+              </a:spcAft>
+              <a:defRPr sz="2000">
+                <a:solidFill>
+                  <a:srgbClr val="333333"/>
+                </a:solidFill>
+              </a:defRPr>
+            </a:pPr>
+            <a:r>
+              <a:t>2. Better dataset handling: used a verified Kaggle dataset instead of manual scraping.</a:t>
+            </a:r>
+          </a:p>
+          <a:p>
+            <a:pPr>
+              <a:spcAft>
+                <a:spcPts val="600"/>
+              </a:spcAft>
+              <a:defRPr sz="2000">
+                <a:solidFill>
+                  <a:srgbClr val="333333"/>
+                </a:solidFill>
+              </a:defRPr>
+            </a:pPr>
+            <a:r>
+              <a:t>3. Two evaluation modes: pure + seasonal, giving a more realistic accuracy measure.</a:t>
+            </a:r>
+          </a:p>
+          <a:p>
+            <a:pPr>
+              <a:spcAft>
+                <a:spcPts val="600"/>
+              </a:spcAft>
+              <a:defRPr sz="2000">
+                <a:solidFill>
+                  <a:srgbClr val="333333"/>
+                </a:solidFill>
+              </a:defRPr>
+            </a:pPr>
+            <a:r>
+              <a:t>4. Feature importance analysis: clear ranking of which stats drive predictions.</a:t>
+            </a:r>
+          </a:p>
+          <a:p>
+            <a:pPr>
+              <a:spcAft>
+                <a:spcPts val="600"/>
+              </a:spcAft>
+              <a:defRPr sz="2000">
+                <a:solidFill>
+                  <a:srgbClr val="333333"/>
+                </a:solidFill>
+              </a:defRPr>
+            </a:pPr>
+            <a:r>
+              <a:t>5. Visual results: accuracy charts, confusion matrices, and feature plots.</a:t>
+            </a:r>
+          </a:p>
+          <a:p>
+            <a:pPr>
+              <a:spcAft>
+                <a:spcPts val="600"/>
+              </a:spcAft>
+              <a:defRPr sz="2000">
+                <a:solidFill>
+                  <a:srgbClr val="333333"/>
+                </a:solidFill>
+              </a:defRPr>
+            </a:pPr>
+            <a:r>
+              <a:t>6. Professional deliverables: HTML poster and a complete PowerPoint deck.</a:t>
+            </a:r>
+          </a:p>
+          <a:p>
+            <a:pPr>
+              <a:spcAft>
+                <a:spcPts val="600"/>
+              </a:spcAft>
+              <a:defRPr sz="2000">
+                <a:solidFill>
+                  <a:srgbClr val="333333"/>
+                </a:solidFill>
+              </a:defRPr>
+            </a:pPr>
+            <a:r>
+              <a:t>7. Comprehensive documentation: README + setup guide + final viva report.</a:t>
+            </a:r>
+          </a:p>
+        </p:txBody>
+      </p:sp>
+    </p:spTree>
+  </p:cSld>
+  <p:clrMapOvr>
+    <a:masterClrMapping/>
+  </p:clrMapOvr>
+</p:sld>
+</file>
+
+<file path=ppt/slides/slide22.xml><?xml version="1.0" encoding="utf-8"?>
+<p:sld xmlns:a="http://schemas.openxmlformats.org/drawingml/2006/main" xmlns:p="http://schemas.openxmlformats.org/presentationml/2006/main" xmlns:r="http://schemas.openxmlformats.org/officeDocument/2006/relationships">
+  <p:cSld>
+    <p:bg>
+      <p:bgPr>
+        <a:solidFill>
+          <a:srgbClr val="2A5298"/>
+        </a:solidFill>
+        <a:effectLst/>
+      </p:bgPr>
+    </p:bg>
+    <p:spTree>
+      <p:nvGrpSpPr>
+        <p:cNvPr id="1" name=""/>
+        <p:cNvGrpSpPr/>
+        <p:nvPr/>
+      </p:nvGrpSpPr>
+      <p:grpSpPr/>
+      <p:sp>
+        <p:nvSpPr>
+          <p:cNvPr id="2" name="TextBox 1"/>
+          <p:cNvSpPr txBox="1"/>
+          <p:nvPr/>
+        </p:nvSpPr>
+        <p:spPr>
+          <a:xfrm>
+            <a:off x="914400" y="2286000"/>
+            <a:ext cx="7315200" cy="914400"/>
+          </a:xfrm>
+          <a:prstGeom prst="rect">
+            <a:avLst/>
+          </a:prstGeom>
+          <a:noFill/>
+        </p:spPr>
+        <p:txBody>
+          <a:bodyPr wrap="none">
+            <a:spAutoFit/>
+          </a:bodyPr>
+          <a:lstStyle/>
+          <a:p>
+            <a:pPr algn="ctr">
+              <a:defRPr sz="2400" b="1">
+                <a:solidFill>
+                  <a:srgbClr val="B4C8E6"/>
+                </a:solidFill>
+              </a:defRPr>
+            </a:pPr>
+            <a:r>
+              <a:t>PART 06</a:t>
+            </a:r>
+          </a:p>
+        </p:txBody>
+      </p:sp>
+      <p:sp>
+        <p:nvSpPr>
+          <p:cNvPr id="3" name="TextBox 2"/>
+          <p:cNvSpPr txBox="1"/>
+          <p:nvPr/>
+        </p:nvSpPr>
+        <p:spPr>
+          <a:xfrm>
+            <a:off x="914400" y="3017520"/>
+            <a:ext cx="7315200" cy="1097280"/>
+          </a:xfrm>
+          <a:prstGeom prst="rect">
+            <a:avLst/>
+          </a:prstGeom>
+          <a:noFill/>
+        </p:spPr>
+        <p:txBody>
+          <a:bodyPr wrap="none">
+            <a:spAutoFit/>
+          </a:bodyPr>
+          <a:lstStyle/>
+          <a:p>
+            <a:pPr algn="ctr">
+              <a:defRPr sz="4400" b="1">
+                <a:solidFill>
+                  <a:srgbClr val="FFFFFF"/>
+                </a:solidFill>
+              </a:defRPr>
+            </a:pPr>
+            <a:r>
+              <a:t>Limitations &amp; Future Work</a:t>
+            </a:r>
+          </a:p>
+        </p:txBody>
+      </p:sp>
+    </p:spTree>
+  </p:cSld>
+  <p:clrMapOvr>
+    <a:masterClrMapping/>
+  </p:clrMapOvr>
+</p:sld>
+</file>
+
+<file path=ppt/slides/slide23.xml><?xml version="1.0" encoding="utf-8"?>
+<p:sld xmlns:a="http://schemas.openxmlformats.org/drawingml/2006/main" xmlns:p="http://schemas.openxmlformats.org/presentationml/2006/main" xmlns:r="http://schemas.openxmlformats.org/officeDocument/2006/relationships">
+  <p:cSld>
+    <p:bg>
+      <p:bgPr>
+        <a:solidFill>
+          <a:srgbClr val="FFFFFF"/>
+        </a:solidFill>
+        <a:effectLst/>
+      </p:bgPr>
+    </p:bg>
+    <p:spTree>
+      <p:nvGrpSpPr>
+        <p:cNvPr id="1" name=""/>
+        <p:cNvGrpSpPr/>
+        <p:nvPr/>
+      </p:nvGrpSpPr>
+      <p:grpSpPr/>
+      <p:sp>
+        <p:nvSpPr>
+          <p:cNvPr id="2" name="Rectangle 1"/>
+          <p:cNvSpPr/>
+          <p:nvPr/>
+        </p:nvSpPr>
+        <p:spPr>
+          <a:xfrm>
+            <a:off x="0" y="0"/>
+            <a:ext cx="9144000" cy="1005840"/>
+          </a:xfrm>
+          <a:prstGeom prst="rect">
+            <a:avLst/>
+          </a:prstGeom>
+          <a:solidFill>
+            <a:srgbClr val="1E3C72"/>
+          </a:solidFill>
+          <a:ln>
+            <a:noFill/>
+          </a:ln>
+        </p:spPr>
+        <p:style>
+          <a:lnRef idx="1">
+            <a:schemeClr val="accent1"/>
+          </a:lnRef>
+          <a:fillRef idx="3">
+            <a:schemeClr val="accent1"/>
+          </a:fillRef>
+          <a:effectRef idx="2">
+            <a:schemeClr val="accent1"/>
+          </a:effectRef>
+          <a:fontRef idx="minor">
+            <a:schemeClr val="lt1"/>
+          </a:fontRef>
+        </p:style>
+        <p:txBody>
+          <a:bodyPr rtlCol="0" anchor="ctr"/>
+          <a:lstStyle/>
+          <a:p>
+            <a:pPr algn="ctr"/>
+          </a:p>
+        </p:txBody>
+      </p:sp>
+      <p:sp>
+        <p:nvSpPr>
+          <p:cNvPr id="3" name="TextBox 2"/>
+          <p:cNvSpPr txBox="1"/>
+          <p:nvPr/>
+        </p:nvSpPr>
+        <p:spPr>
+          <a:xfrm>
+            <a:off x="457200" y="228600"/>
+            <a:ext cx="8229600" cy="640080"/>
+          </a:xfrm>
+          <a:prstGeom prst="rect">
+            <a:avLst/>
+          </a:prstGeom>
+          <a:noFill/>
+        </p:spPr>
+        <p:txBody>
+          <a:bodyPr wrap="none">
+            <a:spAutoFit/>
+          </a:bodyPr>
+          <a:lstStyle/>
+          <a:p>
+            <a:pPr>
+              <a:defRPr sz="2800" b="1">
+                <a:solidFill>
+                  <a:srgbClr val="FFFFFF"/>
+                </a:solidFill>
+                <a:latin typeface="Calibri"/>
+              </a:defRPr>
+            </a:pPr>
+            <a:r>
+              <a:t>Limitations</a:t>
+            </a:r>
+          </a:p>
+        </p:txBody>
+      </p:sp>
+      <p:sp>
+        <p:nvSpPr>
+          <p:cNvPr id="4" name="Rounded Rectangle 3"/>
+          <p:cNvSpPr/>
+          <p:nvPr/>
+        </p:nvSpPr>
+        <p:spPr>
+          <a:xfrm>
+            <a:off x="365760" y="1280160"/>
+            <a:ext cx="4114800" cy="5120640"/>
+          </a:xfrm>
+          <a:prstGeom prst="roundRect">
+            <a:avLst/>
+          </a:prstGeom>
+          <a:solidFill>
+            <a:srgbClr val="E8F4F8"/>
+          </a:solidFill>
+          <a:ln w="19050">
+            <a:solidFill>
+              <a:srgbClr val="2A5298"/>
+            </a:solidFill>
+          </a:ln>
+        </p:spPr>
+        <p:style>
+          <a:lnRef idx="1">
+            <a:schemeClr val="accent1"/>
+          </a:lnRef>
+          <a:fillRef idx="3">
+            <a:schemeClr val="accent1"/>
+          </a:fillRef>
+          <a:effectRef idx="2">
+            <a:schemeClr val="accent1"/>
+          </a:effectRef>
+          <a:fontRef idx="minor">
+            <a:schemeClr val="lt1"/>
+          </a:fontRef>
+        </p:style>
+        <p:txBody>
+          <a:bodyPr rtlCol="0" anchor="ctr"/>
+          <a:lstStyle/>
+          <a:p>
+            <a:pPr algn="ctr"/>
+          </a:p>
+        </p:txBody>
+      </p:sp>
+      <p:sp>
+        <p:nvSpPr>
+          <p:cNvPr id="5" name="TextBox 4"/>
+          <p:cNvSpPr txBox="1"/>
+          <p:nvPr/>
+        </p:nvSpPr>
+        <p:spPr>
+          <a:xfrm>
+            <a:off x="548640" y="1463040"/>
+            <a:ext cx="3749039" cy="4754880"/>
+          </a:xfrm>
+          <a:prstGeom prst="rect">
+            <a:avLst/>
+          </a:prstGeom>
+          <a:noFill/>
+        </p:spPr>
+        <p:txBody>
+          <a:bodyPr wrap="square">
+            <a:spAutoFit/>
+          </a:bodyPr>
+          <a:lstStyle/>
+          <a:p>
+            <a:pPr>
+              <a:spcAft>
+                <a:spcPts val="800"/>
+              </a:spcAft>
+              <a:defRPr sz="2000" b="1">
+                <a:solidFill>
+                  <a:srgbClr val="1E3C72"/>
+                </a:solidFill>
+              </a:defRPr>
+            </a:pPr>
+            <a:r>
+              <a:t>Data Limitations</a:t>
+            </a:r>
+          </a:p>
+          <a:p>
+            <a:pPr>
+              <a:spcAft>
+                <a:spcPts val="600"/>
+              </a:spcAft>
+              <a:defRPr sz="1800">
+                <a:solidFill>
+                  <a:srgbClr val="333333"/>
+                </a:solidFill>
+              </a:defRPr>
+            </a:pPr>
+            <a:r>
+              <a:t>Very small dataset (60 rows)</a:t>
+            </a:r>
+          </a:p>
+          <a:p>
+            <a:pPr>
+              <a:spcAft>
+                <a:spcPts val="600"/>
+              </a:spcAft>
+              <a:defRPr sz="1800">
+                <a:solidFill>
+                  <a:srgbClr val="333333"/>
+                </a:solidFill>
+              </a:defRPr>
+            </a:pPr>
+            <a:r>
+              <a:t>Only top 3 finalists used</a:t>
+            </a:r>
+          </a:p>
+          <a:p>
+            <a:pPr>
+              <a:spcAft>
+                <a:spcPts val="600"/>
+              </a:spcAft>
+              <a:defRPr sz="1800">
+                <a:solidFill>
+                  <a:srgbClr val="333333"/>
+                </a:solidFill>
+              </a:defRPr>
+            </a:pPr>
+            <a:r>
+              <a:t>No team-level statistics</a:t>
+            </a:r>
+          </a:p>
+          <a:p>
+            <a:pPr>
+              <a:spcAft>
+                <a:spcPts val="600"/>
+              </a:spcAft>
+              <a:defRPr sz="1800">
+                <a:solidFill>
+                  <a:srgbClr val="333333"/>
+                </a:solidFill>
+              </a:defRPr>
+            </a:pPr>
+            <a:r>
+              <a:t>Missing advanced metrics</a:t>
+            </a:r>
+          </a:p>
+          <a:p>
+            <a:pPr>
+              <a:spcAft>
+                <a:spcPts val="600"/>
+              </a:spcAft>
+              <a:defRPr sz="1800">
+                <a:solidFill>
+                  <a:srgbClr val="333333"/>
+                </a:solidFill>
+              </a:defRPr>
+            </a:pPr>
+            <a:r>
+              <a:t>No player injury data</a:t>
+            </a:r>
+          </a:p>
+        </p:txBody>
+      </p:sp>
+      <p:sp>
+        <p:nvSpPr>
+          <p:cNvPr id="6" name="Rounded Rectangle 5"/>
+          <p:cNvSpPr/>
+          <p:nvPr/>
+        </p:nvSpPr>
+        <p:spPr>
+          <a:xfrm>
+            <a:off x="4663440" y="1280160"/>
+            <a:ext cx="4114800" cy="5120640"/>
+          </a:xfrm>
+          <a:prstGeom prst="roundRect">
+            <a:avLst/>
+          </a:prstGeom>
+          <a:solidFill>
+            <a:srgbClr val="E8F4F8"/>
+          </a:solidFill>
+          <a:ln w="19050">
+            <a:solidFill>
+              <a:srgbClr val="2A5298"/>
+            </a:solidFill>
+          </a:ln>
+        </p:spPr>
+        <p:style>
+          <a:lnRef idx="1">
+            <a:schemeClr val="accent1"/>
+          </a:lnRef>
+          <a:fillRef idx="3">
+            <a:schemeClr val="accent1"/>
+          </a:fillRef>
+          <a:effectRef idx="2">
+            <a:schemeClr val="accent1"/>
+          </a:effectRef>
+          <a:fontRef idx="minor">
+            <a:schemeClr val="lt1"/>
+          </a:fontRef>
+        </p:style>
+        <p:txBody>
+          <a:bodyPr rtlCol="0" anchor="ctr"/>
+          <a:lstStyle/>
+          <a:p>
+            <a:pPr algn="ctr"/>
+          </a:p>
+        </p:txBody>
+      </p:sp>
+      <p:sp>
+        <p:nvSpPr>
+          <p:cNvPr id="7" name="TextBox 6"/>
+          <p:cNvSpPr txBox="1"/>
+          <p:nvPr/>
+        </p:nvSpPr>
+        <p:spPr>
+          <a:xfrm>
+            <a:off x="4846320" y="1463040"/>
+            <a:ext cx="3749039" cy="4754880"/>
+          </a:xfrm>
+          <a:prstGeom prst="rect">
+            <a:avLst/>
+          </a:prstGeom>
+          <a:noFill/>
+        </p:spPr>
+        <p:txBody>
+          <a:bodyPr wrap="square">
+            <a:spAutoFit/>
+          </a:bodyPr>
+          <a:lstStyle/>
+          <a:p>
+            <a:pPr>
+              <a:spcAft>
+                <a:spcPts val="800"/>
+              </a:spcAft>
+              <a:defRPr sz="2000" b="1">
+                <a:solidFill>
+                  <a:srgbClr val="1E3C72"/>
+                </a:solidFill>
+              </a:defRPr>
+            </a:pPr>
+            <a:r>
+              <a:t>Modeling Limitations</a:t>
+            </a:r>
+          </a:p>
+          <a:p>
+            <a:pPr>
+              <a:spcAft>
+                <a:spcPts val="600"/>
+              </a:spcAft>
+              <a:defRPr sz="1800">
+                <a:solidFill>
+                  <a:srgbClr val="333333"/>
+                </a:solidFill>
+              </a:defRPr>
+            </a:pPr>
+            <a:r>
+              <a:t>Naive Bayes independence assumption violated</a:t>
+            </a:r>
+          </a:p>
+          <a:p>
+            <a:pPr>
+              <a:spcAft>
+                <a:spcPts val="600"/>
+              </a:spcAft>
+              <a:defRPr sz="1800">
+                <a:solidFill>
+                  <a:srgbClr val="333333"/>
+                </a:solidFill>
+              </a:defRPr>
+            </a:pPr>
+            <a:r>
+              <a:t>Logistic Regression is linear only</a:t>
+            </a:r>
+          </a:p>
+          <a:p>
+            <a:pPr>
+              <a:spcAft>
+                <a:spcPts val="600"/>
+              </a:spcAft>
+              <a:defRPr sz="1800">
+                <a:solidFill>
+                  <a:srgbClr val="333333"/>
+                </a:solidFill>
+              </a:defRPr>
+            </a:pPr>
+            <a:r>
+              <a:t>No ensemble or deep learning</a:t>
+            </a:r>
+          </a:p>
+          <a:p>
+            <a:pPr>
+              <a:spcAft>
+                <a:spcPts val="600"/>
+              </a:spcAft>
+              <a:defRPr sz="1800">
+                <a:solidFill>
+                  <a:srgbClr val="333333"/>
+                </a:solidFill>
+              </a:defRPr>
+            </a:pPr>
+            <a:r>
+              <a:t>Cannot capture voter narrative/bias</a:t>
+            </a:r>
+          </a:p>
+          <a:p>
+            <a:pPr>
+              <a:spcAft>
+                <a:spcPts val="600"/>
+              </a:spcAft>
+              <a:defRPr sz="1800">
+                <a:solidFill>
+                  <a:srgbClr val="333333"/>
+                </a:solidFill>
+              </a:defRPr>
+            </a:pPr>
+            <a:r>
+              <a:t>Risk of overfitting</a:t>
+            </a:r>
+          </a:p>
+        </p:txBody>
+      </p:sp>
+    </p:spTree>
+  </p:cSld>
+  <p:clrMapOvr>
+    <a:masterClrMapping/>
+  </p:clrMapOvr>
+</p:sld>
+</file>
+
+<file path=ppt/slides/slide24.xml><?xml version="1.0" encoding="utf-8"?>
+<p:sld xmlns:a="http://schemas.openxmlformats.org/drawingml/2006/main" xmlns:p="http://schemas.openxmlformats.org/presentationml/2006/main" xmlns:r="http://schemas.openxmlformats.org/officeDocument/2006/relationships">
+  <p:cSld>
+    <p:bg>
+      <p:bgPr>
+        <a:solidFill>
+          <a:srgbClr val="FFFFFF"/>
+        </a:solidFill>
+        <a:effectLst/>
+      </p:bgPr>
+    </p:bg>
+    <p:spTree>
+      <p:nvGrpSpPr>
+        <p:cNvPr id="1" name=""/>
+        <p:cNvGrpSpPr/>
+        <p:nvPr/>
+      </p:nvGrpSpPr>
+      <p:grpSpPr/>
+      <p:sp>
+        <p:nvSpPr>
+          <p:cNvPr id="2" name="Rectangle 1"/>
+          <p:cNvSpPr/>
+          <p:nvPr/>
+        </p:nvSpPr>
+        <p:spPr>
+          <a:xfrm>
+            <a:off x="0" y="0"/>
+            <a:ext cx="9144000" cy="1005840"/>
+          </a:xfrm>
+          <a:prstGeom prst="rect">
+            <a:avLst/>
+          </a:prstGeom>
+          <a:solidFill>
+            <a:srgbClr val="1E3C72"/>
+          </a:solidFill>
+          <a:ln>
+            <a:noFill/>
+          </a:ln>
+        </p:spPr>
+        <p:style>
+          <a:lnRef idx="1">
+            <a:schemeClr val="accent1"/>
+          </a:lnRef>
+          <a:fillRef idx="3">
+            <a:schemeClr val="accent1"/>
+          </a:fillRef>
+          <a:effectRef idx="2">
+            <a:schemeClr val="accent1"/>
+          </a:effectRef>
+          <a:fontRef idx="minor">
+            <a:schemeClr val="lt1"/>
+          </a:fontRef>
+        </p:style>
+        <p:txBody>
+          <a:bodyPr rtlCol="0" anchor="ctr"/>
+          <a:lstStyle/>
+          <a:p>
+            <a:pPr algn="ctr"/>
+          </a:p>
+        </p:txBody>
+      </p:sp>
+      <p:sp>
+        <p:nvSpPr>
+          <p:cNvPr id="3" name="TextBox 2"/>
+          <p:cNvSpPr txBox="1"/>
+          <p:nvPr/>
+        </p:nvSpPr>
+        <p:spPr>
+          <a:xfrm>
+            <a:off x="457200" y="228600"/>
+            <a:ext cx="8229600" cy="640080"/>
+          </a:xfrm>
+          <a:prstGeom prst="rect">
+            <a:avLst/>
+          </a:prstGeom>
+          <a:noFill/>
+        </p:spPr>
+        <p:txBody>
+          <a:bodyPr wrap="none">
+            <a:spAutoFit/>
+          </a:bodyPr>
+          <a:lstStyle/>
+          <a:p>
+            <a:pPr>
+              <a:defRPr sz="2800" b="1">
+                <a:solidFill>
+                  <a:srgbClr val="FFFFFF"/>
+                </a:solidFill>
+                <a:latin typeface="Calibri"/>
+              </a:defRPr>
+            </a:pPr>
+            <a:r>
+              <a:t>Future Work</a:t>
+            </a:r>
+          </a:p>
+        </p:txBody>
+      </p:sp>
+      <p:sp>
+        <p:nvSpPr>
+          <p:cNvPr id="4" name="TextBox 3"/>
+          <p:cNvSpPr txBox="1"/>
+          <p:nvPr/>
+        </p:nvSpPr>
+        <p:spPr>
+          <a:xfrm>
+            <a:off x="457200" y="1280160"/>
+            <a:ext cx="8229600" cy="365760"/>
+          </a:xfrm>
+          <a:prstGeom prst="rect">
+            <a:avLst/>
+          </a:prstGeom>
+          <a:noFill/>
+        </p:spPr>
+        <p:txBody>
+          <a:bodyPr wrap="none">
+            <a:spAutoFit/>
+          </a:bodyPr>
+          <a:lstStyle/>
+          <a:p>
+            <a:pPr>
+              <a:defRPr sz="1600" i="1">
+                <a:solidFill>
+                  <a:srgbClr val="333333"/>
+                </a:solidFill>
+              </a:defRPr>
+            </a:pPr>
+            <a:r>
+              <a:t>How the project can be extended</a:t>
+            </a:r>
+          </a:p>
+        </p:txBody>
+      </p:sp>
+      <p:sp>
+        <p:nvSpPr>
+          <p:cNvPr id="5" name="TextBox 4"/>
+          <p:cNvSpPr txBox="1"/>
+          <p:nvPr/>
+        </p:nvSpPr>
+        <p:spPr>
+          <a:xfrm>
+            <a:off x="548640" y="1737360"/>
+            <a:ext cx="8046720" cy="5029200"/>
+          </a:xfrm>
+          <a:prstGeom prst="rect">
+            <a:avLst/>
+          </a:prstGeom>
+          <a:noFill/>
+        </p:spPr>
+        <p:txBody>
+          <a:bodyPr wrap="square">
+            <a:spAutoFit/>
+          </a:bodyPr>
+          <a:lstStyle/>
+          <a:p>
+            <a:pPr>
+              <a:spcAft>
+                <a:spcPts val="600"/>
+              </a:spcAft>
+              <a:defRPr sz="2000">
+                <a:solidFill>
+                  <a:srgbClr val="333333"/>
+                </a:solidFill>
+              </a:defRPr>
+            </a:pPr>
+            <a:r>
+              <a:t>Add team-level features: wins, losses, playoff seed, point differential, strength of schedule.</a:t>
+            </a:r>
+          </a:p>
+          <a:p>
+            <a:pPr>
+              <a:spcAft>
+                <a:spcPts val="600"/>
+              </a:spcAft>
+              <a:defRPr sz="2000">
+                <a:solidFill>
+                  <a:srgbClr val="333333"/>
+                </a:solidFill>
+              </a:defRPr>
+            </a:pPr>
+            <a:r>
+              <a:t>Include advanced player metrics: PER, win shares (WS), box plus-minus (BPM), VORP.</a:t>
+            </a:r>
+          </a:p>
+          <a:p>
+            <a:pPr>
+              <a:spcAft>
+                <a:spcPts val="600"/>
+              </a:spcAft>
+              <a:defRPr sz="2000">
+                <a:solidFill>
+                  <a:srgbClr val="333333"/>
+                </a:solidFill>
+              </a:defRPr>
+            </a:pPr>
+            <a:r>
+              <a:t>Expand the dataset to include more seasons and all MVP vote-getters, not just top 3.</a:t>
+            </a:r>
+          </a:p>
+          <a:p>
+            <a:pPr>
+              <a:spcAft>
+                <a:spcPts val="600"/>
+              </a:spcAft>
+              <a:defRPr sz="2000">
+                <a:solidFill>
+                  <a:srgbClr val="333333"/>
+                </a:solidFill>
+              </a:defRPr>
+            </a:pPr>
+            <a:r>
+              <a:t>Try ensemble methods: Random Forest, XGBoost, Gradient Boosting.</a:t>
+            </a:r>
+          </a:p>
+          <a:p>
+            <a:pPr>
+              <a:spcAft>
+                <a:spcPts val="600"/>
+              </a:spcAft>
+              <a:defRPr sz="2000">
+                <a:solidFill>
+                  <a:srgbClr val="333333"/>
+                </a:solidFill>
+              </a:defRPr>
+            </a:pPr>
+            <a:r>
+              <a:t>Perform hyperparameter tuning with cross-validation.</a:t>
+            </a:r>
+          </a:p>
+          <a:p>
+            <a:pPr>
+              <a:spcAft>
+                <a:spcPts val="600"/>
+              </a:spcAft>
+              <a:defRPr sz="2000">
+                <a:solidFill>
+                  <a:srgbClr val="333333"/>
+                </a:solidFill>
+              </a:defRPr>
+            </a:pPr>
+            <a:r>
+              <a:t>Use actual MVP vote counts as a continuous target instead of binary labels.</a:t>
+            </a:r>
+          </a:p>
+        </p:txBody>
+      </p:sp>
+    </p:spTree>
+  </p:cSld>
+  <p:clrMapOvr>
+    <a:masterClrMapping/>
+  </p:clrMapOvr>
+</p:sld>
+</file>
+
+<file path=ppt/slides/slide25.xml><?xml version="1.0" encoding="utf-8"?>
+<p:sld xmlns:a="http://schemas.openxmlformats.org/drawingml/2006/main" xmlns:p="http://schemas.openxmlformats.org/presentationml/2006/main" xmlns:r="http://schemas.openxmlformats.org/officeDocument/2006/relationships">
+  <p:cSld>
+    <p:bg>
+      <p:bgPr>
+        <a:solidFill>
+          <a:srgbClr val="2A5298"/>
+        </a:solidFill>
+        <a:effectLst/>
+      </p:bgPr>
+    </p:bg>
+    <p:spTree>
+      <p:nvGrpSpPr>
+        <p:cNvPr id="1" name=""/>
+        <p:cNvGrpSpPr/>
+        <p:nvPr/>
+      </p:nvGrpSpPr>
+      <p:grpSpPr/>
+      <p:sp>
+        <p:nvSpPr>
+          <p:cNvPr id="2" name="TextBox 1"/>
+          <p:cNvSpPr txBox="1"/>
+          <p:nvPr/>
+        </p:nvSpPr>
+        <p:spPr>
+          <a:xfrm>
+            <a:off x="914400" y="2286000"/>
+            <a:ext cx="7315200" cy="914400"/>
+          </a:xfrm>
+          <a:prstGeom prst="rect">
+            <a:avLst/>
+          </a:prstGeom>
+          <a:noFill/>
+        </p:spPr>
+        <p:txBody>
+          <a:bodyPr wrap="none">
+            <a:spAutoFit/>
+          </a:bodyPr>
+          <a:lstStyle/>
+          <a:p>
+            <a:pPr algn="ctr">
+              <a:defRPr sz="2400" b="1">
+                <a:solidFill>
+                  <a:srgbClr val="B4C8E6"/>
+                </a:solidFill>
+              </a:defRPr>
+            </a:pPr>
+            <a:r>
+              <a:t>PART 07</a:t>
+            </a:r>
+          </a:p>
+        </p:txBody>
+      </p:sp>
+      <p:sp>
+        <p:nvSpPr>
+          <p:cNvPr id="3" name="TextBox 2"/>
+          <p:cNvSpPr txBox="1"/>
+          <p:nvPr/>
+        </p:nvSpPr>
+        <p:spPr>
+          <a:xfrm>
+            <a:off x="914400" y="3017520"/>
+            <a:ext cx="7315200" cy="1097280"/>
+          </a:xfrm>
+          <a:prstGeom prst="rect">
+            <a:avLst/>
+          </a:prstGeom>
+          <a:noFill/>
+        </p:spPr>
+        <p:txBody>
+          <a:bodyPr wrap="none">
+            <a:spAutoFit/>
+          </a:bodyPr>
+          <a:lstStyle/>
+          <a:p>
+            <a:pPr algn="ctr">
+              <a:defRPr sz="4400" b="1">
+                <a:solidFill>
+                  <a:srgbClr val="FFFFFF"/>
+                </a:solidFill>
+              </a:defRPr>
+            </a:pPr>
+            <a:r>
+              <a:t>Demo &amp; Conclusion</a:t>
+            </a:r>
+          </a:p>
+        </p:txBody>
+      </p:sp>
+    </p:spTree>
+  </p:cSld>
+  <p:clrMapOvr>
+    <a:masterClrMapping/>
+  </p:clrMapOvr>
+</p:sld>
+</file>
+
+<file path=ppt/slides/slide26.xml><?xml version="1.0" encoding="utf-8"?>
+<p:sld xmlns:a="http://schemas.openxmlformats.org/drawingml/2006/main" xmlns:p="http://schemas.openxmlformats.org/presentationml/2006/main" xmlns:r="http://schemas.openxmlformats.org/officeDocument/2006/relationships">
+  <p:cSld>
+    <p:bg>
+      <p:bgPr>
+        <a:solidFill>
+          <a:srgbClr val="FFFFFF"/>
+        </a:solidFill>
+        <a:effectLst/>
+      </p:bgPr>
+    </p:bg>
+    <p:spTree>
+      <p:nvGrpSpPr>
+        <p:cNvPr id="1" name=""/>
+        <p:cNvGrpSpPr/>
+        <p:nvPr/>
+      </p:nvGrpSpPr>
+      <p:grpSpPr/>
+      <p:sp>
+        <p:nvSpPr>
+          <p:cNvPr id="2" name="Rectangle 1"/>
+          <p:cNvSpPr/>
+          <p:nvPr/>
+        </p:nvSpPr>
+        <p:spPr>
+          <a:xfrm>
+            <a:off x="0" y="0"/>
+            <a:ext cx="9144000" cy="1005840"/>
+          </a:xfrm>
+          <a:prstGeom prst="rect">
+            <a:avLst/>
+          </a:prstGeom>
+          <a:solidFill>
+            <a:srgbClr val="1E3C72"/>
+          </a:solidFill>
+          <a:ln>
+            <a:noFill/>
+          </a:ln>
+        </p:spPr>
+        <p:style>
+          <a:lnRef idx="1">
+            <a:schemeClr val="accent1"/>
+          </a:lnRef>
+          <a:fillRef idx="3">
+            <a:schemeClr val="accent1"/>
+          </a:fillRef>
+          <a:effectRef idx="2">
+            <a:schemeClr val="accent1"/>
+          </a:effectRef>
+          <a:fontRef idx="minor">
+            <a:schemeClr val="lt1"/>
+          </a:fontRef>
+        </p:style>
+        <p:txBody>
+          <a:bodyPr rtlCol="0" anchor="ctr"/>
+          <a:lstStyle/>
+          <a:p>
+            <a:pPr algn="ctr"/>
+          </a:p>
+        </p:txBody>
+      </p:sp>
+      <p:sp>
+        <p:nvSpPr>
+          <p:cNvPr id="3" name="TextBox 2"/>
+          <p:cNvSpPr txBox="1"/>
+          <p:nvPr/>
+        </p:nvSpPr>
+        <p:spPr>
+          <a:xfrm>
+            <a:off x="457200" y="228600"/>
+            <a:ext cx="8229600" cy="640080"/>
+          </a:xfrm>
+          <a:prstGeom prst="rect">
+            <a:avLst/>
+          </a:prstGeom>
+          <a:noFill/>
+        </p:spPr>
+        <p:txBody>
+          <a:bodyPr wrap="none">
+            <a:spAutoFit/>
+          </a:bodyPr>
+          <a:lstStyle/>
+          <a:p>
+            <a:pPr>
+              <a:defRPr sz="2800" b="1">
+                <a:solidFill>
+                  <a:srgbClr val="FFFFFF"/>
+                </a:solidFill>
+                <a:latin typeface="Calibri"/>
+              </a:defRPr>
+            </a:pPr>
+            <a:r>
+              <a:t>Live Demo Script</a:t>
+            </a:r>
+          </a:p>
+        </p:txBody>
+      </p:sp>
+      <p:sp>
+        <p:nvSpPr>
+          <p:cNvPr id="4" name="TextBox 3"/>
+          <p:cNvSpPr txBox="1"/>
+          <p:nvPr/>
+        </p:nvSpPr>
+        <p:spPr>
+          <a:xfrm>
+            <a:off x="457200" y="1280160"/>
+            <a:ext cx="8229600" cy="365760"/>
+          </a:xfrm>
+          <a:prstGeom prst="rect">
+            <a:avLst/>
+          </a:prstGeom>
+          <a:noFill/>
+        </p:spPr>
+        <p:txBody>
+          <a:bodyPr wrap="none">
+            <a:spAutoFit/>
+          </a:bodyPr>
+          <a:lstStyle/>
+          <a:p>
+            <a:pPr>
+              <a:defRPr sz="1600" i="1">
+                <a:solidFill>
+                  <a:srgbClr val="333333"/>
+                </a:solidFill>
+              </a:defRPr>
+            </a:pPr>
+            <a:r>
+              <a:t>What to show during the review</a:t>
+            </a:r>
+          </a:p>
+        </p:txBody>
+      </p:sp>
+      <p:sp>
+        <p:nvSpPr>
+          <p:cNvPr id="5" name="TextBox 4"/>
+          <p:cNvSpPr txBox="1"/>
+          <p:nvPr/>
+        </p:nvSpPr>
+        <p:spPr>
+          <a:xfrm>
+            <a:off x="548640" y="1737360"/>
+            <a:ext cx="8046720" cy="5029200"/>
+          </a:xfrm>
+          <a:prstGeom prst="rect">
+            <a:avLst/>
+          </a:prstGeom>
+          <a:noFill/>
+        </p:spPr>
+        <p:txBody>
+          <a:bodyPr wrap="square">
+            <a:spAutoFit/>
+          </a:bodyPr>
+          <a:lstStyle/>
+          <a:p>
+            <a:pPr>
+              <a:spcAft>
+                <a:spcPts val="600"/>
+              </a:spcAft>
+              <a:defRPr sz="2000">
+                <a:solidFill>
+                  <a:srgbClr val="333333"/>
+                </a:solidFill>
+              </a:defRPr>
+            </a:pPr>
+            <a:r>
+              <a:t>1. Show the project folder and repository structure.</a:t>
+            </a:r>
+          </a:p>
+          <a:p>
+            <a:pPr>
+              <a:spcAft>
+                <a:spcPts val="600"/>
+              </a:spcAft>
+              <a:defRPr sz="2000">
+                <a:solidFill>
+                  <a:srgbClr val="333333"/>
+                </a:solidFill>
+              </a:defRPr>
+            </a:pPr>
+            <a:r>
+              <a:t>2. Run data preparation: python src/data_preparation.py</a:t>
+            </a:r>
+          </a:p>
+          <a:p>
+            <a:pPr>
+              <a:spcAft>
+                <a:spcPts val="600"/>
+              </a:spcAft>
+              <a:defRPr sz="2000">
+                <a:solidFill>
+                  <a:srgbClr val="333333"/>
+                </a:solidFill>
+              </a:defRPr>
+            </a:pPr>
+            <a:r>
+              <a:t>3. Run model training: python src/models.py</a:t>
+            </a:r>
+          </a:p>
+          <a:p>
+            <a:pPr>
+              <a:spcAft>
+                <a:spcPts val="600"/>
+              </a:spcAft>
+              <a:defRPr sz="2000">
+                <a:solidFill>
+                  <a:srgbClr val="333333"/>
+                </a:solidFill>
+              </a:defRPr>
+            </a:pPr>
+            <a:r>
+              <a:t>4. Show results/metrics.json and explain accuracies.</a:t>
+            </a:r>
+          </a:p>
+          <a:p>
+            <a:pPr>
+              <a:spcAft>
+                <a:spcPts val="600"/>
+              </a:spcAft>
+              <a:defRPr sz="2000">
+                <a:solidFill>
+                  <a:srgbClr val="333333"/>
+                </a:solidFill>
+              </a:defRPr>
+            </a:pPr>
+            <a:r>
+              <a:t>5. Display visualizations from reports/figures/.</a:t>
+            </a:r>
+          </a:p>
+          <a:p>
+            <a:pPr>
+              <a:spcAft>
+                <a:spcPts val="600"/>
+              </a:spcAft>
+              <a:defRPr sz="2000">
+                <a:solidFill>
+                  <a:srgbClr val="333333"/>
+                </a:solidFill>
+              </a:defRPr>
+            </a:pPr>
+            <a:r>
+              <a:t>6. Open the poster and PowerPoint for the panel.</a:t>
+            </a:r>
+          </a:p>
+          <a:p>
+            <a:pPr>
+              <a:spcAft>
+                <a:spcPts val="600"/>
+              </a:spcAft>
+              <a:defRPr sz="2000">
+                <a:solidFill>
+                  <a:srgbClr val="333333"/>
+                </a:solidFill>
+              </a:defRPr>
+            </a:pPr>
+            <a:r>
+              <a:t>7. Highlight the best result: Logistic Regression 66.7% seasonal accuracy.</a:t>
+            </a:r>
+          </a:p>
+        </p:txBody>
+      </p:sp>
+    </p:spTree>
+  </p:cSld>
+  <p:clrMapOvr>
+    <a:masterClrMapping/>
+  </p:clrMapOvr>
+</p:sld>
+</file>
+
+<file path=ppt/slides/slide27.xml><?xml version="1.0" encoding="utf-8"?>
+<p:sld xmlns:a="http://schemas.openxmlformats.org/drawingml/2006/main" xmlns:p="http://schemas.openxmlformats.org/presentationml/2006/main" xmlns:r="http://schemas.openxmlformats.org/officeDocument/2006/relationships">
+  <p:cSld>
+    <p:bg>
+      <p:bgPr>
+        <a:solidFill>
+          <a:srgbClr val="FFFFFF"/>
+        </a:solidFill>
+        <a:effectLst/>
+      </p:bgPr>
+    </p:bg>
+    <p:spTree>
+      <p:nvGrpSpPr>
+        <p:cNvPr id="1" name=""/>
+        <p:cNvGrpSpPr/>
+        <p:nvPr/>
+      </p:nvGrpSpPr>
+      <p:grpSpPr/>
+      <p:sp>
+        <p:nvSpPr>
+          <p:cNvPr id="2" name="Rectangle 1"/>
+          <p:cNvSpPr/>
+          <p:nvPr/>
+        </p:nvSpPr>
+        <p:spPr>
+          <a:xfrm>
+            <a:off x="0" y="0"/>
+            <a:ext cx="9144000" cy="1005840"/>
+          </a:xfrm>
+          <a:prstGeom prst="rect">
+            <a:avLst/>
+          </a:prstGeom>
+          <a:solidFill>
+            <a:srgbClr val="1E3C72"/>
+          </a:solidFill>
+          <a:ln>
+            <a:noFill/>
+          </a:ln>
+        </p:spPr>
+        <p:style>
+          <a:lnRef idx="1">
+            <a:schemeClr val="accent1"/>
+          </a:lnRef>
+          <a:fillRef idx="3">
+            <a:schemeClr val="accent1"/>
+          </a:fillRef>
+          <a:effectRef idx="2">
+            <a:schemeClr val="accent1"/>
+          </a:effectRef>
+          <a:fontRef idx="minor">
+            <a:schemeClr val="lt1"/>
+          </a:fontRef>
+        </p:style>
+        <p:txBody>
+          <a:bodyPr rtlCol="0" anchor="ctr"/>
+          <a:lstStyle/>
+          <a:p>
+            <a:pPr algn="ctr"/>
+          </a:p>
+        </p:txBody>
+      </p:sp>
+      <p:sp>
+        <p:nvSpPr>
+          <p:cNvPr id="3" name="TextBox 2"/>
+          <p:cNvSpPr txBox="1"/>
+          <p:nvPr/>
+        </p:nvSpPr>
+        <p:spPr>
+          <a:xfrm>
+            <a:off x="457200" y="228600"/>
+            <a:ext cx="8229600" cy="640080"/>
+          </a:xfrm>
+          <a:prstGeom prst="rect">
+            <a:avLst/>
+          </a:prstGeom>
+          <a:noFill/>
+        </p:spPr>
+        <p:txBody>
+          <a:bodyPr wrap="none">
+            <a:spAutoFit/>
+          </a:bodyPr>
+          <a:lstStyle/>
+          <a:p>
+            <a:pPr>
+              <a:defRPr sz="2800" b="1">
+                <a:solidFill>
+                  <a:srgbClr val="FFFFFF"/>
+                </a:solidFill>
+                <a:latin typeface="Calibri"/>
+              </a:defRPr>
+            </a:pPr>
+            <a:r>
+              <a:t>Conclusion</a:t>
+            </a:r>
+          </a:p>
+        </p:txBody>
+      </p:sp>
+      <p:sp>
+        <p:nvSpPr>
+          <p:cNvPr id="4" name="TextBox 3"/>
+          <p:cNvSpPr txBox="1"/>
+          <p:nvPr/>
+        </p:nvSpPr>
+        <p:spPr>
+          <a:xfrm>
+            <a:off x="457200" y="1280160"/>
+            <a:ext cx="8229600" cy="365760"/>
+          </a:xfrm>
+          <a:prstGeom prst="rect">
+            <a:avLst/>
+          </a:prstGeom>
+          <a:noFill/>
+        </p:spPr>
+        <p:txBody>
+          <a:bodyPr wrap="none">
+            <a:spAutoFit/>
+          </a:bodyPr>
+          <a:lstStyle/>
+          <a:p>
+            <a:pPr>
+              <a:defRPr sz="1600" i="1">
+                <a:solidFill>
+                  <a:srgbClr val="333333"/>
+                </a:solidFill>
+              </a:defRPr>
+            </a:pPr>
+            <a:r>
+              <a:t>Key takeaways</a:t>
+            </a:r>
+          </a:p>
+        </p:txBody>
+      </p:sp>
+      <p:sp>
+        <p:nvSpPr>
+          <p:cNvPr id="5" name="TextBox 4"/>
+          <p:cNvSpPr txBox="1"/>
+          <p:nvPr/>
+        </p:nvSpPr>
+        <p:spPr>
+          <a:xfrm>
+            <a:off x="548640" y="1737360"/>
+            <a:ext cx="8046720" cy="5029200"/>
+          </a:xfrm>
+          <a:prstGeom prst="rect">
+            <a:avLst/>
+          </a:prstGeom>
+          <a:noFill/>
+        </p:spPr>
+        <p:txBody>
+          <a:bodyPr wrap="square">
+            <a:spAutoFit/>
+          </a:bodyPr>
+          <a:lstStyle/>
+          <a:p>
+            <a:pPr>
+              <a:spcAft>
+                <a:spcPts val="600"/>
+              </a:spcAft>
+              <a:defRPr sz="2000">
+                <a:solidFill>
+                  <a:srgbClr val="333333"/>
+                </a:solidFill>
+              </a:defRPr>
+            </a:pPr>
+            <a:r>
+              <a:t>Machine learning can partially predict NBA MVP voting using basic player statistics.</a:t>
+            </a:r>
+          </a:p>
+          <a:p>
+            <a:pPr>
+              <a:spcAft>
+                <a:spcPts val="600"/>
+              </a:spcAft>
+              <a:defRPr sz="2000">
+                <a:solidFill>
+                  <a:srgbClr val="333333"/>
+                </a:solidFill>
+              </a:defRPr>
+            </a:pPr>
+            <a:r>
+              <a:t>Logistic Regression (66.7% seasonal accuracy) outperforms Naive Bayes (50.0%).</a:t>
+            </a:r>
+          </a:p>
+          <a:p>
+            <a:pPr>
+              <a:spcAft>
+                <a:spcPts val="600"/>
+              </a:spcAft>
+              <a:defRPr sz="2000">
+                <a:solidFill>
+                  <a:srgbClr val="333333"/>
+                </a:solidFill>
+              </a:defRPr>
+            </a:pPr>
+            <a:r>
+              <a:t>The results confirm that MVP voting has a significant subjective component.</a:t>
+            </a:r>
+          </a:p>
+          <a:p>
+            <a:pPr>
+              <a:spcAft>
+                <a:spcPts val="600"/>
+              </a:spcAft>
+              <a:defRPr sz="2000">
+                <a:solidFill>
+                  <a:srgbClr val="333333"/>
+                </a:solidFill>
+              </a:defRPr>
+            </a:pPr>
+            <a:r>
+              <a:t>Assists, free-throw percentage, points, blocks, and rebounds are the strongest predictors.</a:t>
+            </a:r>
+          </a:p>
+          <a:p>
+            <a:pPr>
+              <a:spcAft>
+                <a:spcPts val="600"/>
+              </a:spcAft>
+              <a:defRPr sz="2000">
+                <a:solidFill>
+                  <a:srgbClr val="333333"/>
+                </a:solidFill>
+              </a:defRPr>
+            </a:pPr>
+            <a:r>
+              <a:t>Future models should include team success and advanced metrics for better accuracy.</a:t>
+            </a:r>
+          </a:p>
+        </p:txBody>
+      </p:sp>
+    </p:spTree>
+  </p:cSld>
+  <p:clrMapOvr>
+    <a:masterClrMapping/>
+  </p:clrMapOvr>
+</p:sld>
+</file>
+
+<file path=ppt/slides/slide28.xml><?xml version="1.0" encoding="utf-8"?>
+<p:sld xmlns:a="http://schemas.openxmlformats.org/drawingml/2006/main" xmlns:p="http://schemas.openxmlformats.org/presentationml/2006/main" xmlns:r="http://schemas.openxmlformats.org/officeDocument/2006/relationships">
+  <p:cSld>
+    <p:bg>
+      <p:bgPr>
+        <a:solidFill>
+          <a:srgbClr val="1E3C72"/>
+        </a:solidFill>
+        <a:effectLst/>
+      </p:bgPr>
+    </p:bg>
+    <p:spTree>
+      <p:nvGrpSpPr>
+        <p:cNvPr id="1" name=""/>
+        <p:cNvGrpSpPr/>
+        <p:nvPr/>
+      </p:nvGrpSpPr>
+      <p:grpSpPr/>
+      <p:sp>
+        <p:nvSpPr>
+          <p:cNvPr id="2" name="TextBox 1"/>
+          <p:cNvSpPr txBox="1"/>
+          <p:nvPr/>
+        </p:nvSpPr>
+        <p:spPr>
+          <a:xfrm>
+            <a:off x="914400" y="2011680"/>
+            <a:ext cx="7315200" cy="1371600"/>
+          </a:xfrm>
+          <a:prstGeom prst="rect">
+            <a:avLst/>
+          </a:prstGeom>
+          <a:noFill/>
+        </p:spPr>
+        <p:txBody>
+          <a:bodyPr wrap="none">
+            <a:spAutoFit/>
+          </a:bodyPr>
+          <a:lstStyle/>
+          <a:p>
+            <a:pPr algn="ctr">
+              <a:defRPr sz="4000" b="1">
+                <a:solidFill>
+                  <a:srgbClr val="FFFFFF"/>
+                </a:solidFill>
+              </a:defRPr>
+            </a:pPr>
+            <a:r>
+              <a:t>Thank You</a:t>
+            </a:r>
+          </a:p>
+        </p:txBody>
+      </p:sp>
+      <p:sp>
+        <p:nvSpPr>
+          <p:cNvPr id="3" name="TextBox 2"/>
+          <p:cNvSpPr txBox="1"/>
+          <p:nvPr/>
+        </p:nvSpPr>
+        <p:spPr>
+          <a:xfrm>
+            <a:off x="914400" y="3657600"/>
+            <a:ext cx="7315200" cy="1371600"/>
+          </a:xfrm>
+          <a:prstGeom prst="rect">
+            <a:avLst/>
+          </a:prstGeom>
+          <a:noFill/>
+        </p:spPr>
+        <p:txBody>
+          <a:bodyPr wrap="none">
+            <a:spAutoFit/>
+          </a:bodyPr>
+          <a:lstStyle/>
+          <a:p>
+            <a:pPr algn="ctr">
+              <a:defRPr sz="2200">
+                <a:solidFill>
+                  <a:srgbClr val="DCDCDC"/>
+                </a:solidFill>
+              </a:defRPr>
+            </a:pPr>
+            <a:r>
+              <a:t>Questions &amp; Discussion</a:t>
+            </a:r>
+          </a:p>
+        </p:txBody>
+      </p:sp>
+      <p:sp>
+        <p:nvSpPr>
+          <p:cNvPr id="4" name="TextBox 3"/>
+          <p:cNvSpPr txBox="1"/>
+          <p:nvPr/>
+        </p:nvSpPr>
+        <p:spPr>
+          <a:xfrm>
+            <a:off x="914400" y="5943600"/>
+            <a:ext cx="7315200" cy="457200"/>
+          </a:xfrm>
+          <a:prstGeom prst="rect">
+            <a:avLst/>
+          </a:prstGeom>
+          <a:noFill/>
+        </p:spPr>
+        <p:txBody>
+          <a:bodyPr wrap="none">
+            <a:spAutoFit/>
+          </a:bodyPr>
+          <a:lstStyle/>
+          <a:p>
+            <a:pPr algn="ctr">
+              <a:defRPr sz="1600">
+                <a:solidFill>
+                  <a:srgbClr val="B4B4B4"/>
+                </a:solidFill>
+              </a:defRPr>
+            </a:pPr>
+            <a:r>
+              <a:t>UE24CS352A — Machine Learning Mini Project</a:t>
             </a:r>
           </a:p>
         </p:txBody>
@@ -3686,6 +7967,14 @@
 <file path=ppt/slides/slide3.xml><?xml version="1.0" encoding="utf-8"?>
 <p:sld xmlns:a="http://schemas.openxmlformats.org/drawingml/2006/main" xmlns:p="http://schemas.openxmlformats.org/presentationml/2006/main" xmlns:r="http://schemas.openxmlformats.org/officeDocument/2006/relationships">
   <p:cSld>
+    <p:bg>
+      <p:bgPr>
+        <a:solidFill>
+          <a:srgbClr val="2A5298"/>
+        </a:solidFill>
+        <a:effectLst/>
+      </p:bgPr>
+    </p:bg>
     <p:spTree>
       <p:nvGrpSpPr>
         <p:cNvPr id="1" name=""/>
@@ -3695,85 +7984,70 @@
       <p:grpSpPr/>
       <p:sp>
         <p:nvSpPr>
-          <p:cNvPr id="2" name="Title 1"/>
-          <p:cNvSpPr>
-            <a:spLocks noGrp="1"/>
-          </p:cNvSpPr>
-          <p:nvPr>
-            <p:ph type="title"/>
-          </p:nvPr>
-        </p:nvSpPr>
-        <p:spPr/>
-        <p:txBody>
-          <a:bodyPr/>
-          <a:lstStyle/>
-          <a:p>
-            <a:r>
-              <a:t>Dataset</a:t>
-            </a:r>
-          </a:p>
-        </p:txBody>
-      </p:sp>
-      <p:sp>
-        <p:nvSpPr>
-          <p:cNvPr id="3" name="Content Placeholder 2"/>
-          <p:cNvSpPr>
-            <a:spLocks noGrp="1"/>
-          </p:cNvSpPr>
-          <p:nvPr>
-            <p:ph idx="1"/>
-          </p:nvPr>
-        </p:nvSpPr>
-        <p:spPr/>
-        <p:txBody>
-          <a:bodyPr/>
-          <a:lstStyle/>
-          <a:p>
-            <a:pPr>
-              <a:defRPr sz="2000"/>
-            </a:pPr>
-            <a:r>
-              <a:t>Source: Kaggle dataset scraped from Basketball-Reference</a:t>
-            </a:r>
-          </a:p>
-          <a:p>
-            <a:pPr>
-              <a:defRPr sz="2000"/>
-            </a:pPr>
-            <a:r>
-              <a:t>Timeframe: 2000-01 to 2019-20 (20 seasons)</a:t>
-            </a:r>
-          </a:p>
-          <a:p>
-            <a:pPr>
-              <a:defRPr sz="2000"/>
-            </a:pPr>
-            <a:r>
-              <a:t>Rows: 60 (top 3 MVP finalists per season)</a:t>
-            </a:r>
-          </a:p>
-          <a:p>
-            <a:pPr>
-              <a:defRPr sz="2000"/>
-            </a:pPr>
-            <a:r>
-              <a:t>Train: 2000-01 to 2015-16 → 48 rows</a:t>
-            </a:r>
-          </a:p>
-          <a:p>
-            <a:pPr>
-              <a:defRPr sz="2000"/>
-            </a:pPr>
-            <a:r>
-              <a:t>Test: 2016-17 to 2019-20 → 12 rows</a:t>
-            </a:r>
-          </a:p>
-          <a:p>
-            <a:pPr>
-              <a:defRPr sz="2000"/>
-            </a:pPr>
-            <a:r>
-              <a:t>Target: MVP = 1 for the winner, 0 for the runners-up</a:t>
+          <p:cNvPr id="2" name="TextBox 1"/>
+          <p:cNvSpPr txBox="1"/>
+          <p:nvPr/>
+        </p:nvSpPr>
+        <p:spPr>
+          <a:xfrm>
+            <a:off x="914400" y="2286000"/>
+            <a:ext cx="7315200" cy="914400"/>
+          </a:xfrm>
+          <a:prstGeom prst="rect">
+            <a:avLst/>
+          </a:prstGeom>
+          <a:noFill/>
+        </p:spPr>
+        <p:txBody>
+          <a:bodyPr wrap="none">
+            <a:spAutoFit/>
+          </a:bodyPr>
+          <a:lstStyle/>
+          <a:p>
+            <a:pPr algn="ctr">
+              <a:defRPr sz="2400" b="1">
+                <a:solidFill>
+                  <a:srgbClr val="B4C8E6"/>
+                </a:solidFill>
+              </a:defRPr>
+            </a:pPr>
+            <a:r>
+              <a:t>PART 01</a:t>
+            </a:r>
+          </a:p>
+        </p:txBody>
+      </p:sp>
+      <p:sp>
+        <p:nvSpPr>
+          <p:cNvPr id="3" name="TextBox 2"/>
+          <p:cNvSpPr txBox="1"/>
+          <p:nvPr/>
+        </p:nvSpPr>
+        <p:spPr>
+          <a:xfrm>
+            <a:off x="914400" y="3017520"/>
+            <a:ext cx="7315200" cy="1097280"/>
+          </a:xfrm>
+          <a:prstGeom prst="rect">
+            <a:avLst/>
+          </a:prstGeom>
+          <a:noFill/>
+        </p:spPr>
+        <p:txBody>
+          <a:bodyPr wrap="none">
+            <a:spAutoFit/>
+          </a:bodyPr>
+          <a:lstStyle/>
+          <a:p>
+            <a:pPr algn="ctr">
+              <a:defRPr sz="4400" b="1">
+                <a:solidFill>
+                  <a:srgbClr val="FFFFFF"/>
+                </a:solidFill>
+              </a:defRPr>
+            </a:pPr>
+            <a:r>
+              <a:t>Motivation &amp; Problem</a:t>
             </a:r>
           </a:p>
         </p:txBody>
@@ -3789,6 +8063,14 @@
 <file path=ppt/slides/slide4.xml><?xml version="1.0" encoding="utf-8"?>
 <p:sld xmlns:a="http://schemas.openxmlformats.org/drawingml/2006/main" xmlns:p="http://schemas.openxmlformats.org/presentationml/2006/main" xmlns:r="http://schemas.openxmlformats.org/officeDocument/2006/relationships">
   <p:cSld>
+    <p:bg>
+      <p:bgPr>
+        <a:solidFill>
+          <a:srgbClr val="FFFFFF"/>
+        </a:solidFill>
+        <a:effectLst/>
+      </p:bgPr>
+    </p:bg>
     <p:spTree>
       <p:nvGrpSpPr>
         <p:cNvPr id="1" name=""/>
@@ -3798,117 +8080,197 @@
       <p:grpSpPr/>
       <p:sp>
         <p:nvSpPr>
-          <p:cNvPr id="2" name="Title 1"/>
-          <p:cNvSpPr>
-            <a:spLocks noGrp="1"/>
-          </p:cNvSpPr>
-          <p:nvPr>
-            <p:ph type="title"/>
-          </p:nvPr>
-        </p:nvSpPr>
-        <p:spPr/>
-        <p:txBody>
-          <a:bodyPr/>
-          <a:lstStyle/>
-          <a:p>
-            <a:r>
-              <a:t>Features Used</a:t>
-            </a:r>
-          </a:p>
-        </p:txBody>
-      </p:sp>
-      <p:sp>
-        <p:nvSpPr>
-          <p:cNvPr id="3" name="Content Placeholder 2"/>
-          <p:cNvSpPr>
-            <a:spLocks noGrp="1"/>
-          </p:cNvSpPr>
-          <p:nvPr>
-            <p:ph idx="1"/>
-          </p:nvPr>
-        </p:nvSpPr>
-        <p:spPr/>
-        <p:txBody>
-          <a:bodyPr/>
-          <a:lstStyle/>
-          <a:p>
-            <a:pPr>
-              <a:defRPr sz="2000"/>
-            </a:pPr>
-            <a:r>
-              <a:t>Games played (g)</a:t>
-            </a:r>
-          </a:p>
-          <a:p>
-            <a:pPr>
-              <a:defRPr sz="2000"/>
-            </a:pPr>
-            <a:r>
-              <a:t>Minutes per game (mp_per_g)</a:t>
-            </a:r>
-          </a:p>
-          <a:p>
-            <a:pPr>
-              <a:defRPr sz="2000"/>
-            </a:pPr>
-            <a:r>
-              <a:t>Field goal percentage (fg_pct)</a:t>
-            </a:r>
-          </a:p>
-          <a:p>
-            <a:pPr>
-              <a:defRPr sz="2000"/>
-            </a:pPr>
-            <a:r>
-              <a:t>3-point percentage (fg3_pct)</a:t>
-            </a:r>
-          </a:p>
-          <a:p>
-            <a:pPr>
-              <a:defRPr sz="2000"/>
-            </a:pPr>
-            <a:r>
-              <a:t>Free throw percentage (ft_pct)</a:t>
-            </a:r>
-          </a:p>
-          <a:p>
-            <a:pPr>
-              <a:defRPr sz="2000"/>
-            </a:pPr>
-            <a:r>
-              <a:t>Rebounds per game (trb_per_g)</a:t>
-            </a:r>
-          </a:p>
-          <a:p>
-            <a:pPr>
-              <a:defRPr sz="2000"/>
-            </a:pPr>
-            <a:r>
-              <a:t>Assists per game (ast_per_g)</a:t>
-            </a:r>
-          </a:p>
-          <a:p>
-            <a:pPr>
-              <a:defRPr sz="2000"/>
-            </a:pPr>
-            <a:r>
-              <a:t>Steals per game (stl_per_g)</a:t>
-            </a:r>
-          </a:p>
-          <a:p>
-            <a:pPr>
-              <a:defRPr sz="2000"/>
-            </a:pPr>
-            <a:r>
-              <a:t>Blocks per game (blk_per_g)</a:t>
-            </a:r>
-          </a:p>
-          <a:p>
-            <a:pPr>
-              <a:defRPr sz="2000"/>
-            </a:pPr>
-            <a:r>
-              <a:t>Points per game (pts_per_g)</a:t>
+          <p:cNvPr id="2" name="Rectangle 1"/>
+          <p:cNvSpPr/>
+          <p:nvPr/>
+        </p:nvSpPr>
+        <p:spPr>
+          <a:xfrm>
+            <a:off x="0" y="0"/>
+            <a:ext cx="9144000" cy="1005840"/>
+          </a:xfrm>
+          <a:prstGeom prst="rect">
+            <a:avLst/>
+          </a:prstGeom>
+          <a:solidFill>
+            <a:srgbClr val="1E3C72"/>
+          </a:solidFill>
+          <a:ln>
+            <a:noFill/>
+          </a:ln>
+        </p:spPr>
+        <p:style>
+          <a:lnRef idx="1">
+            <a:schemeClr val="accent1"/>
+          </a:lnRef>
+          <a:fillRef idx="3">
+            <a:schemeClr val="accent1"/>
+          </a:fillRef>
+          <a:effectRef idx="2">
+            <a:schemeClr val="accent1"/>
+          </a:effectRef>
+          <a:fontRef idx="minor">
+            <a:schemeClr val="lt1"/>
+          </a:fontRef>
+        </p:style>
+        <p:txBody>
+          <a:bodyPr rtlCol="0" anchor="ctr"/>
+          <a:lstStyle/>
+          <a:p>
+            <a:pPr algn="ctr"/>
+          </a:p>
+        </p:txBody>
+      </p:sp>
+      <p:sp>
+        <p:nvSpPr>
+          <p:cNvPr id="3" name="TextBox 2"/>
+          <p:cNvSpPr txBox="1"/>
+          <p:nvPr/>
+        </p:nvSpPr>
+        <p:spPr>
+          <a:xfrm>
+            <a:off x="457200" y="228600"/>
+            <a:ext cx="8229600" cy="640080"/>
+          </a:xfrm>
+          <a:prstGeom prst="rect">
+            <a:avLst/>
+          </a:prstGeom>
+          <a:noFill/>
+        </p:spPr>
+        <p:txBody>
+          <a:bodyPr wrap="none">
+            <a:spAutoFit/>
+          </a:bodyPr>
+          <a:lstStyle/>
+          <a:p>
+            <a:pPr>
+              <a:defRPr sz="2800" b="1">
+                <a:solidFill>
+                  <a:srgbClr val="FFFFFF"/>
+                </a:solidFill>
+                <a:latin typeface="Calibri"/>
+              </a:defRPr>
+            </a:pPr>
+            <a:r>
+              <a:t>The NBA MVP Problem</a:t>
+            </a:r>
+          </a:p>
+        </p:txBody>
+      </p:sp>
+      <p:sp>
+        <p:nvSpPr>
+          <p:cNvPr id="4" name="TextBox 3"/>
+          <p:cNvSpPr txBox="1"/>
+          <p:nvPr/>
+        </p:nvSpPr>
+        <p:spPr>
+          <a:xfrm>
+            <a:off x="457200" y="1280160"/>
+            <a:ext cx="8229600" cy="365760"/>
+          </a:xfrm>
+          <a:prstGeom prst="rect">
+            <a:avLst/>
+          </a:prstGeom>
+          <a:noFill/>
+        </p:spPr>
+        <p:txBody>
+          <a:bodyPr wrap="none">
+            <a:spAutoFit/>
+          </a:bodyPr>
+          <a:lstStyle/>
+          <a:p>
+            <a:pPr>
+              <a:defRPr sz="1600" i="1">
+                <a:solidFill>
+                  <a:srgbClr val="333333"/>
+                </a:solidFill>
+              </a:defRPr>
+            </a:pPr>
+            <a:r>
+              <a:t>Understanding the real-world context</a:t>
+            </a:r>
+          </a:p>
+        </p:txBody>
+      </p:sp>
+      <p:sp>
+        <p:nvSpPr>
+          <p:cNvPr id="5" name="TextBox 4"/>
+          <p:cNvSpPr txBox="1"/>
+          <p:nvPr/>
+        </p:nvSpPr>
+        <p:spPr>
+          <a:xfrm>
+            <a:off x="548640" y="1737360"/>
+            <a:ext cx="8046720" cy="5029200"/>
+          </a:xfrm>
+          <a:prstGeom prst="rect">
+            <a:avLst/>
+          </a:prstGeom>
+          <a:noFill/>
+        </p:spPr>
+        <p:txBody>
+          <a:bodyPr wrap="square">
+            <a:spAutoFit/>
+          </a:bodyPr>
+          <a:lstStyle/>
+          <a:p>
+            <a:pPr>
+              <a:spcAft>
+                <a:spcPts val="600"/>
+              </a:spcAft>
+              <a:defRPr sz="2000">
+                <a:solidFill>
+                  <a:srgbClr val="333333"/>
+                </a:solidFill>
+              </a:defRPr>
+            </a:pPr>
+            <a:r>
+              <a:t>The NBA Most Valuable Player award is decided by ~100 sportswriters and broadcasters.</a:t>
+            </a:r>
+          </a:p>
+          <a:p>
+            <a:pPr>
+              <a:spcAft>
+                <a:spcPts val="600"/>
+              </a:spcAft>
+              <a:defRPr sz="2000">
+                <a:solidFill>
+                  <a:srgbClr val="333333"/>
+                </a:solidFill>
+              </a:defRPr>
+            </a:pPr>
+            <a:r>
+              <a:t>Voting is partly subjective: media narratives, popularity, team success, and recency bias influence outcomes.</a:t>
+            </a:r>
+          </a:p>
+          <a:p>
+            <a:pPr>
+              <a:spcAft>
+                <a:spcPts val="600"/>
+              </a:spcAft>
+              <a:defRPr sz="2000">
+                <a:solidFill>
+                  <a:srgbClr val="333333"/>
+                </a:solidFill>
+              </a:defRPr>
+            </a:pPr>
+            <a:r>
+              <a:t>This project asks: Can machine learning predict the MVP using only objective season statistics?</a:t>
+            </a:r>
+          </a:p>
+          <a:p>
+            <a:pPr>
+              <a:spcAft>
+                <a:spcPts val="600"/>
+              </a:spcAft>
+              <a:defRPr sz="2000">
+                <a:solidFill>
+                  <a:srgbClr val="333333"/>
+                </a:solidFill>
+              </a:defRPr>
+            </a:pPr>
+            <a:r>
+              <a:t>We frame it as a classification task: given the top 3 MVP finalists in a season, identify the winner.</a:t>
             </a:r>
           </a:p>
         </p:txBody>
@@ -3924,6 +8286,14 @@
 <file path=ppt/slides/slide5.xml><?xml version="1.0" encoding="utf-8"?>
 <p:sld xmlns:a="http://schemas.openxmlformats.org/drawingml/2006/main" xmlns:p="http://schemas.openxmlformats.org/presentationml/2006/main" xmlns:r="http://schemas.openxmlformats.org/officeDocument/2006/relationships">
   <p:cSld>
+    <p:bg>
+      <p:bgPr>
+        <a:solidFill>
+          <a:srgbClr val="FFFFFF"/>
+        </a:solidFill>
+        <a:effectLst/>
+      </p:bgPr>
+    </p:bg>
     <p:spTree>
       <p:nvGrpSpPr>
         <p:cNvPr id="1" name=""/>
@@ -3933,19 +8303,45 @@
       <p:grpSpPr/>
       <p:sp>
         <p:nvSpPr>
-          <p:cNvPr id="2" name="Title 1"/>
-          <p:cNvSpPr>
-            <a:spLocks noGrp="1"/>
-          </p:cNvSpPr>
-          <p:nvPr>
-            <p:ph type="title"/>
-          </p:nvPr>
-        </p:nvSpPr>
-        <p:spPr/>
-        <p:txBody>
-          <a:bodyPr/>
-          <a:lstStyle/>
-          <a:p/>
+          <p:cNvPr id="2" name="Rectangle 1"/>
+          <p:cNvSpPr/>
+          <p:nvPr/>
+        </p:nvSpPr>
+        <p:spPr>
+          <a:xfrm>
+            <a:off x="0" y="0"/>
+            <a:ext cx="9144000" cy="1005840"/>
+          </a:xfrm>
+          <a:prstGeom prst="rect">
+            <a:avLst/>
+          </a:prstGeom>
+          <a:solidFill>
+            <a:srgbClr val="1E3C72"/>
+          </a:solidFill>
+          <a:ln>
+            <a:noFill/>
+          </a:ln>
+        </p:spPr>
+        <p:style>
+          <a:lnRef idx="1">
+            <a:schemeClr val="accent1"/>
+          </a:lnRef>
+          <a:fillRef idx="3">
+            <a:schemeClr val="accent1"/>
+          </a:fillRef>
+          <a:effectRef idx="2">
+            <a:schemeClr val="accent1"/>
+          </a:effectRef>
+          <a:fontRef idx="minor">
+            <a:schemeClr val="lt1"/>
+          </a:fontRef>
+        </p:style>
+        <p:txBody>
+          <a:bodyPr rtlCol="0" anchor="ctr"/>
+          <a:lstStyle/>
+          <a:p>
+            <a:pPr algn="ctr"/>
+          </a:p>
         </p:txBody>
       </p:sp>
       <p:sp>
@@ -3956,8 +8352,8 @@
         </p:nvSpPr>
         <p:spPr>
           <a:xfrm>
-            <a:off x="457200" y="274320"/>
-            <a:ext cx="8229600" cy="731520"/>
+            <a:off x="457200" y="228600"/>
+            <a:ext cx="8229600" cy="640080"/>
           </a:xfrm>
           <a:prstGeom prst="rect">
             <a:avLst/>
@@ -3971,10 +8367,15 @@
           <a:lstStyle/>
           <a:p>
             <a:pPr>
-              <a:defRPr sz="3200" b="1"/>
-            </a:pPr>
-            <a:r>
-              <a:t>Methodology</a:t>
+              <a:defRPr sz="2800" b="1">
+                <a:solidFill>
+                  <a:srgbClr val="FFFFFF"/>
+                </a:solidFill>
+                <a:latin typeface="Calibri"/>
+              </a:defRPr>
+            </a:pPr>
+            <a:r>
+              <a:t>Why Machine Learning?</a:t>
             </a:r>
           </a:p>
         </p:txBody>
@@ -3987,8 +8388,8 @@
         </p:nvSpPr>
         <p:spPr>
           <a:xfrm>
-            <a:off x="457200" y="1188720"/>
-            <a:ext cx="3931920" cy="5486400"/>
+            <a:off x="457200" y="1280160"/>
+            <a:ext cx="8229600" cy="365760"/>
           </a:xfrm>
           <a:prstGeom prst="rect">
             <a:avLst/>
@@ -4002,42 +8403,14 @@
           <a:lstStyle/>
           <a:p>
             <a:pPr>
-              <a:defRPr sz="2400" b="1"/>
-            </a:pPr>
-            <a:r>
-              <a:t>Naive Bayes</a:t>
-            </a:r>
-          </a:p>
-          <a:p>
-            <a:pPr>
-              <a:defRPr sz="1800"/>
-            </a:pPr>
-            <a:r>
-              <a:t>Generative probabilistic classifier</a:t>
-            </a:r>
-          </a:p>
-          <a:p>
-            <a:pPr>
-              <a:defRPr sz="1800"/>
-            </a:pPr>
-            <a:r>
-              <a:t>Assumes features are independent</a:t>
-            </a:r>
-          </a:p>
-          <a:p>
-            <a:pPr>
-              <a:defRPr sz="1800"/>
-            </a:pPr>
-            <a:r>
-              <a:t>Fast and works well on small data</a:t>
-            </a:r>
-          </a:p>
-          <a:p>
-            <a:pPr>
-              <a:defRPr sz="1800"/>
-            </a:pPr>
-            <a:r>
-              <a:t>No feature scaling needed</a:t>
+              <a:defRPr sz="1600" i="1">
+                <a:solidFill>
+                  <a:srgbClr val="333333"/>
+                </a:solidFill>
+              </a:defRPr>
+            </a:pPr>
+            <a:r>
+              <a:t>Objectives of the study</a:t>
             </a:r>
           </a:p>
         </p:txBody>
@@ -4050,8 +8423,8 @@
         </p:nvSpPr>
         <p:spPr>
           <a:xfrm>
-            <a:off x="4572000" y="1188720"/>
-            <a:ext cx="3931920" cy="5486400"/>
+            <a:off x="548640" y="1737360"/>
+            <a:ext cx="8046720" cy="5029200"/>
           </a:xfrm>
           <a:prstGeom prst="rect">
             <a:avLst/>
@@ -4059,48 +8432,98 @@
           <a:noFill/>
         </p:spPr>
         <p:txBody>
-          <a:bodyPr wrap="none">
+          <a:bodyPr wrap="square">
             <a:spAutoFit/>
           </a:bodyPr>
           <a:lstStyle/>
           <a:p>
             <a:pPr>
-              <a:defRPr sz="2400" b="1"/>
-            </a:pPr>
-            <a:r>
-              <a:t>Logistic Regression</a:t>
-            </a:r>
-          </a:p>
-          <a:p>
-            <a:pPr>
-              <a:defRPr sz="1800"/>
-            </a:pPr>
-            <a:r>
-              <a:t>Discriminative linear classifier</a:t>
-            </a:r>
-          </a:p>
-          <a:p>
-            <a:pPr>
-              <a:defRPr sz="1800"/>
-            </a:pPr>
-            <a:r>
-              <a:t>Learns a direct decision boundary</a:t>
-            </a:r>
-          </a:p>
-          <a:p>
-            <a:pPr>
-              <a:defRPr sz="1800"/>
-            </a:pPr>
-            <a:r>
-              <a:t>Outputs class probabilities</a:t>
-            </a:r>
-          </a:p>
-          <a:p>
-            <a:pPr>
-              <a:defRPr sz="1800"/>
-            </a:pPr>
-            <a:r>
-              <a:t>Features standardized before training</a:t>
+              <a:spcAft>
+                <a:spcPts val="600"/>
+              </a:spcAft>
+              <a:defRPr sz="2000">
+                <a:solidFill>
+                  <a:srgbClr val="333333"/>
+                </a:solidFill>
+              </a:defRPr>
+            </a:pPr>
+            <a:r>
+              <a:t>Remove human bias and build a reproducible decision rule.</a:t>
+            </a:r>
+          </a:p>
+          <a:p>
+            <a:pPr>
+              <a:spcAft>
+                <a:spcPts val="600"/>
+              </a:spcAft>
+              <a:defRPr sz="2000">
+                <a:solidFill>
+                  <a:srgbClr val="333333"/>
+                </a:solidFill>
+              </a:defRPr>
+            </a:pPr>
+            <a:r>
+              <a:t>Identify which statistics are most predictive of MVP voting.</a:t>
+            </a:r>
+          </a:p>
+          <a:p>
+            <a:pPr>
+              <a:spcAft>
+                <a:spcPts val="600"/>
+              </a:spcAft>
+              <a:defRPr sz="2000">
+                <a:solidFill>
+                  <a:srgbClr val="333333"/>
+                </a:solidFill>
+              </a:defRPr>
+            </a:pPr>
+            <a:r>
+              <a:t>Compare two fundamental ML approaches on the same task:</a:t>
+            </a:r>
+          </a:p>
+          <a:p>
+            <a:pPr>
+              <a:spcAft>
+                <a:spcPts val="600"/>
+              </a:spcAft>
+              <a:defRPr sz="2000">
+                <a:solidFill>
+                  <a:srgbClr val="333333"/>
+                </a:solidFill>
+              </a:defRPr>
+            </a:pPr>
+            <a:r>
+              <a:t>   • Naive Bayes — a generative probabilistic classifier</a:t>
+            </a:r>
+          </a:p>
+          <a:p>
+            <a:pPr>
+              <a:spcAft>
+                <a:spcPts val="600"/>
+              </a:spcAft>
+              <a:defRPr sz="2000">
+                <a:solidFill>
+                  <a:srgbClr val="333333"/>
+                </a:solidFill>
+              </a:defRPr>
+            </a:pPr>
+            <a:r>
+              <a:t>   • Logistic Regression — a discriminative linear classifier</a:t>
+            </a:r>
+          </a:p>
+          <a:p>
+            <a:pPr>
+              <a:spcAft>
+                <a:spcPts val="600"/>
+              </a:spcAft>
+              <a:defRPr sz="2000">
+                <a:solidFill>
+                  <a:srgbClr val="333333"/>
+                </a:solidFill>
+              </a:defRPr>
+            </a:pPr>
+            <a:r>
+              <a:t>Provide a baseline for more complex models in future work.</a:t>
             </a:r>
           </a:p>
         </p:txBody>
@@ -4116,6 +8539,14 @@
 <file path=ppt/slides/slide6.xml><?xml version="1.0" encoding="utf-8"?>
 <p:sld xmlns:a="http://schemas.openxmlformats.org/drawingml/2006/main" xmlns:p="http://schemas.openxmlformats.org/presentationml/2006/main" xmlns:r="http://schemas.openxmlformats.org/officeDocument/2006/relationships">
   <p:cSld>
+    <p:bg>
+      <p:bgPr>
+        <a:solidFill>
+          <a:srgbClr val="2A5298"/>
+        </a:solidFill>
+        <a:effectLst/>
+      </p:bgPr>
+    </p:bg>
     <p:spTree>
       <p:nvGrpSpPr>
         <p:cNvPr id="1" name=""/>
@@ -4125,19 +8556,37 @@
       <p:grpSpPr/>
       <p:sp>
         <p:nvSpPr>
-          <p:cNvPr id="2" name="Title 1"/>
-          <p:cNvSpPr>
-            <a:spLocks noGrp="1"/>
-          </p:cNvSpPr>
-          <p:nvPr>
-            <p:ph type="title"/>
-          </p:nvPr>
-        </p:nvSpPr>
-        <p:spPr/>
-        <p:txBody>
-          <a:bodyPr/>
-          <a:lstStyle/>
-          <a:p/>
+          <p:cNvPr id="2" name="TextBox 1"/>
+          <p:cNvSpPr txBox="1"/>
+          <p:nvPr/>
+        </p:nvSpPr>
+        <p:spPr>
+          <a:xfrm>
+            <a:off x="914400" y="2286000"/>
+            <a:ext cx="7315200" cy="914400"/>
+          </a:xfrm>
+          <a:prstGeom prst="rect">
+            <a:avLst/>
+          </a:prstGeom>
+          <a:noFill/>
+        </p:spPr>
+        <p:txBody>
+          <a:bodyPr wrap="none">
+            <a:spAutoFit/>
+          </a:bodyPr>
+          <a:lstStyle/>
+          <a:p>
+            <a:pPr algn="ctr">
+              <a:defRPr sz="2400" b="1">
+                <a:solidFill>
+                  <a:srgbClr val="B4C8E6"/>
+                </a:solidFill>
+              </a:defRPr>
+            </a:pPr>
+            <a:r>
+              <a:t>PART 02</a:t>
+            </a:r>
+          </a:p>
         </p:txBody>
       </p:sp>
       <p:sp>
@@ -4148,8 +8597,8 @@
         </p:nvSpPr>
         <p:spPr>
           <a:xfrm>
-            <a:off x="457200" y="274320"/>
-            <a:ext cx="8229600" cy="731520"/>
+            <a:off x="914400" y="3017520"/>
+            <a:ext cx="7315200" cy="1097280"/>
           </a:xfrm>
           <a:prstGeom prst="rect">
             <a:avLst/>
@@ -4162,121 +8611,15 @@
           </a:bodyPr>
           <a:lstStyle/>
           <a:p>
-            <a:pPr>
-              <a:defRPr sz="3200" b="1"/>
-            </a:pPr>
-            <a:r>
-              <a:t>Evaluation Modes</a:t>
-            </a:r>
-          </a:p>
-        </p:txBody>
-      </p:sp>
-      <p:sp>
-        <p:nvSpPr>
-          <p:cNvPr id="4" name="TextBox 3"/>
-          <p:cNvSpPr txBox="1"/>
-          <p:nvPr/>
-        </p:nvSpPr>
-        <p:spPr>
-          <a:xfrm>
-            <a:off x="457200" y="1188720"/>
-            <a:ext cx="3931920" cy="5486400"/>
-          </a:xfrm>
-          <a:prstGeom prst="rect">
-            <a:avLst/>
-          </a:prstGeom>
-          <a:noFill/>
-        </p:spPr>
-        <p:txBody>
-          <a:bodyPr wrap="none">
-            <a:spAutoFit/>
-          </a:bodyPr>
-          <a:lstStyle/>
-          <a:p>
-            <a:pPr>
-              <a:defRPr sz="2400" b="1"/>
-            </a:pPr>
-            <a:r>
-              <a:t>Pure MVP Prediction</a:t>
-            </a:r>
-          </a:p>
-          <a:p>
-            <a:pPr>
-              <a:defRPr sz="1800"/>
-            </a:pPr>
-            <a:r>
-              <a:t>Binary classification task</a:t>
-            </a:r>
-          </a:p>
-          <a:p>
-            <a:pPr>
-              <a:defRPr sz="1800"/>
-            </a:pPr>
-            <a:r>
-              <a:t>Each finalist independently classified as MVP or not</a:t>
-            </a:r>
-          </a:p>
-          <a:p>
-            <a:pPr>
-              <a:defRPr sz="1800"/>
-            </a:pPr>
-            <a:r>
-              <a:t>Threshold on predicted probability: 0.5</a:t>
-            </a:r>
-          </a:p>
-        </p:txBody>
-      </p:sp>
-      <p:sp>
-        <p:nvSpPr>
-          <p:cNvPr id="5" name="TextBox 4"/>
-          <p:cNvSpPr txBox="1"/>
-          <p:nvPr/>
-        </p:nvSpPr>
-        <p:spPr>
-          <a:xfrm>
-            <a:off x="4572000" y="1188720"/>
-            <a:ext cx="3931920" cy="5486400"/>
-          </a:xfrm>
-          <a:prstGeom prst="rect">
-            <a:avLst/>
-          </a:prstGeom>
-          <a:noFill/>
-        </p:spPr>
-        <p:txBody>
-          <a:bodyPr wrap="none">
-            <a:spAutoFit/>
-          </a:bodyPr>
-          <a:lstStyle/>
-          <a:p>
-            <a:pPr>
-              <a:defRPr sz="2400" b="1"/>
-            </a:pPr>
-            <a:r>
-              <a:t>Seasonal MVP Prediction</a:t>
-            </a:r>
-          </a:p>
-          <a:p>
-            <a:pPr>
-              <a:defRPr sz="1800"/>
-            </a:pPr>
-            <a:r>
-              <a:t>One MVP must be chosen per season</a:t>
-            </a:r>
-          </a:p>
-          <a:p>
-            <a:pPr>
-              <a:defRPr sz="1800"/>
-            </a:pPr>
-            <a:r>
-              <a:t>Select the finalist with highest probability in that season</a:t>
-            </a:r>
-          </a:p>
-          <a:p>
-            <a:pPr>
-              <a:defRPr sz="1800"/>
-            </a:pPr>
-            <a:r>
-              <a:t>Closer to real-world voting</a:t>
+            <a:pPr algn="ctr">
+              <a:defRPr sz="4400" b="1">
+                <a:solidFill>
+                  <a:srgbClr val="FFFFFF"/>
+                </a:solidFill>
+              </a:defRPr>
+            </a:pPr>
+            <a:r>
+              <a:t>Dataset &amp; Features</a:t>
             </a:r>
           </a:p>
         </p:txBody>
@@ -4292,6 +8635,14 @@
 <file path=ppt/slides/slide7.xml><?xml version="1.0" encoding="utf-8"?>
 <p:sld xmlns:a="http://schemas.openxmlformats.org/drawingml/2006/main" xmlns:p="http://schemas.openxmlformats.org/presentationml/2006/main" xmlns:r="http://schemas.openxmlformats.org/officeDocument/2006/relationships">
   <p:cSld>
+    <p:bg>
+      <p:bgPr>
+        <a:solidFill>
+          <a:srgbClr val="FFFFFF"/>
+        </a:solidFill>
+        <a:effectLst/>
+      </p:bgPr>
+    </p:bg>
     <p:spTree>
       <p:nvGrpSpPr>
         <p:cNvPr id="1" name=""/>
@@ -4301,69 +8652,212 @@
       <p:grpSpPr/>
       <p:sp>
         <p:nvSpPr>
-          <p:cNvPr id="2" name="Title 1"/>
-          <p:cNvSpPr>
-            <a:spLocks noGrp="1"/>
-          </p:cNvSpPr>
-          <p:nvPr>
-            <p:ph type="title"/>
-          </p:nvPr>
-        </p:nvSpPr>
-        <p:spPr/>
-        <p:txBody>
-          <a:bodyPr/>
-          <a:lstStyle/>
-          <a:p>
-            <a:r>
-              <a:t>Results</a:t>
-            </a:r>
-          </a:p>
-        </p:txBody>
-      </p:sp>
-      <p:sp>
-        <p:nvSpPr>
-          <p:cNvPr id="3" name="Content Placeholder 2"/>
-          <p:cNvSpPr>
-            <a:spLocks noGrp="1"/>
-          </p:cNvSpPr>
-          <p:nvPr>
-            <p:ph idx="1"/>
-          </p:nvPr>
-        </p:nvSpPr>
-        <p:spPr/>
-        <p:txBody>
-          <a:bodyPr/>
-          <a:lstStyle/>
-          <a:p>
-            <a:pPr>
-              <a:defRPr sz="2000"/>
-            </a:pPr>
-            <a:r>
-              <a:t>Naive Bayes — Train (pure): 60.4%, Test (pure): 41.7%, Test (seasonal): 50.0%</a:t>
-            </a:r>
-          </a:p>
-          <a:p>
-            <a:pPr>
-              <a:defRPr sz="2000"/>
-            </a:pPr>
-            <a:r>
-              <a:t>Logistic Regression — Train (pure): 79.2%, Test (pure): 50.0%, Test (seasonal): 66.7%</a:t>
-            </a:r>
-          </a:p>
-          <a:p>
-            <a:pPr>
-              <a:defRPr sz="2000"/>
-            </a:pPr>
-            <a:r>
-              <a:t>Logistic Regression performs best in seasonal mode.</a:t>
-            </a:r>
-          </a:p>
-          <a:p>
-            <a:pPr>
-              <a:defRPr sz="2000"/>
-            </a:pPr>
-            <a:r>
-              <a:t>Small dataset and high voter subjectivity limit accuracy.</a:t>
+          <p:cNvPr id="2" name="Rectangle 1"/>
+          <p:cNvSpPr/>
+          <p:nvPr/>
+        </p:nvSpPr>
+        <p:spPr>
+          <a:xfrm>
+            <a:off x="0" y="0"/>
+            <a:ext cx="9144000" cy="1005840"/>
+          </a:xfrm>
+          <a:prstGeom prst="rect">
+            <a:avLst/>
+          </a:prstGeom>
+          <a:solidFill>
+            <a:srgbClr val="1E3C72"/>
+          </a:solidFill>
+          <a:ln>
+            <a:noFill/>
+          </a:ln>
+        </p:spPr>
+        <p:style>
+          <a:lnRef idx="1">
+            <a:schemeClr val="accent1"/>
+          </a:lnRef>
+          <a:fillRef idx="3">
+            <a:schemeClr val="accent1"/>
+          </a:fillRef>
+          <a:effectRef idx="2">
+            <a:schemeClr val="accent1"/>
+          </a:effectRef>
+          <a:fontRef idx="minor">
+            <a:schemeClr val="lt1"/>
+          </a:fontRef>
+        </p:style>
+        <p:txBody>
+          <a:bodyPr rtlCol="0" anchor="ctr"/>
+          <a:lstStyle/>
+          <a:p>
+            <a:pPr algn="ctr"/>
+          </a:p>
+        </p:txBody>
+      </p:sp>
+      <p:sp>
+        <p:nvSpPr>
+          <p:cNvPr id="3" name="TextBox 2"/>
+          <p:cNvSpPr txBox="1"/>
+          <p:nvPr/>
+        </p:nvSpPr>
+        <p:spPr>
+          <a:xfrm>
+            <a:off x="457200" y="228600"/>
+            <a:ext cx="8229600" cy="640080"/>
+          </a:xfrm>
+          <a:prstGeom prst="rect">
+            <a:avLst/>
+          </a:prstGeom>
+          <a:noFill/>
+        </p:spPr>
+        <p:txBody>
+          <a:bodyPr wrap="none">
+            <a:spAutoFit/>
+          </a:bodyPr>
+          <a:lstStyle/>
+          <a:p>
+            <a:pPr>
+              <a:defRPr sz="2800" b="1">
+                <a:solidFill>
+                  <a:srgbClr val="FFFFFF"/>
+                </a:solidFill>
+                <a:latin typeface="Calibri"/>
+              </a:defRPr>
+            </a:pPr>
+            <a:r>
+              <a:t>Data Source</a:t>
+            </a:r>
+          </a:p>
+        </p:txBody>
+      </p:sp>
+      <p:sp>
+        <p:nvSpPr>
+          <p:cNvPr id="4" name="TextBox 3"/>
+          <p:cNvSpPr txBox="1"/>
+          <p:nvPr/>
+        </p:nvSpPr>
+        <p:spPr>
+          <a:xfrm>
+            <a:off x="457200" y="1280160"/>
+            <a:ext cx="8229600" cy="365760"/>
+          </a:xfrm>
+          <a:prstGeom prst="rect">
+            <a:avLst/>
+          </a:prstGeom>
+          <a:noFill/>
+        </p:spPr>
+        <p:txBody>
+          <a:bodyPr wrap="none">
+            <a:spAutoFit/>
+          </a:bodyPr>
+          <a:lstStyle/>
+          <a:p>
+            <a:pPr>
+              <a:defRPr sz="1600" i="1">
+                <a:solidFill>
+                  <a:srgbClr val="333333"/>
+                </a:solidFill>
+              </a:defRPr>
+            </a:pPr>
+            <a:r>
+              <a:t>Where the data came from</a:t>
+            </a:r>
+          </a:p>
+        </p:txBody>
+      </p:sp>
+      <p:sp>
+        <p:nvSpPr>
+          <p:cNvPr id="5" name="TextBox 4"/>
+          <p:cNvSpPr txBox="1"/>
+          <p:nvPr/>
+        </p:nvSpPr>
+        <p:spPr>
+          <a:xfrm>
+            <a:off x="548640" y="1737360"/>
+            <a:ext cx="8046720" cy="5029200"/>
+          </a:xfrm>
+          <a:prstGeom prst="rect">
+            <a:avLst/>
+          </a:prstGeom>
+          <a:noFill/>
+        </p:spPr>
+        <p:txBody>
+          <a:bodyPr wrap="square">
+            <a:spAutoFit/>
+          </a:bodyPr>
+          <a:lstStyle/>
+          <a:p>
+            <a:pPr>
+              <a:spcAft>
+                <a:spcPts val="600"/>
+              </a:spcAft>
+              <a:defRPr sz="2000">
+                <a:solidFill>
+                  <a:srgbClr val="333333"/>
+                </a:solidFill>
+              </a:defRPr>
+            </a:pPr>
+            <a:r>
+              <a:t>Primary source: Basketball-Reference (per-game player statistics + MVP voting shares).</a:t>
+            </a:r>
+          </a:p>
+          <a:p>
+            <a:pPr>
+              <a:spcAft>
+                <a:spcPts val="600"/>
+              </a:spcAft>
+              <a:defRPr sz="2000">
+                <a:solidFill>
+                  <a:srgbClr val="333333"/>
+                </a:solidFill>
+              </a:defRPr>
+            </a:pPr>
+            <a:r>
+              <a:t>Downloaded via Kaggle dataset: '1982-2022 NBA Player Statistics with MVP Votes'.</a:t>
+            </a:r>
+          </a:p>
+          <a:p>
+            <a:pPr>
+              <a:spcAft>
+                <a:spcPts val="600"/>
+              </a:spcAft>
+              <a:defRPr sz="2000">
+                <a:solidFill>
+                  <a:srgbClr val="333333"/>
+                </a:solidFill>
+              </a:defRPr>
+            </a:pPr>
+            <a:r>
+              <a:t>Timeframe used: 2000-01 to 2019-20 (20 seasons).</a:t>
+            </a:r>
+          </a:p>
+          <a:p>
+            <a:pPr>
+              <a:spcAft>
+                <a:spcPts val="600"/>
+              </a:spcAft>
+              <a:defRPr sz="2000">
+                <a:solidFill>
+                  <a:srgbClr val="333333"/>
+                </a:solidFill>
+              </a:defRPr>
+            </a:pPr>
+            <a:r>
+              <a:t>For each season, we selected the top 3 players by MVP award share as finalists.</a:t>
+            </a:r>
+          </a:p>
+          <a:p>
+            <a:pPr>
+              <a:spcAft>
+                <a:spcPts val="600"/>
+              </a:spcAft>
+              <a:defRPr sz="2000">
+                <a:solidFill>
+                  <a:srgbClr val="333333"/>
+                </a:solidFill>
+              </a:defRPr>
+            </a:pPr>
+            <a:r>
+              <a:t>The finalist with the highest award share is labeled MVP (1), the others non-MVP (0).</a:t>
             </a:r>
           </a:p>
         </p:txBody>
@@ -4379,6 +8873,14 @@
 <file path=ppt/slides/slide8.xml><?xml version="1.0" encoding="utf-8"?>
 <p:sld xmlns:a="http://schemas.openxmlformats.org/drawingml/2006/main" xmlns:p="http://schemas.openxmlformats.org/presentationml/2006/main" xmlns:r="http://schemas.openxmlformats.org/officeDocument/2006/relationships">
   <p:cSld>
+    <p:bg>
+      <p:bgPr>
+        <a:solidFill>
+          <a:srgbClr val="FFFFFF"/>
+        </a:solidFill>
+        <a:effectLst/>
+      </p:bgPr>
+    </p:bg>
     <p:spTree>
       <p:nvGrpSpPr>
         <p:cNvPr id="1" name=""/>
@@ -4388,19 +8890,45 @@
       <p:grpSpPr/>
       <p:sp>
         <p:nvSpPr>
-          <p:cNvPr id="2" name="Title 1"/>
-          <p:cNvSpPr>
-            <a:spLocks noGrp="1"/>
-          </p:cNvSpPr>
-          <p:nvPr>
-            <p:ph type="title"/>
-          </p:nvPr>
-        </p:nvSpPr>
-        <p:spPr/>
-        <p:txBody>
-          <a:bodyPr/>
-          <a:lstStyle/>
-          <a:p/>
+          <p:cNvPr id="2" name="Rectangle 1"/>
+          <p:cNvSpPr/>
+          <p:nvPr/>
+        </p:nvSpPr>
+        <p:spPr>
+          <a:xfrm>
+            <a:off x="0" y="0"/>
+            <a:ext cx="9144000" cy="1005840"/>
+          </a:xfrm>
+          <a:prstGeom prst="rect">
+            <a:avLst/>
+          </a:prstGeom>
+          <a:solidFill>
+            <a:srgbClr val="1E3C72"/>
+          </a:solidFill>
+          <a:ln>
+            <a:noFill/>
+          </a:ln>
+        </p:spPr>
+        <p:style>
+          <a:lnRef idx="1">
+            <a:schemeClr val="accent1"/>
+          </a:lnRef>
+          <a:fillRef idx="3">
+            <a:schemeClr val="accent1"/>
+          </a:fillRef>
+          <a:effectRef idx="2">
+            <a:schemeClr val="accent1"/>
+          </a:effectRef>
+          <a:fontRef idx="minor">
+            <a:schemeClr val="lt1"/>
+          </a:fontRef>
+        </p:style>
+        <p:txBody>
+          <a:bodyPr rtlCol="0" anchor="ctr"/>
+          <a:lstStyle/>
+          <a:p>
+            <a:pPr algn="ctr"/>
+          </a:p>
         </p:txBody>
       </p:sp>
       <p:sp>
@@ -4411,8 +8939,8 @@
         </p:nvSpPr>
         <p:spPr>
           <a:xfrm>
-            <a:off x="457200" y="274320"/>
-            <a:ext cx="8229600" cy="731520"/>
+            <a:off x="457200" y="228600"/>
+            <a:ext cx="8229600" cy="640080"/>
           </a:xfrm>
           <a:prstGeom prst="rect">
             <a:avLst/>
@@ -4426,10 +8954,15 @@
           <a:lstStyle/>
           <a:p>
             <a:pPr>
-              <a:defRPr sz="3200" b="1"/>
-            </a:pPr>
-            <a:r>
-              <a:t>Accuracy Comparison</a:t>
+              <a:defRPr sz="2800" b="1">
+                <a:solidFill>
+                  <a:srgbClr val="FFFFFF"/>
+                </a:solidFill>
+                <a:latin typeface="Calibri"/>
+              </a:defRPr>
+            </a:pPr>
+            <a:r>
+              <a:t>Dataset Summary</a:t>
             </a:r>
           </a:p>
         </p:txBody>
@@ -4442,8 +8975,8 @@
         </p:nvSpPr>
         <p:spPr>
           <a:xfrm>
-            <a:off x="457200" y="1188720"/>
-            <a:ext cx="2743200" cy="5486400"/>
+            <a:off x="457200" y="1280160"/>
+            <a:ext cx="8229600" cy="365760"/>
           </a:xfrm>
           <a:prstGeom prst="rect">
             <a:avLst/>
@@ -4457,54 +8990,404 @@
           <a:lstStyle/>
           <a:p>
             <a:pPr>
-              <a:defRPr sz="1600"/>
-            </a:pPr>
-            <a:r>
-              <a:t>Logistic Regression generalizes better in seasonal mode.</a:t>
-            </a:r>
-          </a:p>
-          <a:p>
-            <a:pPr>
-              <a:defRPr sz="1600"/>
-            </a:pPr>
-            <a:r>
-              <a:t>Naive Bayes struggles with correlated features.</a:t>
-            </a:r>
-          </a:p>
-          <a:p>
-            <a:pPr>
-              <a:defRPr sz="1600"/>
-            </a:pPr>
-            <a:r>
-              <a:t>Both models show a train-test gap, indicating limited data.</a:t>
-            </a:r>
-          </a:p>
-        </p:txBody>
-      </p:sp>
-      <p:pic>
-        <p:nvPicPr>
-          <p:cNvPr id="5" name="Picture 4" descr="accuracy_comparison.png"/>
-          <p:cNvPicPr>
-            <a:picLocks noChangeAspect="1"/>
-          </p:cNvPicPr>
+              <a:defRPr sz="1400" i="1">
+                <a:solidFill>
+                  <a:srgbClr val="333333"/>
+                </a:solidFill>
+              </a:defRPr>
+            </a:pPr>
+            <a:r>
+              <a:t>Key numbers for the dataset</a:t>
+            </a:r>
+          </a:p>
+        </p:txBody>
+      </p:sp>
+      <p:graphicFrame>
+        <p:nvGraphicFramePr>
+          <p:cNvPr id="5" name="Table 4"/>
+          <p:cNvGraphicFramePr>
+            <a:graphicFrameLocks noGrp="1"/>
+          </p:cNvGraphicFramePr>
           <p:nvPr/>
-        </p:nvPicPr>
-        <p:blipFill>
-          <a:blip r:embed="rId2"/>
-          <a:stretch>
-            <a:fillRect/>
-          </a:stretch>
-        </p:blipFill>
-        <p:spPr>
-          <a:xfrm>
-            <a:off x="3474720" y="1188720"/>
-            <a:ext cx="5029200" cy="3143250"/>
-          </a:xfrm>
-          <a:prstGeom prst="rect">
-            <a:avLst/>
-          </a:prstGeom>
-        </p:spPr>
-      </p:pic>
+        </p:nvGraphicFramePr>
+        <p:xfrm>
+          <a:off x="731520" y="1874520"/>
+          <a:ext cx="7680960" cy="5120640"/>
+        </p:xfrm>
+        <a:graphic>
+          <a:graphicData uri="http://schemas.openxmlformats.org/drawingml/2006/table">
+            <a:tbl>
+              <a:tblPr firstRow="1" bandRow="1">
+                <a:tableStyleId>{5C22544A-7EE6-4342-B048-85BDC9FD1C3A}</a:tableStyleId>
+              </a:tblPr>
+              <a:tblGrid>
+                <a:gridCol w="3840480"/>
+                <a:gridCol w="3840480"/>
+              </a:tblGrid>
+              <a:tr h="640080">
+                <a:tc>
+                  <a:txBody>
+                    <a:bodyPr/>
+                    <a:lstStyle/>
+                    <a:p>
+                      <a:pPr algn="ctr">
+                        <a:defRPr sz="1600" b="1">
+                          <a:solidFill>
+                            <a:srgbClr val="FFFFFF"/>
+                          </a:solidFill>
+                        </a:defRPr>
+                      </a:pPr>
+                      <a:r>
+                        <a:t>Property</a:t>
+                      </a:r>
+                    </a:p>
+                  </a:txBody>
+                  <a:tcPr>
+                    <a:solidFill>
+                      <a:srgbClr val="1E3C72"/>
+                    </a:solidFill>
+                  </a:tcPr>
+                </a:tc>
+                <a:tc>
+                  <a:txBody>
+                    <a:bodyPr/>
+                    <a:lstStyle/>
+                    <a:p>
+                      <a:pPr algn="ctr">
+                        <a:defRPr sz="1600" b="1">
+                          <a:solidFill>
+                            <a:srgbClr val="FFFFFF"/>
+                          </a:solidFill>
+                        </a:defRPr>
+                      </a:pPr>
+                      <a:r>
+                        <a:t>Value</a:t>
+                      </a:r>
+                    </a:p>
+                  </a:txBody>
+                  <a:tcPr>
+                    <a:solidFill>
+                      <a:srgbClr val="1E3C72"/>
+                    </a:solidFill>
+                  </a:tcPr>
+                </a:tc>
+              </a:tr>
+              <a:tr h="640080">
+                <a:tc>
+                  <a:txBody>
+                    <a:bodyPr/>
+                    <a:lstStyle/>
+                    <a:p>
+                      <a:pPr algn="ctr">
+                        <a:defRPr sz="1500">
+                          <a:solidFill>
+                            <a:srgbClr val="333333"/>
+                          </a:solidFill>
+                        </a:defRPr>
+                      </a:pPr>
+                      <a:r>
+                        <a:t>Total rows</a:t>
+                      </a:r>
+                    </a:p>
+                  </a:txBody>
+                  <a:tcPr>
+                    <a:solidFill>
+                      <a:srgbClr val="F5F5F5"/>
+                    </a:solidFill>
+                  </a:tcPr>
+                </a:tc>
+                <a:tc>
+                  <a:txBody>
+                    <a:bodyPr/>
+                    <a:lstStyle/>
+                    <a:p>
+                      <a:pPr algn="ctr">
+                        <a:defRPr sz="1500">
+                          <a:solidFill>
+                            <a:srgbClr val="333333"/>
+                          </a:solidFill>
+                        </a:defRPr>
+                      </a:pPr>
+                      <a:r>
+                        <a:t>60</a:t>
+                      </a:r>
+                    </a:p>
+                  </a:txBody>
+                  <a:tcPr>
+                    <a:solidFill>
+                      <a:srgbClr val="F5F5F5"/>
+                    </a:solidFill>
+                  </a:tcPr>
+                </a:tc>
+              </a:tr>
+              <a:tr h="640080">
+                <a:tc>
+                  <a:txBody>
+                    <a:bodyPr/>
+                    <a:lstStyle/>
+                    <a:p>
+                      <a:pPr algn="ctr">
+                        <a:defRPr sz="1500">
+                          <a:solidFill>
+                            <a:srgbClr val="333333"/>
+                          </a:solidFill>
+                        </a:defRPr>
+                      </a:pPr>
+                      <a:r>
+                        <a:t>Seasons</a:t>
+                      </a:r>
+                    </a:p>
+                  </a:txBody>
+                  <a:tcPr/>
+                </a:tc>
+                <a:tc>
+                  <a:txBody>
+                    <a:bodyPr/>
+                    <a:lstStyle/>
+                    <a:p>
+                      <a:pPr algn="ctr">
+                        <a:defRPr sz="1500">
+                          <a:solidFill>
+                            <a:srgbClr val="333333"/>
+                          </a:solidFill>
+                        </a:defRPr>
+                      </a:pPr>
+                      <a:r>
+                        <a:t>2000-01 to 2019-20</a:t>
+                      </a:r>
+                    </a:p>
+                  </a:txBody>
+                  <a:tcPr/>
+                </a:tc>
+              </a:tr>
+              <a:tr h="640080">
+                <a:tc>
+                  <a:txBody>
+                    <a:bodyPr/>
+                    <a:lstStyle/>
+                    <a:p>
+                      <a:pPr algn="ctr">
+                        <a:defRPr sz="1500">
+                          <a:solidFill>
+                            <a:srgbClr val="333333"/>
+                          </a:solidFill>
+                        </a:defRPr>
+                      </a:pPr>
+                      <a:r>
+                        <a:t>Rows per season</a:t>
+                      </a:r>
+                    </a:p>
+                  </a:txBody>
+                  <a:tcPr>
+                    <a:solidFill>
+                      <a:srgbClr val="F5F5F5"/>
+                    </a:solidFill>
+                  </a:tcPr>
+                </a:tc>
+                <a:tc>
+                  <a:txBody>
+                    <a:bodyPr/>
+                    <a:lstStyle/>
+                    <a:p>
+                      <a:pPr algn="ctr">
+                        <a:defRPr sz="1500">
+                          <a:solidFill>
+                            <a:srgbClr val="333333"/>
+                          </a:solidFill>
+                        </a:defRPr>
+                      </a:pPr>
+                      <a:r>
+                        <a:t>Top 3 finalists</a:t>
+                      </a:r>
+                    </a:p>
+                  </a:txBody>
+                  <a:tcPr>
+                    <a:solidFill>
+                      <a:srgbClr val="F5F5F5"/>
+                    </a:solidFill>
+                  </a:tcPr>
+                </a:tc>
+              </a:tr>
+              <a:tr h="640080">
+                <a:tc>
+                  <a:txBody>
+                    <a:bodyPr/>
+                    <a:lstStyle/>
+                    <a:p>
+                      <a:pPr algn="ctr">
+                        <a:defRPr sz="1500">
+                          <a:solidFill>
+                            <a:srgbClr val="333333"/>
+                          </a:solidFill>
+                        </a:defRPr>
+                      </a:pPr>
+                      <a:r>
+                        <a:t>Training rows</a:t>
+                      </a:r>
+                    </a:p>
+                  </a:txBody>
+                  <a:tcPr/>
+                </a:tc>
+                <a:tc>
+                  <a:txBody>
+                    <a:bodyPr/>
+                    <a:lstStyle/>
+                    <a:p>
+                      <a:pPr algn="ctr">
+                        <a:defRPr sz="1500">
+                          <a:solidFill>
+                            <a:srgbClr val="333333"/>
+                          </a:solidFill>
+                        </a:defRPr>
+                      </a:pPr>
+                      <a:r>
+                        <a:t>48 (2000-01 to 2015-16)</a:t>
+                      </a:r>
+                    </a:p>
+                  </a:txBody>
+                  <a:tcPr/>
+                </a:tc>
+              </a:tr>
+              <a:tr h="640080">
+                <a:tc>
+                  <a:txBody>
+                    <a:bodyPr/>
+                    <a:lstStyle/>
+                    <a:p>
+                      <a:pPr algn="ctr">
+                        <a:defRPr sz="1500">
+                          <a:solidFill>
+                            <a:srgbClr val="333333"/>
+                          </a:solidFill>
+                        </a:defRPr>
+                      </a:pPr>
+                      <a:r>
+                        <a:t>Test rows</a:t>
+                      </a:r>
+                    </a:p>
+                  </a:txBody>
+                  <a:tcPr>
+                    <a:solidFill>
+                      <a:srgbClr val="F5F5F5"/>
+                    </a:solidFill>
+                  </a:tcPr>
+                </a:tc>
+                <a:tc>
+                  <a:txBody>
+                    <a:bodyPr/>
+                    <a:lstStyle/>
+                    <a:p>
+                      <a:pPr algn="ctr">
+                        <a:defRPr sz="1500">
+                          <a:solidFill>
+                            <a:srgbClr val="333333"/>
+                          </a:solidFill>
+                        </a:defRPr>
+                      </a:pPr>
+                      <a:r>
+                        <a:t>12 (2016-17 to 2019-20)</a:t>
+                      </a:r>
+                    </a:p>
+                  </a:txBody>
+                  <a:tcPr>
+                    <a:solidFill>
+                      <a:srgbClr val="F5F5F5"/>
+                    </a:solidFill>
+                  </a:tcPr>
+                </a:tc>
+              </a:tr>
+              <a:tr h="640080">
+                <a:tc>
+                  <a:txBody>
+                    <a:bodyPr/>
+                    <a:lstStyle/>
+                    <a:p>
+                      <a:pPr algn="ctr">
+                        <a:defRPr sz="1500">
+                          <a:solidFill>
+                            <a:srgbClr val="333333"/>
+                          </a:solidFill>
+                        </a:defRPr>
+                      </a:pPr>
+                      <a:r>
+                        <a:t>Features</a:t>
+                      </a:r>
+                    </a:p>
+                  </a:txBody>
+                  <a:tcPr/>
+                </a:tc>
+                <a:tc>
+                  <a:txBody>
+                    <a:bodyPr/>
+                    <a:lstStyle/>
+                    <a:p>
+                      <a:pPr algn="ctr">
+                        <a:defRPr sz="1500">
+                          <a:solidFill>
+                            <a:srgbClr val="333333"/>
+                          </a:solidFill>
+                        </a:defRPr>
+                      </a:pPr>
+                      <a:r>
+                        <a:t>10 per-game statistics</a:t>
+                      </a:r>
+                    </a:p>
+                  </a:txBody>
+                  <a:tcPr/>
+                </a:tc>
+              </a:tr>
+              <a:tr h="640080">
+                <a:tc>
+                  <a:txBody>
+                    <a:bodyPr/>
+                    <a:lstStyle/>
+                    <a:p>
+                      <a:pPr algn="ctr">
+                        <a:defRPr sz="1500">
+                          <a:solidFill>
+                            <a:srgbClr val="333333"/>
+                          </a:solidFill>
+                        </a:defRPr>
+                      </a:pPr>
+                      <a:r>
+                        <a:t>Target</a:t>
+                      </a:r>
+                    </a:p>
+                  </a:txBody>
+                  <a:tcPr>
+                    <a:solidFill>
+                      <a:srgbClr val="F5F5F5"/>
+                    </a:solidFill>
+                  </a:tcPr>
+                </a:tc>
+                <a:tc>
+                  <a:txBody>
+                    <a:bodyPr/>
+                    <a:lstStyle/>
+                    <a:p>
+                      <a:pPr algn="ctr">
+                        <a:defRPr sz="1500">
+                          <a:solidFill>
+                            <a:srgbClr val="333333"/>
+                          </a:solidFill>
+                        </a:defRPr>
+                      </a:pPr>
+                      <a:r>
+                        <a:t>MVP (1) / Non-MVP (0)</a:t>
+                      </a:r>
+                    </a:p>
+                  </a:txBody>
+                  <a:tcPr>
+                    <a:solidFill>
+                      <a:srgbClr val="F5F5F5"/>
+                    </a:solidFill>
+                  </a:tcPr>
+                </a:tc>
+              </a:tr>
+            </a:tbl>
+          </a:graphicData>
+        </a:graphic>
+      </p:graphicFrame>
     </p:spTree>
   </p:cSld>
   <p:clrMapOvr>
@@ -4516,6 +9399,14 @@
 <file path=ppt/slides/slide9.xml><?xml version="1.0" encoding="utf-8"?>
 <p:sld xmlns:a="http://schemas.openxmlformats.org/drawingml/2006/main" xmlns:p="http://schemas.openxmlformats.org/presentationml/2006/main" xmlns:r="http://schemas.openxmlformats.org/officeDocument/2006/relationships">
   <p:cSld>
+    <p:bg>
+      <p:bgPr>
+        <a:solidFill>
+          <a:srgbClr val="FFFFFF"/>
+        </a:solidFill>
+        <a:effectLst/>
+      </p:bgPr>
+    </p:bg>
     <p:spTree>
       <p:nvGrpSpPr>
         <p:cNvPr id="1" name=""/>
@@ -4525,19 +9416,45 @@
       <p:grpSpPr/>
       <p:sp>
         <p:nvSpPr>
-          <p:cNvPr id="2" name="Title 1"/>
-          <p:cNvSpPr>
-            <a:spLocks noGrp="1"/>
-          </p:cNvSpPr>
-          <p:nvPr>
-            <p:ph type="title"/>
-          </p:nvPr>
-        </p:nvSpPr>
-        <p:spPr/>
-        <p:txBody>
-          <a:bodyPr/>
-          <a:lstStyle/>
-          <a:p/>
+          <p:cNvPr id="2" name="Rectangle 1"/>
+          <p:cNvSpPr/>
+          <p:nvPr/>
+        </p:nvSpPr>
+        <p:spPr>
+          <a:xfrm>
+            <a:off x="0" y="0"/>
+            <a:ext cx="9144000" cy="1005840"/>
+          </a:xfrm>
+          <a:prstGeom prst="rect">
+            <a:avLst/>
+          </a:prstGeom>
+          <a:solidFill>
+            <a:srgbClr val="1E3C72"/>
+          </a:solidFill>
+          <a:ln>
+            <a:noFill/>
+          </a:ln>
+        </p:spPr>
+        <p:style>
+          <a:lnRef idx="1">
+            <a:schemeClr val="accent1"/>
+          </a:lnRef>
+          <a:fillRef idx="3">
+            <a:schemeClr val="accent1"/>
+          </a:fillRef>
+          <a:effectRef idx="2">
+            <a:schemeClr val="accent1"/>
+          </a:effectRef>
+          <a:fontRef idx="minor">
+            <a:schemeClr val="lt1"/>
+          </a:fontRef>
+        </p:style>
+        <p:txBody>
+          <a:bodyPr rtlCol="0" anchor="ctr"/>
+          <a:lstStyle/>
+          <a:p>
+            <a:pPr algn="ctr"/>
+          </a:p>
         </p:txBody>
       </p:sp>
       <p:sp>
@@ -4548,8 +9465,8 @@
         </p:nvSpPr>
         <p:spPr>
           <a:xfrm>
-            <a:off x="457200" y="274320"/>
-            <a:ext cx="8229600" cy="731520"/>
+            <a:off x="457200" y="228600"/>
+            <a:ext cx="8229600" cy="640080"/>
           </a:xfrm>
           <a:prstGeom prst="rect">
             <a:avLst/>
@@ -4563,38 +9480,227 @@
           <a:lstStyle/>
           <a:p>
             <a:pPr>
-              <a:defRPr sz="3200" b="1"/>
-            </a:pPr>
-            <a:r>
-              <a:t>Confusion Matrices (Pure Mode)</a:t>
-            </a:r>
-          </a:p>
-        </p:txBody>
-      </p:sp>
-      <p:pic>
-        <p:nvPicPr>
-          <p:cNvPr id="4" name="Picture 3" descr="confusion_matrices.png"/>
-          <p:cNvPicPr>
-            <a:picLocks noChangeAspect="1"/>
-          </p:cNvPicPr>
+              <a:defRPr sz="2800" b="1">
+                <a:solidFill>
+                  <a:srgbClr val="FFFFFF"/>
+                </a:solidFill>
+                <a:latin typeface="Calibri"/>
+              </a:defRPr>
+            </a:pPr>
+            <a:r>
+              <a:t>Features Used</a:t>
+            </a:r>
+          </a:p>
+        </p:txBody>
+      </p:sp>
+      <p:sp>
+        <p:nvSpPr>
+          <p:cNvPr id="4" name="TextBox 3"/>
+          <p:cNvSpPr txBox="1"/>
           <p:nvPr/>
-        </p:nvPicPr>
-        <p:blipFill>
-          <a:blip r:embed="rId2"/>
-          <a:stretch>
-            <a:fillRect/>
-          </a:stretch>
-        </p:blipFill>
-        <p:spPr>
-          <a:xfrm>
-            <a:off x="914400" y="1097280"/>
-            <a:ext cx="7315200" cy="2926080"/>
+        </p:nvSpPr>
+        <p:spPr>
+          <a:xfrm>
+            <a:off x="457200" y="1280160"/>
+            <a:ext cx="8229600" cy="365760"/>
           </a:xfrm>
           <a:prstGeom prst="rect">
             <a:avLst/>
           </a:prstGeom>
-        </p:spPr>
-      </p:pic>
+          <a:noFill/>
+        </p:spPr>
+        <p:txBody>
+          <a:bodyPr wrap="none">
+            <a:spAutoFit/>
+          </a:bodyPr>
+          <a:lstStyle/>
+          <a:p>
+            <a:pPr>
+              <a:defRPr sz="1600" i="1">
+                <a:solidFill>
+                  <a:srgbClr val="333333"/>
+                </a:solidFill>
+              </a:defRPr>
+            </a:pPr>
+            <a:r>
+              <a:t>Ten statistics selected to match the reference sample project</a:t>
+            </a:r>
+          </a:p>
+        </p:txBody>
+      </p:sp>
+      <p:sp>
+        <p:nvSpPr>
+          <p:cNvPr id="5" name="TextBox 4"/>
+          <p:cNvSpPr txBox="1"/>
+          <p:nvPr/>
+        </p:nvSpPr>
+        <p:spPr>
+          <a:xfrm>
+            <a:off x="548640" y="1737360"/>
+            <a:ext cx="8046720" cy="5029200"/>
+          </a:xfrm>
+          <a:prstGeom prst="rect">
+            <a:avLst/>
+          </a:prstGeom>
+          <a:noFill/>
+        </p:spPr>
+        <p:txBody>
+          <a:bodyPr wrap="square">
+            <a:spAutoFit/>
+          </a:bodyPr>
+          <a:lstStyle/>
+          <a:p>
+            <a:pPr>
+              <a:spcAft>
+                <a:spcPts val="600"/>
+              </a:spcAft>
+              <a:defRPr sz="2000">
+                <a:solidFill>
+                  <a:srgbClr val="333333"/>
+                </a:solidFill>
+              </a:defRPr>
+            </a:pPr>
+            <a:r>
+              <a:t>Games played (g) — availability and durability</a:t>
+            </a:r>
+          </a:p>
+          <a:p>
+            <a:pPr>
+              <a:spcAft>
+                <a:spcPts val="600"/>
+              </a:spcAft>
+              <a:defRPr sz="2000">
+                <a:solidFill>
+                  <a:srgbClr val="333333"/>
+                </a:solidFill>
+              </a:defRPr>
+            </a:pPr>
+            <a:r>
+              <a:t>Minutes per game (mp_per_g) — playing time</a:t>
+            </a:r>
+          </a:p>
+          <a:p>
+            <a:pPr>
+              <a:spcAft>
+                <a:spcPts val="600"/>
+              </a:spcAft>
+              <a:defRPr sz="2000">
+                <a:solidFill>
+                  <a:srgbClr val="333333"/>
+                </a:solidFill>
+              </a:defRPr>
+            </a:pPr>
+            <a:r>
+              <a:t>Field goal percentage (fg_pct) — scoring efficiency</a:t>
+            </a:r>
+          </a:p>
+          <a:p>
+            <a:pPr>
+              <a:spcAft>
+                <a:spcPts val="600"/>
+              </a:spcAft>
+              <a:defRPr sz="2000">
+                <a:solidFill>
+                  <a:srgbClr val="333333"/>
+                </a:solidFill>
+              </a:defRPr>
+            </a:pPr>
+            <a:r>
+              <a:t>3-point percentage (fg3_pct) — outside shooting</a:t>
+            </a:r>
+          </a:p>
+          <a:p>
+            <a:pPr>
+              <a:spcAft>
+                <a:spcPts val="600"/>
+              </a:spcAft>
+              <a:defRPr sz="2000">
+                <a:solidFill>
+                  <a:srgbClr val="333333"/>
+                </a:solidFill>
+              </a:defRPr>
+            </a:pPr>
+            <a:r>
+              <a:t>Free throw percentage (ft_pct) — free-throw efficiency</a:t>
+            </a:r>
+          </a:p>
+          <a:p>
+            <a:pPr>
+              <a:spcAft>
+                <a:spcPts val="600"/>
+              </a:spcAft>
+              <a:defRPr sz="2000">
+                <a:solidFill>
+                  <a:srgbClr val="333333"/>
+                </a:solidFill>
+              </a:defRPr>
+            </a:pPr>
+            <a:r>
+              <a:t>Total rebounds per game (trb_per_g) — all-around contribution</a:t>
+            </a:r>
+          </a:p>
+          <a:p>
+            <a:pPr>
+              <a:spcAft>
+                <a:spcPts val="600"/>
+              </a:spcAft>
+              <a:defRPr sz="2000">
+                <a:solidFill>
+                  <a:srgbClr val="333333"/>
+                </a:solidFill>
+              </a:defRPr>
+            </a:pPr>
+            <a:r>
+              <a:t>Assists per game (ast_per_g) — playmaking</a:t>
+            </a:r>
+          </a:p>
+          <a:p>
+            <a:pPr>
+              <a:spcAft>
+                <a:spcPts val="600"/>
+              </a:spcAft>
+              <a:defRPr sz="2000">
+                <a:solidFill>
+                  <a:srgbClr val="333333"/>
+                </a:solidFill>
+              </a:defRPr>
+            </a:pPr>
+            <a:r>
+              <a:t>Steals per game (stl_per_g) — defensive activity</a:t>
+            </a:r>
+          </a:p>
+          <a:p>
+            <a:pPr>
+              <a:spcAft>
+                <a:spcPts val="600"/>
+              </a:spcAft>
+              <a:defRPr sz="2000">
+                <a:solidFill>
+                  <a:srgbClr val="333333"/>
+                </a:solidFill>
+              </a:defRPr>
+            </a:pPr>
+            <a:r>
+              <a:t>Blocks per game (blk_per_g) — rim protection</a:t>
+            </a:r>
+          </a:p>
+          <a:p>
+            <a:pPr>
+              <a:spcAft>
+                <a:spcPts val="600"/>
+              </a:spcAft>
+              <a:defRPr sz="2000">
+                <a:solidFill>
+                  <a:srgbClr val="333333"/>
+                </a:solidFill>
+              </a:defRPr>
+            </a:pPr>
+            <a:r>
+              <a:t>Points per game (pts_per_g) — offensive production</a:t>
+            </a:r>
+          </a:p>
+        </p:txBody>
+      </p:sp>
     </p:spTree>
   </p:cSld>
   <p:clrMapOvr>
